--- a/examples/showcase.pptx
+++ b/examples/showcase.pptx
@@ -34,9 +34,15 @@
     <p:sldId id="282" r:id="rId28"/>
     <p:sldId id="283" r:id="rId29"/>
     <p:sldId id="284" r:id="rId30"/>
+    <p:sldId id="285" r:id="rId31"/>
+    <p:sldId id="286" r:id="rId32"/>
+    <p:sldId id="287" r:id="rId33"/>
+    <p:sldId id="288" r:id="rId34"/>
+    <p:sldId id="289" r:id="rId35"/>
+    <p:sldId id="290" r:id="rId36"/>
   </p:sldIdLst>
   <p:notesMasterIdLst>
-    <p:notesMasterId r:id="rId31"/>
+    <p:notesMasterId r:id="rId37"/>
   </p:notesMasterIdLst>
   <p:sldSz cx="12191695" cy="6858000"/>
   <p:notesSz cx="6858000" cy="12191695"/>
@@ -2508,6 +2514,534 @@
 </p:notes>
 </file>
 
+<file path=ppt/notesSlides/notesSlide30.xml><?xml version="1.0" encoding="utf-8"?>
+<p:notes xmlns:a="http://schemas.openxmlformats.org/drawingml/2006/main" xmlns:r="http://schemas.openxmlformats.org/officeDocument/2006/relationships" xmlns:p="http://schemas.openxmlformats.org/presentationml/2006/main">
+  <p:cSld>
+    <p:spTree>
+      <p:nvGrpSpPr>
+        <p:cNvPr id="1" name=""/>
+        <p:cNvGrpSpPr/>
+        <p:nvPr/>
+      </p:nvGrpSpPr>
+      <p:grpSpPr>
+        <a:xfrm>
+          <a:off x="0" y="0"/>
+          <a:ext cx="0" cy="0"/>
+          <a:chOff x="0" y="0"/>
+          <a:chExt cx="0" cy="0"/>
+        </a:xfrm>
+      </p:grpSpPr>
+      <p:sp>
+        <p:nvSpPr>
+          <p:cNvPr id="2" name="Slide Image Placeholder 1"/>
+          <p:cNvSpPr>
+            <a:spLocks noGrp="1" noRot="1" noChangeAspect="1"/>
+          </p:cNvSpPr>
+          <p:nvPr>
+            <p:ph type="sldImg"/>
+          </p:nvPr>
+        </p:nvSpPr>
+        <p:spPr/>
+      </p:sp>
+      <p:sp>
+        <p:nvSpPr>
+          <p:cNvPr id="3" name="Notes Placeholder 2"/>
+          <p:cNvSpPr>
+            <a:spLocks noGrp="1"/>
+          </p:cNvSpPr>
+          <p:nvPr>
+            <p:ph type="body" idx="1"/>
+          </p:nvPr>
+        </p:nvSpPr>
+        <p:spPr/>
+        <p:txBody>
+          <a:bodyPr/>
+          <a:lstStyle/>
+          <a:p>
+            <a:r>
+              <a:rPr lang="en-US" dirty="0"/>
+              <a:t/>
+            </a:r>
+            <a:endParaRPr lang="en-US" dirty="0"/>
+          </a:p>
+        </p:txBody>
+      </p:sp>
+      <p:sp>
+        <p:nvSpPr>
+          <p:cNvPr id="4" name="Slide Number Placeholder 3"/>
+          <p:cNvSpPr>
+            <a:spLocks noGrp="1"/>
+          </p:cNvSpPr>
+          <p:nvPr>
+            <p:ph type="sldNum" sz="quarter" idx="10"/>
+          </p:nvPr>
+        </p:nvSpPr>
+        <p:spPr/>
+        <p:txBody>
+          <a:bodyPr/>
+          <a:lstStyle/>
+          <a:p>
+            <a:fld id="{F7021451-1387-4CA6-816F-3879F97B5CBC}" type="slidenum">
+              <a:rPr lang="en-US"/>
+              <a:t>30</a:t>
+            </a:fld>
+            <a:endParaRPr lang="en-US"/>
+          </a:p>
+        </p:txBody>
+      </p:sp>
+    </p:spTree>
+    <p:extLst>
+      <p:ext uri="{BB962C8B-B14F-4D97-AF65-F5344CB8AC3E}">
+        <p14:creationId xmlns:p14="http://schemas.microsoft.com/office/powerpoint/2010/main" val="1024086991"/>
+      </p:ext>
+    </p:extLst>
+  </p:cSld>
+  <p:clrMapOvr>
+    <a:masterClrMapping/>
+  </p:clrMapOvr>
+</p:notes>
+</file>
+
+<file path=ppt/notesSlides/notesSlide31.xml><?xml version="1.0" encoding="utf-8"?>
+<p:notes xmlns:a="http://schemas.openxmlformats.org/drawingml/2006/main" xmlns:r="http://schemas.openxmlformats.org/officeDocument/2006/relationships" xmlns:p="http://schemas.openxmlformats.org/presentationml/2006/main">
+  <p:cSld>
+    <p:spTree>
+      <p:nvGrpSpPr>
+        <p:cNvPr id="1" name=""/>
+        <p:cNvGrpSpPr/>
+        <p:nvPr/>
+      </p:nvGrpSpPr>
+      <p:grpSpPr>
+        <a:xfrm>
+          <a:off x="0" y="0"/>
+          <a:ext cx="0" cy="0"/>
+          <a:chOff x="0" y="0"/>
+          <a:chExt cx="0" cy="0"/>
+        </a:xfrm>
+      </p:grpSpPr>
+      <p:sp>
+        <p:nvSpPr>
+          <p:cNvPr id="2" name="Slide Image Placeholder 1"/>
+          <p:cNvSpPr>
+            <a:spLocks noGrp="1" noRot="1" noChangeAspect="1"/>
+          </p:cNvSpPr>
+          <p:nvPr>
+            <p:ph type="sldImg"/>
+          </p:nvPr>
+        </p:nvSpPr>
+        <p:spPr/>
+      </p:sp>
+      <p:sp>
+        <p:nvSpPr>
+          <p:cNvPr id="3" name="Notes Placeholder 2"/>
+          <p:cNvSpPr>
+            <a:spLocks noGrp="1"/>
+          </p:cNvSpPr>
+          <p:nvPr>
+            <p:ph type="body" idx="1"/>
+          </p:nvPr>
+        </p:nvSpPr>
+        <p:spPr/>
+        <p:txBody>
+          <a:bodyPr/>
+          <a:lstStyle/>
+          <a:p>
+            <a:r>
+              <a:rPr lang="en-US" dirty="0"/>
+              <a:t/>
+            </a:r>
+            <a:endParaRPr lang="en-US" dirty="0"/>
+          </a:p>
+        </p:txBody>
+      </p:sp>
+      <p:sp>
+        <p:nvSpPr>
+          <p:cNvPr id="4" name="Slide Number Placeholder 3"/>
+          <p:cNvSpPr>
+            <a:spLocks noGrp="1"/>
+          </p:cNvSpPr>
+          <p:nvPr>
+            <p:ph type="sldNum" sz="quarter" idx="10"/>
+          </p:nvPr>
+        </p:nvSpPr>
+        <p:spPr/>
+        <p:txBody>
+          <a:bodyPr/>
+          <a:lstStyle/>
+          <a:p>
+            <a:fld id="{F7021451-1387-4CA6-816F-3879F97B5CBC}" type="slidenum">
+              <a:rPr lang="en-US"/>
+              <a:t>31</a:t>
+            </a:fld>
+            <a:endParaRPr lang="en-US"/>
+          </a:p>
+        </p:txBody>
+      </p:sp>
+    </p:spTree>
+    <p:extLst>
+      <p:ext uri="{BB962C8B-B14F-4D97-AF65-F5344CB8AC3E}">
+        <p14:creationId xmlns:p14="http://schemas.microsoft.com/office/powerpoint/2010/main" val="1024086991"/>
+      </p:ext>
+    </p:extLst>
+  </p:cSld>
+  <p:clrMapOvr>
+    <a:masterClrMapping/>
+  </p:clrMapOvr>
+</p:notes>
+</file>
+
+<file path=ppt/notesSlides/notesSlide32.xml><?xml version="1.0" encoding="utf-8"?>
+<p:notes xmlns:a="http://schemas.openxmlformats.org/drawingml/2006/main" xmlns:r="http://schemas.openxmlformats.org/officeDocument/2006/relationships" xmlns:p="http://schemas.openxmlformats.org/presentationml/2006/main">
+  <p:cSld>
+    <p:spTree>
+      <p:nvGrpSpPr>
+        <p:cNvPr id="1" name=""/>
+        <p:cNvGrpSpPr/>
+        <p:nvPr/>
+      </p:nvGrpSpPr>
+      <p:grpSpPr>
+        <a:xfrm>
+          <a:off x="0" y="0"/>
+          <a:ext cx="0" cy="0"/>
+          <a:chOff x="0" y="0"/>
+          <a:chExt cx="0" cy="0"/>
+        </a:xfrm>
+      </p:grpSpPr>
+      <p:sp>
+        <p:nvSpPr>
+          <p:cNvPr id="2" name="Slide Image Placeholder 1"/>
+          <p:cNvSpPr>
+            <a:spLocks noGrp="1" noRot="1" noChangeAspect="1"/>
+          </p:cNvSpPr>
+          <p:nvPr>
+            <p:ph type="sldImg"/>
+          </p:nvPr>
+        </p:nvSpPr>
+        <p:spPr/>
+      </p:sp>
+      <p:sp>
+        <p:nvSpPr>
+          <p:cNvPr id="3" name="Notes Placeholder 2"/>
+          <p:cNvSpPr>
+            <a:spLocks noGrp="1"/>
+          </p:cNvSpPr>
+          <p:nvPr>
+            <p:ph type="body" idx="1"/>
+          </p:nvPr>
+        </p:nvSpPr>
+        <p:spPr/>
+        <p:txBody>
+          <a:bodyPr/>
+          <a:lstStyle/>
+          <a:p>
+            <a:r>
+              <a:rPr lang="en-US" dirty="0"/>
+              <a:t/>
+            </a:r>
+            <a:endParaRPr lang="en-US" dirty="0"/>
+          </a:p>
+        </p:txBody>
+      </p:sp>
+      <p:sp>
+        <p:nvSpPr>
+          <p:cNvPr id="4" name="Slide Number Placeholder 3"/>
+          <p:cNvSpPr>
+            <a:spLocks noGrp="1"/>
+          </p:cNvSpPr>
+          <p:nvPr>
+            <p:ph type="sldNum" sz="quarter" idx="10"/>
+          </p:nvPr>
+        </p:nvSpPr>
+        <p:spPr/>
+        <p:txBody>
+          <a:bodyPr/>
+          <a:lstStyle/>
+          <a:p>
+            <a:fld id="{F7021451-1387-4CA6-816F-3879F97B5CBC}" type="slidenum">
+              <a:rPr lang="en-US"/>
+              <a:t>32</a:t>
+            </a:fld>
+            <a:endParaRPr lang="en-US"/>
+          </a:p>
+        </p:txBody>
+      </p:sp>
+    </p:spTree>
+    <p:extLst>
+      <p:ext uri="{BB962C8B-B14F-4D97-AF65-F5344CB8AC3E}">
+        <p14:creationId xmlns:p14="http://schemas.microsoft.com/office/powerpoint/2010/main" val="1024086991"/>
+      </p:ext>
+    </p:extLst>
+  </p:cSld>
+  <p:clrMapOvr>
+    <a:masterClrMapping/>
+  </p:clrMapOvr>
+</p:notes>
+</file>
+
+<file path=ppt/notesSlides/notesSlide33.xml><?xml version="1.0" encoding="utf-8"?>
+<p:notes xmlns:a="http://schemas.openxmlformats.org/drawingml/2006/main" xmlns:r="http://schemas.openxmlformats.org/officeDocument/2006/relationships" xmlns:p="http://schemas.openxmlformats.org/presentationml/2006/main">
+  <p:cSld>
+    <p:spTree>
+      <p:nvGrpSpPr>
+        <p:cNvPr id="1" name=""/>
+        <p:cNvGrpSpPr/>
+        <p:nvPr/>
+      </p:nvGrpSpPr>
+      <p:grpSpPr>
+        <a:xfrm>
+          <a:off x="0" y="0"/>
+          <a:ext cx="0" cy="0"/>
+          <a:chOff x="0" y="0"/>
+          <a:chExt cx="0" cy="0"/>
+        </a:xfrm>
+      </p:grpSpPr>
+      <p:sp>
+        <p:nvSpPr>
+          <p:cNvPr id="2" name="Slide Image Placeholder 1"/>
+          <p:cNvSpPr>
+            <a:spLocks noGrp="1" noRot="1" noChangeAspect="1"/>
+          </p:cNvSpPr>
+          <p:nvPr>
+            <p:ph type="sldImg"/>
+          </p:nvPr>
+        </p:nvSpPr>
+        <p:spPr/>
+      </p:sp>
+      <p:sp>
+        <p:nvSpPr>
+          <p:cNvPr id="3" name="Notes Placeholder 2"/>
+          <p:cNvSpPr>
+            <a:spLocks noGrp="1"/>
+          </p:cNvSpPr>
+          <p:nvPr>
+            <p:ph type="body" idx="1"/>
+          </p:nvPr>
+        </p:nvSpPr>
+        <p:spPr/>
+        <p:txBody>
+          <a:bodyPr/>
+          <a:lstStyle/>
+          <a:p>
+            <a:r>
+              <a:rPr lang="en-US" dirty="0"/>
+              <a:t/>
+            </a:r>
+            <a:endParaRPr lang="en-US" dirty="0"/>
+          </a:p>
+        </p:txBody>
+      </p:sp>
+      <p:sp>
+        <p:nvSpPr>
+          <p:cNvPr id="4" name="Slide Number Placeholder 3"/>
+          <p:cNvSpPr>
+            <a:spLocks noGrp="1"/>
+          </p:cNvSpPr>
+          <p:nvPr>
+            <p:ph type="sldNum" sz="quarter" idx="10"/>
+          </p:nvPr>
+        </p:nvSpPr>
+        <p:spPr/>
+        <p:txBody>
+          <a:bodyPr/>
+          <a:lstStyle/>
+          <a:p>
+            <a:fld id="{F7021451-1387-4CA6-816F-3879F97B5CBC}" type="slidenum">
+              <a:rPr lang="en-US"/>
+              <a:t>33</a:t>
+            </a:fld>
+            <a:endParaRPr lang="en-US"/>
+          </a:p>
+        </p:txBody>
+      </p:sp>
+    </p:spTree>
+    <p:extLst>
+      <p:ext uri="{BB962C8B-B14F-4D97-AF65-F5344CB8AC3E}">
+        <p14:creationId xmlns:p14="http://schemas.microsoft.com/office/powerpoint/2010/main" val="1024086991"/>
+      </p:ext>
+    </p:extLst>
+  </p:cSld>
+  <p:clrMapOvr>
+    <a:masterClrMapping/>
+  </p:clrMapOvr>
+</p:notes>
+</file>
+
+<file path=ppt/notesSlides/notesSlide34.xml><?xml version="1.0" encoding="utf-8"?>
+<p:notes xmlns:a="http://schemas.openxmlformats.org/drawingml/2006/main" xmlns:r="http://schemas.openxmlformats.org/officeDocument/2006/relationships" xmlns:p="http://schemas.openxmlformats.org/presentationml/2006/main">
+  <p:cSld>
+    <p:spTree>
+      <p:nvGrpSpPr>
+        <p:cNvPr id="1" name=""/>
+        <p:cNvGrpSpPr/>
+        <p:nvPr/>
+      </p:nvGrpSpPr>
+      <p:grpSpPr>
+        <a:xfrm>
+          <a:off x="0" y="0"/>
+          <a:ext cx="0" cy="0"/>
+          <a:chOff x="0" y="0"/>
+          <a:chExt cx="0" cy="0"/>
+        </a:xfrm>
+      </p:grpSpPr>
+      <p:sp>
+        <p:nvSpPr>
+          <p:cNvPr id="2" name="Slide Image Placeholder 1"/>
+          <p:cNvSpPr>
+            <a:spLocks noGrp="1" noRot="1" noChangeAspect="1"/>
+          </p:cNvSpPr>
+          <p:nvPr>
+            <p:ph type="sldImg"/>
+          </p:nvPr>
+        </p:nvSpPr>
+        <p:spPr/>
+      </p:sp>
+      <p:sp>
+        <p:nvSpPr>
+          <p:cNvPr id="3" name="Notes Placeholder 2"/>
+          <p:cNvSpPr>
+            <a:spLocks noGrp="1"/>
+          </p:cNvSpPr>
+          <p:nvPr>
+            <p:ph type="body" idx="1"/>
+          </p:nvPr>
+        </p:nvSpPr>
+        <p:spPr/>
+        <p:txBody>
+          <a:bodyPr/>
+          <a:lstStyle/>
+          <a:p>
+            <a:r>
+              <a:rPr lang="en-US" dirty="0"/>
+              <a:t/>
+            </a:r>
+            <a:endParaRPr lang="en-US" dirty="0"/>
+          </a:p>
+        </p:txBody>
+      </p:sp>
+      <p:sp>
+        <p:nvSpPr>
+          <p:cNvPr id="4" name="Slide Number Placeholder 3"/>
+          <p:cNvSpPr>
+            <a:spLocks noGrp="1"/>
+          </p:cNvSpPr>
+          <p:nvPr>
+            <p:ph type="sldNum" sz="quarter" idx="10"/>
+          </p:nvPr>
+        </p:nvSpPr>
+        <p:spPr/>
+        <p:txBody>
+          <a:bodyPr/>
+          <a:lstStyle/>
+          <a:p>
+            <a:fld id="{F7021451-1387-4CA6-816F-3879F97B5CBC}" type="slidenum">
+              <a:rPr lang="en-US"/>
+              <a:t>34</a:t>
+            </a:fld>
+            <a:endParaRPr lang="en-US"/>
+          </a:p>
+        </p:txBody>
+      </p:sp>
+    </p:spTree>
+    <p:extLst>
+      <p:ext uri="{BB962C8B-B14F-4D97-AF65-F5344CB8AC3E}">
+        <p14:creationId xmlns:p14="http://schemas.microsoft.com/office/powerpoint/2010/main" val="1024086991"/>
+      </p:ext>
+    </p:extLst>
+  </p:cSld>
+  <p:clrMapOvr>
+    <a:masterClrMapping/>
+  </p:clrMapOvr>
+</p:notes>
+</file>
+
+<file path=ppt/notesSlides/notesSlide35.xml><?xml version="1.0" encoding="utf-8"?>
+<p:notes xmlns:a="http://schemas.openxmlformats.org/drawingml/2006/main" xmlns:r="http://schemas.openxmlformats.org/officeDocument/2006/relationships" xmlns:p="http://schemas.openxmlformats.org/presentationml/2006/main">
+  <p:cSld>
+    <p:spTree>
+      <p:nvGrpSpPr>
+        <p:cNvPr id="1" name=""/>
+        <p:cNvGrpSpPr/>
+        <p:nvPr/>
+      </p:nvGrpSpPr>
+      <p:grpSpPr>
+        <a:xfrm>
+          <a:off x="0" y="0"/>
+          <a:ext cx="0" cy="0"/>
+          <a:chOff x="0" y="0"/>
+          <a:chExt cx="0" cy="0"/>
+        </a:xfrm>
+      </p:grpSpPr>
+      <p:sp>
+        <p:nvSpPr>
+          <p:cNvPr id="2" name="Slide Image Placeholder 1"/>
+          <p:cNvSpPr>
+            <a:spLocks noGrp="1" noRot="1" noChangeAspect="1"/>
+          </p:cNvSpPr>
+          <p:nvPr>
+            <p:ph type="sldImg"/>
+          </p:nvPr>
+        </p:nvSpPr>
+        <p:spPr/>
+      </p:sp>
+      <p:sp>
+        <p:nvSpPr>
+          <p:cNvPr id="3" name="Notes Placeholder 2"/>
+          <p:cNvSpPr>
+            <a:spLocks noGrp="1"/>
+          </p:cNvSpPr>
+          <p:nvPr>
+            <p:ph type="body" idx="1"/>
+          </p:nvPr>
+        </p:nvSpPr>
+        <p:spPr/>
+        <p:txBody>
+          <a:bodyPr/>
+          <a:lstStyle/>
+          <a:p>
+            <a:r>
+              <a:rPr lang="en-US" dirty="0"/>
+              <a:t/>
+            </a:r>
+            <a:endParaRPr lang="en-US" dirty="0"/>
+          </a:p>
+        </p:txBody>
+      </p:sp>
+      <p:sp>
+        <p:nvSpPr>
+          <p:cNvPr id="4" name="Slide Number Placeholder 3"/>
+          <p:cNvSpPr>
+            <a:spLocks noGrp="1"/>
+          </p:cNvSpPr>
+          <p:nvPr>
+            <p:ph type="sldNum" sz="quarter" idx="10"/>
+          </p:nvPr>
+        </p:nvSpPr>
+        <p:spPr/>
+        <p:txBody>
+          <a:bodyPr/>
+          <a:lstStyle/>
+          <a:p>
+            <a:fld id="{F7021451-1387-4CA6-816F-3879F97B5CBC}" type="slidenum">
+              <a:rPr lang="en-US"/>
+              <a:t>35</a:t>
+            </a:fld>
+            <a:endParaRPr lang="en-US"/>
+          </a:p>
+        </p:txBody>
+      </p:sp>
+    </p:spTree>
+    <p:extLst>
+      <p:ext uri="{BB962C8B-B14F-4D97-AF65-F5344CB8AC3E}">
+        <p14:creationId xmlns:p14="http://schemas.microsoft.com/office/powerpoint/2010/main" val="1024086991"/>
+      </p:ext>
+    </p:extLst>
+  </p:cSld>
+  <p:clrMapOvr>
+    <a:masterClrMapping/>
+  </p:clrMapOvr>
+</p:notes>
+</file>
+
 <file path=ppt/notesSlides/notesSlide4.xml><?xml version="1.0" encoding="utf-8"?>
 <p:notes xmlns:a="http://schemas.openxmlformats.org/drawingml/2006/main" xmlns:r="http://schemas.openxmlformats.org/officeDocument/2006/relationships" xmlns:p="http://schemas.openxmlformats.org/presentationml/2006/main">
   <p:cSld>
@@ -28802,6 +29336,5412 @@
             <a:endParaRPr lang="en-US" sz="1000" dirty="0"/>
           </a:p>
         </p:txBody>
+      </p:sp>
+    </p:spTree>
+  </p:cSld>
+  <p:clrMapOvr>
+    <a:masterClrMapping/>
+  </p:clrMapOvr>
+</p:sld>
+</file>
+
+<file path=ppt/slides/slide30.xml><?xml version="1.0" encoding="utf-8"?>
+<p:sld xmlns:a="http://schemas.openxmlformats.org/drawingml/2006/main" xmlns:r="http://schemas.openxmlformats.org/officeDocument/2006/relationships" xmlns:p="http://schemas.openxmlformats.org/presentationml/2006/main">
+  <p:cSld name="Slide 30">
+    <p:bg>
+      <p:bgPr>
+        <a:solidFill>
+          <a:srgbClr val="FFFFFF"/>
+        </a:solidFill>
+      </p:bgPr>
+    </p:bg>
+    <p:spTree>
+      <p:nvGrpSpPr>
+        <p:cNvPr id="1" name=""/>
+        <p:cNvGrpSpPr/>
+        <p:nvPr/>
+      </p:nvGrpSpPr>
+      <p:grpSpPr>
+        <a:xfrm>
+          <a:off x="0" y="0"/>
+          <a:ext cx="0" cy="0"/>
+          <a:chOff x="0" y="0"/>
+          <a:chExt cx="0" cy="0"/>
+        </a:xfrm>
+      </p:grpSpPr>
+      <p:sp>
+        <p:nvSpPr>
+          <p:cNvPr id="2" name="Text 0"/>
+          <p:cNvSpPr/>
+          <p:nvPr/>
+        </p:nvSpPr>
+        <p:spPr>
+          <a:xfrm>
+            <a:off x="3047848" y="1524000"/>
+            <a:ext cx="6096000" cy="203200"/>
+          </a:xfrm>
+          <a:prstGeom prst="rect">
+            <a:avLst/>
+          </a:prstGeom>
+          <a:noFill/>
+          <a:ln/>
+        </p:spPr>
+        <p:txBody>
+          <a:bodyPr wrap="none" lIns="0" tIns="0" rIns="0" bIns="0" rtlCol="0" anchor="t"/>
+          <a:lstStyle/>
+          <a:p>
+            <a:pPr algn="l" indent="0" marL="0">
+              <a:buNone/>
+            </a:pPr>
+            <a:r>
+              <a:rPr lang="en-US" sz="1200" b="1" dirty="0">
+                <a:solidFill>
+                  <a:srgbClr val="0B0B0B"/>
+                </a:solidFill>
+                <a:latin typeface="Segoe UI" pitchFamily="34" charset="0"/>
+                <a:ea typeface="Segoe UI" pitchFamily="34" charset="-122"/>
+                <a:cs typeface="Segoe UI" pitchFamily="34" charset="-120"/>
+              </a:rPr>
+              <a:t>Connector lines + footnote (source line)</a:t>
+            </a:r>
+            <a:endParaRPr lang="en-US" sz="1200" dirty="0"/>
+          </a:p>
+        </p:txBody>
+      </p:sp>
+      <p:sp>
+        <p:nvSpPr>
+          <p:cNvPr id="3" name="Text 1"/>
+          <p:cNvSpPr/>
+          <p:nvPr/>
+        </p:nvSpPr>
+        <p:spPr>
+          <a:xfrm>
+            <a:off x="3073248" y="4978400"/>
+            <a:ext cx="1295400" cy="177800"/>
+          </a:xfrm>
+          <a:prstGeom prst="rect">
+            <a:avLst/>
+          </a:prstGeom>
+          <a:noFill/>
+          <a:ln/>
+        </p:spPr>
+        <p:txBody>
+          <a:bodyPr wrap="none" lIns="0" tIns="0" rIns="0" bIns="0" rtlCol="0" anchor="t"/>
+          <a:lstStyle/>
+          <a:p>
+            <a:pPr algn="ctr" indent="0" marL="0">
+              <a:buNone/>
+            </a:pPr>
+            <a:r>
+              <a:rPr lang="en-US" sz="1000" dirty="0">
+                <a:solidFill>
+                  <a:srgbClr val="0B0B0B"/>
+                </a:solidFill>
+                <a:latin typeface="Segoe UI" pitchFamily="34" charset="0"/>
+                <a:ea typeface="Segoe UI" pitchFamily="34" charset="-122"/>
+                <a:cs typeface="Segoe UI" pitchFamily="34" charset="-120"/>
+              </a:rPr>
+              <a:t>2022</a:t>
+            </a:r>
+            <a:endParaRPr lang="en-US" sz="1000" dirty="0"/>
+          </a:p>
+        </p:txBody>
+      </p:sp>
+      <p:sp>
+        <p:nvSpPr>
+          <p:cNvPr id="4" name="Text 2"/>
+          <p:cNvSpPr/>
+          <p:nvPr/>
+        </p:nvSpPr>
+        <p:spPr>
+          <a:xfrm>
+            <a:off x="4368648" y="4978400"/>
+            <a:ext cx="1295400" cy="177800"/>
+          </a:xfrm>
+          <a:prstGeom prst="rect">
+            <a:avLst/>
+          </a:prstGeom>
+          <a:noFill/>
+          <a:ln/>
+        </p:spPr>
+        <p:txBody>
+          <a:bodyPr wrap="none" lIns="0" tIns="0" rIns="0" bIns="0" rtlCol="0" anchor="t"/>
+          <a:lstStyle/>
+          <a:p>
+            <a:pPr algn="ctr" indent="0" marL="0">
+              <a:buNone/>
+            </a:pPr>
+            <a:r>
+              <a:rPr lang="en-US" sz="1000" dirty="0">
+                <a:solidFill>
+                  <a:srgbClr val="0B0B0B"/>
+                </a:solidFill>
+                <a:latin typeface="Segoe UI" pitchFamily="34" charset="0"/>
+                <a:ea typeface="Segoe UI" pitchFamily="34" charset="-122"/>
+                <a:cs typeface="Segoe UI" pitchFamily="34" charset="-120"/>
+              </a:rPr>
+              <a:t>2023</a:t>
+            </a:r>
+            <a:endParaRPr lang="en-US" sz="1000" dirty="0"/>
+          </a:p>
+        </p:txBody>
+      </p:sp>
+      <p:sp>
+        <p:nvSpPr>
+          <p:cNvPr id="5" name="Text 3"/>
+          <p:cNvSpPr/>
+          <p:nvPr/>
+        </p:nvSpPr>
+        <p:spPr>
+          <a:xfrm>
+            <a:off x="5664048" y="4978400"/>
+            <a:ext cx="1295400" cy="177800"/>
+          </a:xfrm>
+          <a:prstGeom prst="rect">
+            <a:avLst/>
+          </a:prstGeom>
+          <a:noFill/>
+          <a:ln/>
+        </p:spPr>
+        <p:txBody>
+          <a:bodyPr wrap="none" lIns="0" tIns="0" rIns="0" bIns="0" rtlCol="0" anchor="t"/>
+          <a:lstStyle/>
+          <a:p>
+            <a:pPr algn="ctr" indent="0" marL="0">
+              <a:buNone/>
+            </a:pPr>
+            <a:r>
+              <a:rPr lang="en-US" sz="1000" dirty="0">
+                <a:solidFill>
+                  <a:srgbClr val="0B0B0B"/>
+                </a:solidFill>
+                <a:latin typeface="Segoe UI" pitchFamily="34" charset="0"/>
+                <a:ea typeface="Segoe UI" pitchFamily="34" charset="-122"/>
+                <a:cs typeface="Segoe UI" pitchFamily="34" charset="-120"/>
+              </a:rPr>
+              <a:t>2024</a:t>
+            </a:r>
+            <a:endParaRPr lang="en-US" sz="1000" dirty="0"/>
+          </a:p>
+        </p:txBody>
+      </p:sp>
+      <p:sp>
+        <p:nvSpPr>
+          <p:cNvPr id="6" name="Text 4"/>
+          <p:cNvSpPr/>
+          <p:nvPr/>
+        </p:nvSpPr>
+        <p:spPr>
+          <a:xfrm>
+            <a:off x="6959448" y="4978400"/>
+            <a:ext cx="1295400" cy="177800"/>
+          </a:xfrm>
+          <a:prstGeom prst="rect">
+            <a:avLst/>
+          </a:prstGeom>
+          <a:noFill/>
+          <a:ln/>
+        </p:spPr>
+        <p:txBody>
+          <a:bodyPr wrap="none" lIns="0" tIns="0" rIns="0" bIns="0" rtlCol="0" anchor="t"/>
+          <a:lstStyle/>
+          <a:p>
+            <a:pPr algn="ctr" indent="0" marL="0">
+              <a:buNone/>
+            </a:pPr>
+            <a:r>
+              <a:rPr lang="en-US" sz="1000" dirty="0">
+                <a:solidFill>
+                  <a:srgbClr val="0B0B0B"/>
+                </a:solidFill>
+                <a:latin typeface="Segoe UI" pitchFamily="34" charset="0"/>
+                <a:ea typeface="Segoe UI" pitchFamily="34" charset="-122"/>
+                <a:cs typeface="Segoe UI" pitchFamily="34" charset="-120"/>
+              </a:rPr>
+              <a:t>2025</a:t>
+            </a:r>
+            <a:endParaRPr lang="en-US" sz="1000" dirty="0"/>
+          </a:p>
+        </p:txBody>
+      </p:sp>
+      <p:sp>
+        <p:nvSpPr>
+          <p:cNvPr id="7" name="Shape 5"/>
+          <p:cNvSpPr/>
+          <p:nvPr/>
+        </p:nvSpPr>
+        <p:spPr>
+          <a:xfrm>
+            <a:off x="3289148" y="4283964"/>
+            <a:ext cx="863600" cy="656336"/>
+          </a:xfrm>
+          <a:prstGeom prst="rect">
+            <a:avLst/>
+          </a:prstGeom>
+          <a:solidFill>
+            <a:srgbClr val="2A78D6"/>
+          </a:solidFill>
+          <a:ln w="9525">
+            <a:solidFill>
+              <a:srgbClr val="FFFFFF"/>
+            </a:solidFill>
+            <a:prstDash val="solid"/>
+          </a:ln>
+        </p:spPr>
+      </p:sp>
+      <p:sp>
+        <p:nvSpPr>
+          <p:cNvPr id="8" name="Text 6"/>
+          <p:cNvSpPr/>
+          <p:nvPr/>
+        </p:nvSpPr>
+        <p:spPr>
+          <a:xfrm>
+            <a:off x="3238348" y="4516882"/>
+            <a:ext cx="965200" cy="190500"/>
+          </a:xfrm>
+          <a:prstGeom prst="rect">
+            <a:avLst/>
+          </a:prstGeom>
+          <a:noFill/>
+          <a:ln/>
+        </p:spPr>
+        <p:txBody>
+          <a:bodyPr wrap="none" lIns="0" tIns="0" rIns="0" bIns="0" rtlCol="0" anchor="ctr"/>
+          <a:lstStyle/>
+          <a:p>
+            <a:pPr algn="ctr" indent="0" marL="0">
+              <a:buNone/>
+            </a:pPr>
+            <a:r>
+              <a:rPr lang="en-US" sz="1000" dirty="0">
+                <a:solidFill>
+                  <a:srgbClr val="FFFFFF"/>
+                </a:solidFill>
+                <a:latin typeface="Segoe UI" pitchFamily="34" charset="0"/>
+                <a:ea typeface="Segoe UI" pitchFamily="34" charset="-122"/>
+                <a:cs typeface="Segoe UI" pitchFamily="34" charset="-120"/>
+              </a:rPr>
+              <a:t>34</a:t>
+            </a:r>
+            <a:endParaRPr lang="en-US" sz="1000" dirty="0"/>
+          </a:p>
+        </p:txBody>
+      </p:sp>
+      <p:sp>
+        <p:nvSpPr>
+          <p:cNvPr id="9" name="Shape 7"/>
+          <p:cNvSpPr/>
+          <p:nvPr/>
+        </p:nvSpPr>
+        <p:spPr>
+          <a:xfrm>
+            <a:off x="3289148" y="3859276"/>
+            <a:ext cx="863600" cy="424688"/>
+          </a:xfrm>
+          <a:prstGeom prst="rect">
+            <a:avLst/>
+          </a:prstGeom>
+          <a:solidFill>
+            <a:srgbClr val="1BAF7A"/>
+          </a:solidFill>
+          <a:ln w="9525">
+            <a:solidFill>
+              <a:srgbClr val="FFFFFF"/>
+            </a:solidFill>
+            <a:prstDash val="solid"/>
+          </a:ln>
+        </p:spPr>
+      </p:sp>
+      <p:sp>
+        <p:nvSpPr>
+          <p:cNvPr id="10" name="Text 8"/>
+          <p:cNvSpPr/>
+          <p:nvPr/>
+        </p:nvSpPr>
+        <p:spPr>
+          <a:xfrm>
+            <a:off x="3238348" y="3976370"/>
+            <a:ext cx="965200" cy="190500"/>
+          </a:xfrm>
+          <a:prstGeom prst="rect">
+            <a:avLst/>
+          </a:prstGeom>
+          <a:noFill/>
+          <a:ln/>
+        </p:spPr>
+        <p:txBody>
+          <a:bodyPr wrap="none" lIns="0" tIns="0" rIns="0" bIns="0" rtlCol="0" anchor="ctr"/>
+          <a:lstStyle/>
+          <a:p>
+            <a:pPr algn="ctr" indent="0" marL="0">
+              <a:buNone/>
+            </a:pPr>
+            <a:r>
+              <a:rPr lang="en-US" sz="1000" dirty="0">
+                <a:solidFill>
+                  <a:srgbClr val="FFFFFF"/>
+                </a:solidFill>
+                <a:latin typeface="Segoe UI" pitchFamily="34" charset="0"/>
+                <a:ea typeface="Segoe UI" pitchFamily="34" charset="-122"/>
+                <a:cs typeface="Segoe UI" pitchFamily="34" charset="-120"/>
+              </a:rPr>
+              <a:t>22</a:t>
+            </a:r>
+            <a:endParaRPr lang="en-US" sz="1000" dirty="0"/>
+          </a:p>
+        </p:txBody>
+      </p:sp>
+      <p:sp>
+        <p:nvSpPr>
+          <p:cNvPr id="11" name="Shape 9"/>
+          <p:cNvSpPr/>
+          <p:nvPr/>
+        </p:nvSpPr>
+        <p:spPr>
+          <a:xfrm>
+            <a:off x="3289148" y="3511804"/>
+            <a:ext cx="863600" cy="347472"/>
+          </a:xfrm>
+          <a:prstGeom prst="rect">
+            <a:avLst/>
+          </a:prstGeom>
+          <a:solidFill>
+            <a:srgbClr val="EDA100"/>
+          </a:solidFill>
+          <a:ln w="9525">
+            <a:solidFill>
+              <a:srgbClr val="FFFFFF"/>
+            </a:solidFill>
+            <a:prstDash val="solid"/>
+          </a:ln>
+        </p:spPr>
+      </p:sp>
+      <p:sp>
+        <p:nvSpPr>
+          <p:cNvPr id="12" name="Text 10"/>
+          <p:cNvSpPr/>
+          <p:nvPr/>
+        </p:nvSpPr>
+        <p:spPr>
+          <a:xfrm>
+            <a:off x="3238348" y="3590290"/>
+            <a:ext cx="965200" cy="190500"/>
+          </a:xfrm>
+          <a:prstGeom prst="rect">
+            <a:avLst/>
+          </a:prstGeom>
+          <a:noFill/>
+          <a:ln/>
+        </p:spPr>
+        <p:txBody>
+          <a:bodyPr wrap="none" lIns="0" tIns="0" rIns="0" bIns="0" rtlCol="0" anchor="ctr"/>
+          <a:lstStyle/>
+          <a:p>
+            <a:pPr algn="ctr" indent="0" marL="0">
+              <a:buNone/>
+            </a:pPr>
+            <a:r>
+              <a:rPr lang="en-US" sz="1000" dirty="0">
+                <a:solidFill>
+                  <a:srgbClr val="0B0B0B"/>
+                </a:solidFill>
+                <a:latin typeface="Segoe UI" pitchFamily="34" charset="0"/>
+                <a:ea typeface="Segoe UI" pitchFamily="34" charset="-122"/>
+                <a:cs typeface="Segoe UI" pitchFamily="34" charset="-120"/>
+              </a:rPr>
+              <a:t>18</a:t>
+            </a:r>
+            <a:endParaRPr lang="en-US" sz="1000" dirty="0"/>
+          </a:p>
+        </p:txBody>
+      </p:sp>
+      <p:sp>
+        <p:nvSpPr>
+          <p:cNvPr id="13" name="Text 11"/>
+          <p:cNvSpPr/>
+          <p:nvPr/>
+        </p:nvSpPr>
+        <p:spPr>
+          <a:xfrm>
+            <a:off x="3073248" y="3327654"/>
+            <a:ext cx="1295400" cy="177800"/>
+          </a:xfrm>
+          <a:prstGeom prst="rect">
+            <a:avLst/>
+          </a:prstGeom>
+          <a:noFill/>
+          <a:ln/>
+        </p:spPr>
+        <p:txBody>
+          <a:bodyPr wrap="none" lIns="0" tIns="0" rIns="0" bIns="0" rtlCol="0" anchor="b"/>
+          <a:lstStyle/>
+          <a:p>
+            <a:pPr algn="ctr" indent="0" marL="0">
+              <a:buNone/>
+            </a:pPr>
+            <a:r>
+              <a:rPr lang="en-US" sz="1000" b="1" dirty="0">
+                <a:solidFill>
+                  <a:srgbClr val="0B0B0B"/>
+                </a:solidFill>
+                <a:latin typeface="Segoe UI" pitchFamily="34" charset="0"/>
+                <a:ea typeface="Segoe UI" pitchFamily="34" charset="-122"/>
+                <a:cs typeface="Segoe UI" pitchFamily="34" charset="-120"/>
+              </a:rPr>
+              <a:t>74</a:t>
+            </a:r>
+            <a:endParaRPr lang="en-US" sz="1000" dirty="0"/>
+          </a:p>
+        </p:txBody>
+      </p:sp>
+      <p:sp>
+        <p:nvSpPr>
+          <p:cNvPr id="14" name="Shape 12"/>
+          <p:cNvSpPr/>
+          <p:nvPr/>
+        </p:nvSpPr>
+        <p:spPr>
+          <a:xfrm>
+            <a:off x="4584548" y="4168140"/>
+            <a:ext cx="863600" cy="772160"/>
+          </a:xfrm>
+          <a:prstGeom prst="rect">
+            <a:avLst/>
+          </a:prstGeom>
+          <a:solidFill>
+            <a:srgbClr val="2A78D6"/>
+          </a:solidFill>
+          <a:ln w="9525">
+            <a:solidFill>
+              <a:srgbClr val="FFFFFF"/>
+            </a:solidFill>
+            <a:prstDash val="solid"/>
+          </a:ln>
+        </p:spPr>
+      </p:sp>
+      <p:sp>
+        <p:nvSpPr>
+          <p:cNvPr id="15" name="Text 13"/>
+          <p:cNvSpPr/>
+          <p:nvPr/>
+        </p:nvSpPr>
+        <p:spPr>
+          <a:xfrm>
+            <a:off x="4533748" y="4458970"/>
+            <a:ext cx="965200" cy="190500"/>
+          </a:xfrm>
+          <a:prstGeom prst="rect">
+            <a:avLst/>
+          </a:prstGeom>
+          <a:noFill/>
+          <a:ln/>
+        </p:spPr>
+        <p:txBody>
+          <a:bodyPr wrap="none" lIns="0" tIns="0" rIns="0" bIns="0" rtlCol="0" anchor="ctr"/>
+          <a:lstStyle/>
+          <a:p>
+            <a:pPr algn="ctr" indent="0" marL="0">
+              <a:buNone/>
+            </a:pPr>
+            <a:r>
+              <a:rPr lang="en-US" sz="1000" dirty="0">
+                <a:solidFill>
+                  <a:srgbClr val="FFFFFF"/>
+                </a:solidFill>
+                <a:latin typeface="Segoe UI" pitchFamily="34" charset="0"/>
+                <a:ea typeface="Segoe UI" pitchFamily="34" charset="-122"/>
+                <a:cs typeface="Segoe UI" pitchFamily="34" charset="-120"/>
+              </a:rPr>
+              <a:t>40</a:t>
+            </a:r>
+            <a:endParaRPr lang="en-US" sz="1000" dirty="0"/>
+          </a:p>
+        </p:txBody>
+      </p:sp>
+      <p:sp>
+        <p:nvSpPr>
+          <p:cNvPr id="16" name="Shape 14"/>
+          <p:cNvSpPr/>
+          <p:nvPr/>
+        </p:nvSpPr>
+        <p:spPr>
+          <a:xfrm>
+            <a:off x="4584548" y="3666236"/>
+            <a:ext cx="863600" cy="501904"/>
+          </a:xfrm>
+          <a:prstGeom prst="rect">
+            <a:avLst/>
+          </a:prstGeom>
+          <a:solidFill>
+            <a:srgbClr val="1BAF7A"/>
+          </a:solidFill>
+          <a:ln w="9525">
+            <a:solidFill>
+              <a:srgbClr val="FFFFFF"/>
+            </a:solidFill>
+            <a:prstDash val="solid"/>
+          </a:ln>
+        </p:spPr>
+      </p:sp>
+      <p:sp>
+        <p:nvSpPr>
+          <p:cNvPr id="17" name="Text 15"/>
+          <p:cNvSpPr/>
+          <p:nvPr/>
+        </p:nvSpPr>
+        <p:spPr>
+          <a:xfrm>
+            <a:off x="4533748" y="3821938"/>
+            <a:ext cx="965200" cy="190500"/>
+          </a:xfrm>
+          <a:prstGeom prst="rect">
+            <a:avLst/>
+          </a:prstGeom>
+          <a:noFill/>
+          <a:ln/>
+        </p:spPr>
+        <p:txBody>
+          <a:bodyPr wrap="none" lIns="0" tIns="0" rIns="0" bIns="0" rtlCol="0" anchor="ctr"/>
+          <a:lstStyle/>
+          <a:p>
+            <a:pPr algn="ctr" indent="0" marL="0">
+              <a:buNone/>
+            </a:pPr>
+            <a:r>
+              <a:rPr lang="en-US" sz="1000" dirty="0">
+                <a:solidFill>
+                  <a:srgbClr val="FFFFFF"/>
+                </a:solidFill>
+                <a:latin typeface="Segoe UI" pitchFamily="34" charset="0"/>
+                <a:ea typeface="Segoe UI" pitchFamily="34" charset="-122"/>
+                <a:cs typeface="Segoe UI" pitchFamily="34" charset="-120"/>
+              </a:rPr>
+              <a:t>26</a:t>
+            </a:r>
+            <a:endParaRPr lang="en-US" sz="1000" dirty="0"/>
+          </a:p>
+        </p:txBody>
+      </p:sp>
+      <p:sp>
+        <p:nvSpPr>
+          <p:cNvPr id="18" name="Shape 16"/>
+          <p:cNvSpPr/>
+          <p:nvPr/>
+        </p:nvSpPr>
+        <p:spPr>
+          <a:xfrm>
+            <a:off x="4584548" y="3338068"/>
+            <a:ext cx="863600" cy="328168"/>
+          </a:xfrm>
+          <a:prstGeom prst="rect">
+            <a:avLst/>
+          </a:prstGeom>
+          <a:solidFill>
+            <a:srgbClr val="EDA100"/>
+          </a:solidFill>
+          <a:ln w="9525">
+            <a:solidFill>
+              <a:srgbClr val="FFFFFF"/>
+            </a:solidFill>
+            <a:prstDash val="solid"/>
+          </a:ln>
+        </p:spPr>
+      </p:sp>
+      <p:sp>
+        <p:nvSpPr>
+          <p:cNvPr id="19" name="Text 17"/>
+          <p:cNvSpPr/>
+          <p:nvPr/>
+        </p:nvSpPr>
+        <p:spPr>
+          <a:xfrm>
+            <a:off x="4533748" y="3406902"/>
+            <a:ext cx="965200" cy="190500"/>
+          </a:xfrm>
+          <a:prstGeom prst="rect">
+            <a:avLst/>
+          </a:prstGeom>
+          <a:noFill/>
+          <a:ln/>
+        </p:spPr>
+        <p:txBody>
+          <a:bodyPr wrap="none" lIns="0" tIns="0" rIns="0" bIns="0" rtlCol="0" anchor="ctr"/>
+          <a:lstStyle/>
+          <a:p>
+            <a:pPr algn="ctr" indent="0" marL="0">
+              <a:buNone/>
+            </a:pPr>
+            <a:r>
+              <a:rPr lang="en-US" sz="1000" dirty="0">
+                <a:solidFill>
+                  <a:srgbClr val="0B0B0B"/>
+                </a:solidFill>
+                <a:latin typeface="Segoe UI" pitchFamily="34" charset="0"/>
+                <a:ea typeface="Segoe UI" pitchFamily="34" charset="-122"/>
+                <a:cs typeface="Segoe UI" pitchFamily="34" charset="-120"/>
+              </a:rPr>
+              <a:t>17</a:t>
+            </a:r>
+            <a:endParaRPr lang="en-US" sz="1000" dirty="0"/>
+          </a:p>
+        </p:txBody>
+      </p:sp>
+      <p:sp>
+        <p:nvSpPr>
+          <p:cNvPr id="20" name="Text 18"/>
+          <p:cNvSpPr/>
+          <p:nvPr/>
+        </p:nvSpPr>
+        <p:spPr>
+          <a:xfrm>
+            <a:off x="4368648" y="3153918"/>
+            <a:ext cx="1295400" cy="177800"/>
+          </a:xfrm>
+          <a:prstGeom prst="rect">
+            <a:avLst/>
+          </a:prstGeom>
+          <a:noFill/>
+          <a:ln/>
+        </p:spPr>
+        <p:txBody>
+          <a:bodyPr wrap="none" lIns="0" tIns="0" rIns="0" bIns="0" rtlCol="0" anchor="b"/>
+          <a:lstStyle/>
+          <a:p>
+            <a:pPr algn="ctr" indent="0" marL="0">
+              <a:buNone/>
+            </a:pPr>
+            <a:r>
+              <a:rPr lang="en-US" sz="1000" b="1" dirty="0">
+                <a:solidFill>
+                  <a:srgbClr val="0B0B0B"/>
+                </a:solidFill>
+                <a:latin typeface="Segoe UI" pitchFamily="34" charset="0"/>
+                <a:ea typeface="Segoe UI" pitchFamily="34" charset="-122"/>
+                <a:cs typeface="Segoe UI" pitchFamily="34" charset="-120"/>
+              </a:rPr>
+              <a:t>83</a:t>
+            </a:r>
+            <a:endParaRPr lang="en-US" sz="1000" dirty="0"/>
+          </a:p>
+        </p:txBody>
+      </p:sp>
+      <p:sp>
+        <p:nvSpPr>
+          <p:cNvPr id="21" name="Shape 19"/>
+          <p:cNvSpPr/>
+          <p:nvPr/>
+        </p:nvSpPr>
+        <p:spPr>
+          <a:xfrm>
+            <a:off x="5879948" y="4033012"/>
+            <a:ext cx="863600" cy="907288"/>
+          </a:xfrm>
+          <a:prstGeom prst="rect">
+            <a:avLst/>
+          </a:prstGeom>
+          <a:solidFill>
+            <a:srgbClr val="2A78D6"/>
+          </a:solidFill>
+          <a:ln w="9525">
+            <a:solidFill>
+              <a:srgbClr val="FFFFFF"/>
+            </a:solidFill>
+            <a:prstDash val="solid"/>
+          </a:ln>
+        </p:spPr>
+      </p:sp>
+      <p:sp>
+        <p:nvSpPr>
+          <p:cNvPr id="22" name="Text 20"/>
+          <p:cNvSpPr/>
+          <p:nvPr/>
+        </p:nvSpPr>
+        <p:spPr>
+          <a:xfrm>
+            <a:off x="5829148" y="4391406"/>
+            <a:ext cx="965200" cy="190500"/>
+          </a:xfrm>
+          <a:prstGeom prst="rect">
+            <a:avLst/>
+          </a:prstGeom>
+          <a:noFill/>
+          <a:ln/>
+        </p:spPr>
+        <p:txBody>
+          <a:bodyPr wrap="none" lIns="0" tIns="0" rIns="0" bIns="0" rtlCol="0" anchor="ctr"/>
+          <a:lstStyle/>
+          <a:p>
+            <a:pPr algn="ctr" indent="0" marL="0">
+              <a:buNone/>
+            </a:pPr>
+            <a:r>
+              <a:rPr lang="en-US" sz="1000" dirty="0">
+                <a:solidFill>
+                  <a:srgbClr val="FFFFFF"/>
+                </a:solidFill>
+                <a:latin typeface="Segoe UI" pitchFamily="34" charset="0"/>
+                <a:ea typeface="Segoe UI" pitchFamily="34" charset="-122"/>
+                <a:cs typeface="Segoe UI" pitchFamily="34" charset="-120"/>
+              </a:rPr>
+              <a:t>47</a:t>
+            </a:r>
+            <a:endParaRPr lang="en-US" sz="1000" dirty="0"/>
+          </a:p>
+        </p:txBody>
+      </p:sp>
+      <p:sp>
+        <p:nvSpPr>
+          <p:cNvPr id="23" name="Shape 21"/>
+          <p:cNvSpPr/>
+          <p:nvPr/>
+        </p:nvSpPr>
+        <p:spPr>
+          <a:xfrm>
+            <a:off x="5879948" y="3434588"/>
+            <a:ext cx="863600" cy="598424"/>
+          </a:xfrm>
+          <a:prstGeom prst="rect">
+            <a:avLst/>
+          </a:prstGeom>
+          <a:solidFill>
+            <a:srgbClr val="1BAF7A"/>
+          </a:solidFill>
+          <a:ln w="9525">
+            <a:solidFill>
+              <a:srgbClr val="FFFFFF"/>
+            </a:solidFill>
+            <a:prstDash val="solid"/>
+          </a:ln>
+        </p:spPr>
+      </p:sp>
+      <p:sp>
+        <p:nvSpPr>
+          <p:cNvPr id="24" name="Text 22"/>
+          <p:cNvSpPr/>
+          <p:nvPr/>
+        </p:nvSpPr>
+        <p:spPr>
+          <a:xfrm>
+            <a:off x="5829148" y="3638550"/>
+            <a:ext cx="965200" cy="190500"/>
+          </a:xfrm>
+          <a:prstGeom prst="rect">
+            <a:avLst/>
+          </a:prstGeom>
+          <a:noFill/>
+          <a:ln/>
+        </p:spPr>
+        <p:txBody>
+          <a:bodyPr wrap="none" lIns="0" tIns="0" rIns="0" bIns="0" rtlCol="0" anchor="ctr"/>
+          <a:lstStyle/>
+          <a:p>
+            <a:pPr algn="ctr" indent="0" marL="0">
+              <a:buNone/>
+            </a:pPr>
+            <a:r>
+              <a:rPr lang="en-US" sz="1000" dirty="0">
+                <a:solidFill>
+                  <a:srgbClr val="FFFFFF"/>
+                </a:solidFill>
+                <a:latin typeface="Segoe UI" pitchFamily="34" charset="0"/>
+                <a:ea typeface="Segoe UI" pitchFamily="34" charset="-122"/>
+                <a:cs typeface="Segoe UI" pitchFamily="34" charset="-120"/>
+              </a:rPr>
+              <a:t>31</a:t>
+            </a:r>
+            <a:endParaRPr lang="en-US" sz="1000" dirty="0"/>
+          </a:p>
+        </p:txBody>
+      </p:sp>
+      <p:sp>
+        <p:nvSpPr>
+          <p:cNvPr id="25" name="Shape 23"/>
+          <p:cNvSpPr/>
+          <p:nvPr/>
+        </p:nvSpPr>
+        <p:spPr>
+          <a:xfrm>
+            <a:off x="5879948" y="3067812"/>
+            <a:ext cx="863600" cy="366776"/>
+          </a:xfrm>
+          <a:prstGeom prst="rect">
+            <a:avLst/>
+          </a:prstGeom>
+          <a:solidFill>
+            <a:srgbClr val="EDA100"/>
+          </a:solidFill>
+          <a:ln w="9525">
+            <a:solidFill>
+              <a:srgbClr val="FFFFFF"/>
+            </a:solidFill>
+            <a:prstDash val="solid"/>
+          </a:ln>
+        </p:spPr>
+      </p:sp>
+      <p:sp>
+        <p:nvSpPr>
+          <p:cNvPr id="26" name="Text 24"/>
+          <p:cNvSpPr/>
+          <p:nvPr/>
+        </p:nvSpPr>
+        <p:spPr>
+          <a:xfrm>
+            <a:off x="5829148" y="3155950"/>
+            <a:ext cx="965200" cy="190500"/>
+          </a:xfrm>
+          <a:prstGeom prst="rect">
+            <a:avLst/>
+          </a:prstGeom>
+          <a:noFill/>
+          <a:ln/>
+        </p:spPr>
+        <p:txBody>
+          <a:bodyPr wrap="none" lIns="0" tIns="0" rIns="0" bIns="0" rtlCol="0" anchor="ctr"/>
+          <a:lstStyle/>
+          <a:p>
+            <a:pPr algn="ctr" indent="0" marL="0">
+              <a:buNone/>
+            </a:pPr>
+            <a:r>
+              <a:rPr lang="en-US" sz="1000" dirty="0">
+                <a:solidFill>
+                  <a:srgbClr val="0B0B0B"/>
+                </a:solidFill>
+                <a:latin typeface="Segoe UI" pitchFamily="34" charset="0"/>
+                <a:ea typeface="Segoe UI" pitchFamily="34" charset="-122"/>
+                <a:cs typeface="Segoe UI" pitchFamily="34" charset="-120"/>
+              </a:rPr>
+              <a:t>19</a:t>
+            </a:r>
+            <a:endParaRPr lang="en-US" sz="1000" dirty="0"/>
+          </a:p>
+        </p:txBody>
+      </p:sp>
+      <p:sp>
+        <p:nvSpPr>
+          <p:cNvPr id="27" name="Text 25"/>
+          <p:cNvSpPr/>
+          <p:nvPr/>
+        </p:nvSpPr>
+        <p:spPr>
+          <a:xfrm>
+            <a:off x="5664048" y="2883662"/>
+            <a:ext cx="1295400" cy="177800"/>
+          </a:xfrm>
+          <a:prstGeom prst="rect">
+            <a:avLst/>
+          </a:prstGeom>
+          <a:noFill/>
+          <a:ln/>
+        </p:spPr>
+        <p:txBody>
+          <a:bodyPr wrap="none" lIns="0" tIns="0" rIns="0" bIns="0" rtlCol="0" anchor="b"/>
+          <a:lstStyle/>
+          <a:p>
+            <a:pPr algn="ctr" indent="0" marL="0">
+              <a:buNone/>
+            </a:pPr>
+            <a:r>
+              <a:rPr lang="en-US" sz="1000" b="1" dirty="0">
+                <a:solidFill>
+                  <a:srgbClr val="0B0B0B"/>
+                </a:solidFill>
+                <a:latin typeface="Segoe UI" pitchFamily="34" charset="0"/>
+                <a:ea typeface="Segoe UI" pitchFamily="34" charset="-122"/>
+                <a:cs typeface="Segoe UI" pitchFamily="34" charset="-120"/>
+              </a:rPr>
+              <a:t>97</a:t>
+            </a:r>
+            <a:endParaRPr lang="en-US" sz="1000" dirty="0"/>
+          </a:p>
+        </p:txBody>
+      </p:sp>
+      <p:sp>
+        <p:nvSpPr>
+          <p:cNvPr id="28" name="Shape 26"/>
+          <p:cNvSpPr/>
+          <p:nvPr/>
+        </p:nvSpPr>
+        <p:spPr>
+          <a:xfrm>
+            <a:off x="7175348" y="3859276"/>
+            <a:ext cx="863600" cy="1081024"/>
+          </a:xfrm>
+          <a:prstGeom prst="rect">
+            <a:avLst/>
+          </a:prstGeom>
+          <a:solidFill>
+            <a:srgbClr val="2A78D6"/>
+          </a:solidFill>
+          <a:ln w="9525">
+            <a:solidFill>
+              <a:srgbClr val="FFFFFF"/>
+            </a:solidFill>
+            <a:prstDash val="solid"/>
+          </a:ln>
+        </p:spPr>
+      </p:sp>
+      <p:sp>
+        <p:nvSpPr>
+          <p:cNvPr id="29" name="Text 27"/>
+          <p:cNvSpPr/>
+          <p:nvPr/>
+        </p:nvSpPr>
+        <p:spPr>
+          <a:xfrm>
+            <a:off x="7124548" y="4304538"/>
+            <a:ext cx="965200" cy="190500"/>
+          </a:xfrm>
+          <a:prstGeom prst="rect">
+            <a:avLst/>
+          </a:prstGeom>
+          <a:noFill/>
+          <a:ln/>
+        </p:spPr>
+        <p:txBody>
+          <a:bodyPr wrap="none" lIns="0" tIns="0" rIns="0" bIns="0" rtlCol="0" anchor="ctr"/>
+          <a:lstStyle/>
+          <a:p>
+            <a:pPr algn="ctr" indent="0" marL="0">
+              <a:buNone/>
+            </a:pPr>
+            <a:r>
+              <a:rPr lang="en-US" sz="1000" dirty="0">
+                <a:solidFill>
+                  <a:srgbClr val="FFFFFF"/>
+                </a:solidFill>
+                <a:latin typeface="Segoe UI" pitchFamily="34" charset="0"/>
+                <a:ea typeface="Segoe UI" pitchFamily="34" charset="-122"/>
+                <a:cs typeface="Segoe UI" pitchFamily="34" charset="-120"/>
+              </a:rPr>
+              <a:t>56</a:t>
+            </a:r>
+            <a:endParaRPr lang="en-US" sz="1000" dirty="0"/>
+          </a:p>
+        </p:txBody>
+      </p:sp>
+      <p:sp>
+        <p:nvSpPr>
+          <p:cNvPr id="30" name="Shape 28"/>
+          <p:cNvSpPr/>
+          <p:nvPr/>
+        </p:nvSpPr>
+        <p:spPr>
+          <a:xfrm>
+            <a:off x="7175348" y="3183636"/>
+            <a:ext cx="863600" cy="675640"/>
+          </a:xfrm>
+          <a:prstGeom prst="rect">
+            <a:avLst/>
+          </a:prstGeom>
+          <a:solidFill>
+            <a:srgbClr val="1BAF7A"/>
+          </a:solidFill>
+          <a:ln w="9525">
+            <a:solidFill>
+              <a:srgbClr val="FFFFFF"/>
+            </a:solidFill>
+            <a:prstDash val="solid"/>
+          </a:ln>
+        </p:spPr>
+      </p:sp>
+      <p:sp>
+        <p:nvSpPr>
+          <p:cNvPr id="31" name="Text 29"/>
+          <p:cNvSpPr/>
+          <p:nvPr/>
+        </p:nvSpPr>
+        <p:spPr>
+          <a:xfrm>
+            <a:off x="7124548" y="3426206"/>
+            <a:ext cx="965200" cy="190500"/>
+          </a:xfrm>
+          <a:prstGeom prst="rect">
+            <a:avLst/>
+          </a:prstGeom>
+          <a:noFill/>
+          <a:ln/>
+        </p:spPr>
+        <p:txBody>
+          <a:bodyPr wrap="none" lIns="0" tIns="0" rIns="0" bIns="0" rtlCol="0" anchor="ctr"/>
+          <a:lstStyle/>
+          <a:p>
+            <a:pPr algn="ctr" indent="0" marL="0">
+              <a:buNone/>
+            </a:pPr>
+            <a:r>
+              <a:rPr lang="en-US" sz="1000" dirty="0">
+                <a:solidFill>
+                  <a:srgbClr val="FFFFFF"/>
+                </a:solidFill>
+                <a:latin typeface="Segoe UI" pitchFamily="34" charset="0"/>
+                <a:ea typeface="Segoe UI" pitchFamily="34" charset="-122"/>
+                <a:cs typeface="Segoe UI" pitchFamily="34" charset="-120"/>
+              </a:rPr>
+              <a:t>35</a:t>
+            </a:r>
+            <a:endParaRPr lang="en-US" sz="1000" dirty="0"/>
+          </a:p>
+        </p:txBody>
+      </p:sp>
+      <p:sp>
+        <p:nvSpPr>
+          <p:cNvPr id="32" name="Shape 30"/>
+          <p:cNvSpPr/>
+          <p:nvPr/>
+        </p:nvSpPr>
+        <p:spPr>
+          <a:xfrm>
+            <a:off x="7175348" y="2758948"/>
+            <a:ext cx="863600" cy="424688"/>
+          </a:xfrm>
+          <a:prstGeom prst="rect">
+            <a:avLst/>
+          </a:prstGeom>
+          <a:solidFill>
+            <a:srgbClr val="EDA100"/>
+          </a:solidFill>
+          <a:ln w="9525">
+            <a:solidFill>
+              <a:srgbClr val="FFFFFF"/>
+            </a:solidFill>
+            <a:prstDash val="solid"/>
+          </a:ln>
+        </p:spPr>
+      </p:sp>
+      <p:sp>
+        <p:nvSpPr>
+          <p:cNvPr id="33" name="Text 31"/>
+          <p:cNvSpPr/>
+          <p:nvPr/>
+        </p:nvSpPr>
+        <p:spPr>
+          <a:xfrm>
+            <a:off x="7124548" y="2876042"/>
+            <a:ext cx="965200" cy="190500"/>
+          </a:xfrm>
+          <a:prstGeom prst="rect">
+            <a:avLst/>
+          </a:prstGeom>
+          <a:noFill/>
+          <a:ln/>
+        </p:spPr>
+        <p:txBody>
+          <a:bodyPr wrap="none" lIns="0" tIns="0" rIns="0" bIns="0" rtlCol="0" anchor="ctr"/>
+          <a:lstStyle/>
+          <a:p>
+            <a:pPr algn="ctr" indent="0" marL="0">
+              <a:buNone/>
+            </a:pPr>
+            <a:r>
+              <a:rPr lang="en-US" sz="1000" dirty="0">
+                <a:solidFill>
+                  <a:srgbClr val="0B0B0B"/>
+                </a:solidFill>
+                <a:latin typeface="Segoe UI" pitchFamily="34" charset="0"/>
+                <a:ea typeface="Segoe UI" pitchFamily="34" charset="-122"/>
+                <a:cs typeface="Segoe UI" pitchFamily="34" charset="-120"/>
+              </a:rPr>
+              <a:t>22</a:t>
+            </a:r>
+            <a:endParaRPr lang="en-US" sz="1000" dirty="0"/>
+          </a:p>
+        </p:txBody>
+      </p:sp>
+      <p:sp>
+        <p:nvSpPr>
+          <p:cNvPr id="34" name="Text 32"/>
+          <p:cNvSpPr/>
+          <p:nvPr/>
+        </p:nvSpPr>
+        <p:spPr>
+          <a:xfrm>
+            <a:off x="6959448" y="2574798"/>
+            <a:ext cx="1295400" cy="177800"/>
+          </a:xfrm>
+          <a:prstGeom prst="rect">
+            <a:avLst/>
+          </a:prstGeom>
+          <a:noFill/>
+          <a:ln/>
+        </p:spPr>
+        <p:txBody>
+          <a:bodyPr wrap="none" lIns="0" tIns="0" rIns="0" bIns="0" rtlCol="0" anchor="b"/>
+          <a:lstStyle/>
+          <a:p>
+            <a:pPr algn="ctr" indent="0" marL="0">
+              <a:buNone/>
+            </a:pPr>
+            <a:r>
+              <a:rPr lang="en-US" sz="1000" b="1" dirty="0">
+                <a:solidFill>
+                  <a:srgbClr val="0B0B0B"/>
+                </a:solidFill>
+                <a:latin typeface="Segoe UI" pitchFamily="34" charset="0"/>
+                <a:ea typeface="Segoe UI" pitchFamily="34" charset="-122"/>
+                <a:cs typeface="Segoe UI" pitchFamily="34" charset="-120"/>
+              </a:rPr>
+              <a:t>113</a:t>
+            </a:r>
+            <a:endParaRPr lang="en-US" sz="1000" dirty="0"/>
+          </a:p>
+        </p:txBody>
+      </p:sp>
+      <p:sp>
+        <p:nvSpPr>
+          <p:cNvPr id="35" name="Shape 33"/>
+          <p:cNvSpPr/>
+          <p:nvPr/>
+        </p:nvSpPr>
+        <p:spPr>
+          <a:xfrm flipV="1">
+            <a:off x="4152748" y="4168140"/>
+            <a:ext cx="431800" cy="115824"/>
+          </a:xfrm>
+          <a:prstGeom prst="line">
+            <a:avLst/>
+          </a:prstGeom>
+          <a:noFill/>
+          <a:ln w="9525">
+            <a:solidFill>
+              <a:srgbClr val="52514E"/>
+            </a:solidFill>
+            <a:prstDash val="solid"/>
+          </a:ln>
+        </p:spPr>
+      </p:sp>
+      <p:sp>
+        <p:nvSpPr>
+          <p:cNvPr id="36" name="Shape 34"/>
+          <p:cNvSpPr/>
+          <p:nvPr/>
+        </p:nvSpPr>
+        <p:spPr>
+          <a:xfrm flipV="1">
+            <a:off x="4152748" y="3666236"/>
+            <a:ext cx="431800" cy="193040"/>
+          </a:xfrm>
+          <a:prstGeom prst="line">
+            <a:avLst/>
+          </a:prstGeom>
+          <a:noFill/>
+          <a:ln w="9525">
+            <a:solidFill>
+              <a:srgbClr val="52514E"/>
+            </a:solidFill>
+            <a:prstDash val="solid"/>
+          </a:ln>
+        </p:spPr>
+      </p:sp>
+      <p:sp>
+        <p:nvSpPr>
+          <p:cNvPr id="37" name="Shape 35"/>
+          <p:cNvSpPr/>
+          <p:nvPr/>
+        </p:nvSpPr>
+        <p:spPr>
+          <a:xfrm flipV="1">
+            <a:off x="4152748" y="3338068"/>
+            <a:ext cx="431800" cy="173736"/>
+          </a:xfrm>
+          <a:prstGeom prst="line">
+            <a:avLst/>
+          </a:prstGeom>
+          <a:noFill/>
+          <a:ln w="9525">
+            <a:solidFill>
+              <a:srgbClr val="52514E"/>
+            </a:solidFill>
+            <a:prstDash val="solid"/>
+          </a:ln>
+        </p:spPr>
+      </p:sp>
+      <p:sp>
+        <p:nvSpPr>
+          <p:cNvPr id="38" name="Shape 36"/>
+          <p:cNvSpPr/>
+          <p:nvPr/>
+        </p:nvSpPr>
+        <p:spPr>
+          <a:xfrm flipV="1">
+            <a:off x="5448148" y="4033012"/>
+            <a:ext cx="431800" cy="135128"/>
+          </a:xfrm>
+          <a:prstGeom prst="line">
+            <a:avLst/>
+          </a:prstGeom>
+          <a:noFill/>
+          <a:ln w="9525">
+            <a:solidFill>
+              <a:srgbClr val="52514E"/>
+            </a:solidFill>
+            <a:prstDash val="solid"/>
+          </a:ln>
+        </p:spPr>
+      </p:sp>
+      <p:sp>
+        <p:nvSpPr>
+          <p:cNvPr id="39" name="Shape 37"/>
+          <p:cNvSpPr/>
+          <p:nvPr/>
+        </p:nvSpPr>
+        <p:spPr>
+          <a:xfrm flipV="1">
+            <a:off x="5448148" y="3434588"/>
+            <a:ext cx="431800" cy="231648"/>
+          </a:xfrm>
+          <a:prstGeom prst="line">
+            <a:avLst/>
+          </a:prstGeom>
+          <a:noFill/>
+          <a:ln w="9525">
+            <a:solidFill>
+              <a:srgbClr val="52514E"/>
+            </a:solidFill>
+            <a:prstDash val="solid"/>
+          </a:ln>
+        </p:spPr>
+      </p:sp>
+      <p:sp>
+        <p:nvSpPr>
+          <p:cNvPr id="40" name="Shape 38"/>
+          <p:cNvSpPr/>
+          <p:nvPr/>
+        </p:nvSpPr>
+        <p:spPr>
+          <a:xfrm flipV="1">
+            <a:off x="5448148" y="3067812"/>
+            <a:ext cx="431800" cy="270256"/>
+          </a:xfrm>
+          <a:prstGeom prst="line">
+            <a:avLst/>
+          </a:prstGeom>
+          <a:noFill/>
+          <a:ln w="9525">
+            <a:solidFill>
+              <a:srgbClr val="52514E"/>
+            </a:solidFill>
+            <a:prstDash val="solid"/>
+          </a:ln>
+        </p:spPr>
+      </p:sp>
+      <p:sp>
+        <p:nvSpPr>
+          <p:cNvPr id="41" name="Shape 39"/>
+          <p:cNvSpPr/>
+          <p:nvPr/>
+        </p:nvSpPr>
+        <p:spPr>
+          <a:xfrm flipV="1">
+            <a:off x="6743548" y="3859276"/>
+            <a:ext cx="431800" cy="173736"/>
+          </a:xfrm>
+          <a:prstGeom prst="line">
+            <a:avLst/>
+          </a:prstGeom>
+          <a:noFill/>
+          <a:ln w="9525">
+            <a:solidFill>
+              <a:srgbClr val="52514E"/>
+            </a:solidFill>
+            <a:prstDash val="solid"/>
+          </a:ln>
+        </p:spPr>
+      </p:sp>
+      <p:sp>
+        <p:nvSpPr>
+          <p:cNvPr id="42" name="Shape 40"/>
+          <p:cNvSpPr/>
+          <p:nvPr/>
+        </p:nvSpPr>
+        <p:spPr>
+          <a:xfrm flipV="1">
+            <a:off x="6743548" y="3183636"/>
+            <a:ext cx="431800" cy="250952"/>
+          </a:xfrm>
+          <a:prstGeom prst="line">
+            <a:avLst/>
+          </a:prstGeom>
+          <a:noFill/>
+          <a:ln w="9525">
+            <a:solidFill>
+              <a:srgbClr val="52514E"/>
+            </a:solidFill>
+            <a:prstDash val="solid"/>
+          </a:ln>
+        </p:spPr>
+      </p:sp>
+      <p:sp>
+        <p:nvSpPr>
+          <p:cNvPr id="43" name="Shape 41"/>
+          <p:cNvSpPr/>
+          <p:nvPr/>
+        </p:nvSpPr>
+        <p:spPr>
+          <a:xfrm flipV="1">
+            <a:off x="6743548" y="2758948"/>
+            <a:ext cx="431800" cy="308864"/>
+          </a:xfrm>
+          <a:prstGeom prst="line">
+            <a:avLst/>
+          </a:prstGeom>
+          <a:noFill/>
+          <a:ln w="9525">
+            <a:solidFill>
+              <a:srgbClr val="52514E"/>
+            </a:solidFill>
+            <a:prstDash val="solid"/>
+          </a:ln>
+        </p:spPr>
+      </p:sp>
+      <p:sp>
+        <p:nvSpPr>
+          <p:cNvPr id="44" name="Shape 42"/>
+          <p:cNvSpPr/>
+          <p:nvPr/>
+        </p:nvSpPr>
+        <p:spPr>
+          <a:xfrm>
+            <a:off x="3073248" y="4940300"/>
+            <a:ext cx="5181600" cy="0"/>
+          </a:xfrm>
+          <a:prstGeom prst="line">
+            <a:avLst/>
+          </a:prstGeom>
+          <a:noFill/>
+          <a:ln w="12700">
+            <a:solidFill>
+              <a:srgbClr val="A5A49E"/>
+            </a:solidFill>
+            <a:prstDash val="solid"/>
+          </a:ln>
+        </p:spPr>
+      </p:sp>
+      <p:sp>
+        <p:nvSpPr>
+          <p:cNvPr id="45" name="Text 43"/>
+          <p:cNvSpPr/>
+          <p:nvPr/>
+        </p:nvSpPr>
+        <p:spPr>
+          <a:xfrm>
+            <a:off x="8305648" y="2885567"/>
+            <a:ext cx="838200" cy="171450"/>
+          </a:xfrm>
+          <a:prstGeom prst="rect">
+            <a:avLst/>
+          </a:prstGeom>
+          <a:noFill/>
+          <a:ln/>
+        </p:spPr>
+        <p:txBody>
+          <a:bodyPr wrap="none" lIns="0" tIns="0" rIns="0" bIns="0" rtlCol="0" anchor="ctr"/>
+          <a:lstStyle/>
+          <a:p>
+            <a:pPr algn="l" indent="0" marL="0">
+              <a:buNone/>
+            </a:pPr>
+            <a:r>
+              <a:rPr lang="en-US" sz="1000" dirty="0">
+                <a:solidFill>
+                  <a:srgbClr val="0B0B0B"/>
+                </a:solidFill>
+                <a:latin typeface="Segoe UI" pitchFamily="34" charset="0"/>
+                <a:ea typeface="Segoe UI" pitchFamily="34" charset="-122"/>
+                <a:cs typeface="Segoe UI" pitchFamily="34" charset="-120"/>
+              </a:rPr>
+              <a:t>Consumer</a:t>
+            </a:r>
+            <a:endParaRPr lang="en-US" sz="1000" dirty="0"/>
+          </a:p>
+        </p:txBody>
+      </p:sp>
+      <p:sp>
+        <p:nvSpPr>
+          <p:cNvPr id="46" name="Text 44"/>
+          <p:cNvSpPr/>
+          <p:nvPr/>
+        </p:nvSpPr>
+        <p:spPr>
+          <a:xfrm>
+            <a:off x="8305648" y="3435731"/>
+            <a:ext cx="838200" cy="171450"/>
+          </a:xfrm>
+          <a:prstGeom prst="rect">
+            <a:avLst/>
+          </a:prstGeom>
+          <a:noFill/>
+          <a:ln/>
+        </p:spPr>
+        <p:txBody>
+          <a:bodyPr wrap="none" lIns="0" tIns="0" rIns="0" bIns="0" rtlCol="0" anchor="ctr"/>
+          <a:lstStyle/>
+          <a:p>
+            <a:pPr algn="l" indent="0" marL="0">
+              <a:buNone/>
+            </a:pPr>
+            <a:r>
+              <a:rPr lang="en-US" sz="1000" dirty="0">
+                <a:solidFill>
+                  <a:srgbClr val="0B0B0B"/>
+                </a:solidFill>
+                <a:latin typeface="Segoe UI" pitchFamily="34" charset="0"/>
+                <a:ea typeface="Segoe UI" pitchFamily="34" charset="-122"/>
+                <a:cs typeface="Segoe UI" pitchFamily="34" charset="-120"/>
+              </a:rPr>
+              <a:t>SMB</a:t>
+            </a:r>
+            <a:endParaRPr lang="en-US" sz="1000" dirty="0"/>
+          </a:p>
+        </p:txBody>
+      </p:sp>
+      <p:sp>
+        <p:nvSpPr>
+          <p:cNvPr id="47" name="Text 45"/>
+          <p:cNvSpPr/>
+          <p:nvPr/>
+        </p:nvSpPr>
+        <p:spPr>
+          <a:xfrm>
+            <a:off x="8305648" y="4314063"/>
+            <a:ext cx="838200" cy="171450"/>
+          </a:xfrm>
+          <a:prstGeom prst="rect">
+            <a:avLst/>
+          </a:prstGeom>
+          <a:noFill/>
+          <a:ln/>
+        </p:spPr>
+        <p:txBody>
+          <a:bodyPr wrap="none" lIns="0" tIns="0" rIns="0" bIns="0" rtlCol="0" anchor="ctr"/>
+          <a:lstStyle/>
+          <a:p>
+            <a:pPr algn="l" indent="0" marL="0">
+              <a:buNone/>
+            </a:pPr>
+            <a:r>
+              <a:rPr lang="en-US" sz="1000" dirty="0">
+                <a:solidFill>
+                  <a:srgbClr val="0B0B0B"/>
+                </a:solidFill>
+                <a:latin typeface="Segoe UI" pitchFamily="34" charset="0"/>
+                <a:ea typeface="Segoe UI" pitchFamily="34" charset="-122"/>
+                <a:cs typeface="Segoe UI" pitchFamily="34" charset="-120"/>
+              </a:rPr>
+              <a:t>Enterprise</a:t>
+            </a:r>
+            <a:endParaRPr lang="en-US" sz="1000" dirty="0"/>
+          </a:p>
+        </p:txBody>
+      </p:sp>
+      <p:sp>
+        <p:nvSpPr>
+          <p:cNvPr id="48" name="Text 46"/>
+          <p:cNvSpPr/>
+          <p:nvPr/>
+        </p:nvSpPr>
+        <p:spPr>
+          <a:xfrm>
+            <a:off x="3073248" y="5187950"/>
+            <a:ext cx="6045200" cy="139700"/>
+          </a:xfrm>
+          <a:prstGeom prst="rect">
+            <a:avLst/>
+          </a:prstGeom>
+          <a:noFill/>
+          <a:ln/>
+        </p:spPr>
+        <p:txBody>
+          <a:bodyPr wrap="none" lIns="0" tIns="0" rIns="0" bIns="0" rtlCol="0" anchor="b"/>
+          <a:lstStyle/>
+          <a:p>
+            <a:pPr algn="l" indent="0" marL="0">
+              <a:buNone/>
+            </a:pPr>
+            <a:r>
+              <a:rPr lang="en-US" sz="850" dirty="0">
+                <a:solidFill>
+                  <a:srgbClr val="52514E"/>
+                </a:solidFill>
+                <a:latin typeface="Segoe UI" pitchFamily="34" charset="0"/>
+                <a:ea typeface="Segoe UI" pitchFamily="34" charset="-122"/>
+                <a:cs typeface="Segoe UI" pitchFamily="34" charset="-120"/>
+              </a:rPr>
+              <a:t>Source: Statistics Denmark, 2024</a:t>
+            </a:r>
+            <a:endParaRPr lang="en-US" sz="850" dirty="0"/>
+          </a:p>
+        </p:txBody>
+      </p:sp>
+    </p:spTree>
+  </p:cSld>
+  <p:clrMapOvr>
+    <a:masterClrMapping/>
+  </p:clrMapOvr>
+</p:sld>
+</file>
+
+<file path=ppt/slides/slide31.xml><?xml version="1.0" encoding="utf-8"?>
+<p:sld xmlns:a="http://schemas.openxmlformats.org/drawingml/2006/main" xmlns:r="http://schemas.openxmlformats.org/officeDocument/2006/relationships" xmlns:p="http://schemas.openxmlformats.org/presentationml/2006/main">
+  <p:cSld name="Slide 31">
+    <p:bg>
+      <p:bgPr>
+        <a:solidFill>
+          <a:srgbClr val="FFFFFF"/>
+        </a:solidFill>
+      </p:bgPr>
+    </p:bg>
+    <p:spTree>
+      <p:nvGrpSpPr>
+        <p:cNvPr id="1" name=""/>
+        <p:cNvGrpSpPr/>
+        <p:nvPr/>
+      </p:nvGrpSpPr>
+      <p:grpSpPr>
+        <a:xfrm>
+          <a:off x="0" y="0"/>
+          <a:ext cx="0" cy="0"/>
+          <a:chOff x="0" y="0"/>
+          <a:chExt cx="0" cy="0"/>
+        </a:xfrm>
+      </p:grpSpPr>
+      <p:sp>
+        <p:nvSpPr>
+          <p:cNvPr id="2" name="Text 0"/>
+          <p:cNvSpPr/>
+          <p:nvPr/>
+        </p:nvSpPr>
+        <p:spPr>
+          <a:xfrm>
+            <a:off x="3047848" y="1524000"/>
+            <a:ext cx="6096000" cy="203200"/>
+          </a:xfrm>
+          <a:prstGeom prst="rect">
+            <a:avLst/>
+          </a:prstGeom>
+          <a:noFill/>
+          <a:ln/>
+        </p:spPr>
+        <p:txBody>
+          <a:bodyPr wrap="none" lIns="0" tIns="0" rIns="0" bIns="0" rtlCol="0" anchor="t"/>
+          <a:lstStyle/>
+          <a:p>
+            <a:pPr algn="l" indent="0" marL="0">
+              <a:buNone/>
+            </a:pPr>
+            <a:r>
+              <a:rPr lang="en-US" sz="1200" b="1" dirty="0">
+                <a:solidFill>
+                  <a:srgbClr val="0B0B0B"/>
+                </a:solidFill>
+                <a:latin typeface="Segoe UI" pitchFamily="34" charset="0"/>
+                <a:ea typeface="Segoe UI" pitchFamily="34" charset="-122"/>
+                <a:cs typeface="Segoe UI" pitchFamily="34" charset="-120"/>
+              </a:rPr>
+              <a:t>Point highlight + speech-bubble callout</a:t>
+            </a:r>
+            <a:endParaRPr lang="en-US" sz="1200" dirty="0"/>
+          </a:p>
+        </p:txBody>
+      </p:sp>
+      <p:sp>
+        <p:nvSpPr>
+          <p:cNvPr id="3" name="Text 1"/>
+          <p:cNvSpPr/>
+          <p:nvPr/>
+        </p:nvSpPr>
+        <p:spPr>
+          <a:xfrm>
+            <a:off x="3073248" y="5143500"/>
+            <a:ext cx="1398270" cy="177800"/>
+          </a:xfrm>
+          <a:prstGeom prst="rect">
+            <a:avLst/>
+          </a:prstGeom>
+          <a:noFill/>
+          <a:ln/>
+        </p:spPr>
+        <p:txBody>
+          <a:bodyPr wrap="none" lIns="0" tIns="0" rIns="0" bIns="0" rtlCol="0" anchor="t"/>
+          <a:lstStyle/>
+          <a:p>
+            <a:pPr algn="ctr" indent="0" marL="0">
+              <a:buNone/>
+            </a:pPr>
+            <a:r>
+              <a:rPr lang="en-US" sz="1000" dirty="0">
+                <a:solidFill>
+                  <a:srgbClr val="0B0B0B"/>
+                </a:solidFill>
+                <a:latin typeface="Segoe UI" pitchFamily="34" charset="0"/>
+                <a:ea typeface="Segoe UI" pitchFamily="34" charset="-122"/>
+                <a:cs typeface="Segoe UI" pitchFamily="34" charset="-120"/>
+              </a:rPr>
+              <a:t>2021</a:t>
+            </a:r>
+            <a:endParaRPr lang="en-US" sz="1000" dirty="0"/>
+          </a:p>
+        </p:txBody>
+      </p:sp>
+      <p:sp>
+        <p:nvSpPr>
+          <p:cNvPr id="4" name="Text 2"/>
+          <p:cNvSpPr/>
+          <p:nvPr/>
+        </p:nvSpPr>
+        <p:spPr>
+          <a:xfrm>
+            <a:off x="4471518" y="5143500"/>
+            <a:ext cx="1398270" cy="177800"/>
+          </a:xfrm>
+          <a:prstGeom prst="rect">
+            <a:avLst/>
+          </a:prstGeom>
+          <a:noFill/>
+          <a:ln/>
+        </p:spPr>
+        <p:txBody>
+          <a:bodyPr wrap="none" lIns="0" tIns="0" rIns="0" bIns="0" rtlCol="0" anchor="t"/>
+          <a:lstStyle/>
+          <a:p>
+            <a:pPr algn="ctr" indent="0" marL="0">
+              <a:buNone/>
+            </a:pPr>
+            <a:r>
+              <a:rPr lang="en-US" sz="1000" dirty="0">
+                <a:solidFill>
+                  <a:srgbClr val="0B0B0B"/>
+                </a:solidFill>
+                <a:latin typeface="Segoe UI" pitchFamily="34" charset="0"/>
+                <a:ea typeface="Segoe UI" pitchFamily="34" charset="-122"/>
+                <a:cs typeface="Segoe UI" pitchFamily="34" charset="-120"/>
+              </a:rPr>
+              <a:t>2022</a:t>
+            </a:r>
+            <a:endParaRPr lang="en-US" sz="1000" dirty="0"/>
+          </a:p>
+        </p:txBody>
+      </p:sp>
+      <p:sp>
+        <p:nvSpPr>
+          <p:cNvPr id="5" name="Text 3"/>
+          <p:cNvSpPr/>
+          <p:nvPr/>
+        </p:nvSpPr>
+        <p:spPr>
+          <a:xfrm>
+            <a:off x="5869788" y="5143500"/>
+            <a:ext cx="1398270" cy="177800"/>
+          </a:xfrm>
+          <a:prstGeom prst="rect">
+            <a:avLst/>
+          </a:prstGeom>
+          <a:noFill/>
+          <a:ln/>
+        </p:spPr>
+        <p:txBody>
+          <a:bodyPr wrap="none" lIns="0" tIns="0" rIns="0" bIns="0" rtlCol="0" anchor="t"/>
+          <a:lstStyle/>
+          <a:p>
+            <a:pPr algn="ctr" indent="0" marL="0">
+              <a:buNone/>
+            </a:pPr>
+            <a:r>
+              <a:rPr lang="en-US" sz="1000" dirty="0">
+                <a:solidFill>
+                  <a:srgbClr val="0B0B0B"/>
+                </a:solidFill>
+                <a:latin typeface="Segoe UI" pitchFamily="34" charset="0"/>
+                <a:ea typeface="Segoe UI" pitchFamily="34" charset="-122"/>
+                <a:cs typeface="Segoe UI" pitchFamily="34" charset="-120"/>
+              </a:rPr>
+              <a:t>2023</a:t>
+            </a:r>
+            <a:endParaRPr lang="en-US" sz="1000" dirty="0"/>
+          </a:p>
+        </p:txBody>
+      </p:sp>
+      <p:sp>
+        <p:nvSpPr>
+          <p:cNvPr id="6" name="Text 4"/>
+          <p:cNvSpPr/>
+          <p:nvPr/>
+        </p:nvSpPr>
+        <p:spPr>
+          <a:xfrm>
+            <a:off x="7268058" y="5143500"/>
+            <a:ext cx="1398270" cy="177800"/>
+          </a:xfrm>
+          <a:prstGeom prst="rect">
+            <a:avLst/>
+          </a:prstGeom>
+          <a:noFill/>
+          <a:ln/>
+        </p:spPr>
+        <p:txBody>
+          <a:bodyPr wrap="none" lIns="0" tIns="0" rIns="0" bIns="0" rtlCol="0" anchor="t"/>
+          <a:lstStyle/>
+          <a:p>
+            <a:pPr algn="ctr" indent="0" marL="0">
+              <a:buNone/>
+            </a:pPr>
+            <a:r>
+              <a:rPr lang="en-US" sz="1000" dirty="0">
+                <a:solidFill>
+                  <a:srgbClr val="0B0B0B"/>
+                </a:solidFill>
+                <a:latin typeface="Segoe UI" pitchFamily="34" charset="0"/>
+                <a:ea typeface="Segoe UI" pitchFamily="34" charset="-122"/>
+                <a:cs typeface="Segoe UI" pitchFamily="34" charset="-120"/>
+              </a:rPr>
+              <a:t>2024</a:t>
+            </a:r>
+            <a:endParaRPr lang="en-US" sz="1000" dirty="0"/>
+          </a:p>
+        </p:txBody>
+      </p:sp>
+      <p:sp>
+        <p:nvSpPr>
+          <p:cNvPr id="7" name="Shape 5"/>
+          <p:cNvSpPr/>
+          <p:nvPr/>
+        </p:nvSpPr>
+        <p:spPr>
+          <a:xfrm>
+            <a:off x="3306293" y="3505200"/>
+            <a:ext cx="932180" cy="1600200"/>
+          </a:xfrm>
+          <a:prstGeom prst="rect">
+            <a:avLst/>
+          </a:prstGeom>
+          <a:solidFill>
+            <a:srgbClr val="2A78D6"/>
+          </a:solidFill>
+          <a:ln w="9525">
+            <a:solidFill>
+              <a:srgbClr val="FFFFFF"/>
+            </a:solidFill>
+            <a:prstDash val="solid"/>
+          </a:ln>
+        </p:spPr>
+      </p:sp>
+      <p:sp>
+        <p:nvSpPr>
+          <p:cNvPr id="8" name="Text 6"/>
+          <p:cNvSpPr/>
+          <p:nvPr/>
+        </p:nvSpPr>
+        <p:spPr>
+          <a:xfrm>
+            <a:off x="3255493" y="4210050"/>
+            <a:ext cx="1033780" cy="190500"/>
+          </a:xfrm>
+          <a:prstGeom prst="rect">
+            <a:avLst/>
+          </a:prstGeom>
+          <a:noFill/>
+          <a:ln/>
+        </p:spPr>
+        <p:txBody>
+          <a:bodyPr wrap="none" lIns="0" tIns="0" rIns="0" bIns="0" rtlCol="0" anchor="ctr"/>
+          <a:lstStyle/>
+          <a:p>
+            <a:pPr algn="ctr" indent="0" marL="0">
+              <a:buNone/>
+            </a:pPr>
+            <a:r>
+              <a:rPr lang="en-US" sz="1000" dirty="0">
+                <a:solidFill>
+                  <a:srgbClr val="FFFFFF"/>
+                </a:solidFill>
+                <a:latin typeface="Segoe UI" pitchFamily="34" charset="0"/>
+                <a:ea typeface="Segoe UI" pitchFamily="34" charset="-122"/>
+                <a:cs typeface="Segoe UI" pitchFamily="34" charset="-120"/>
+              </a:rPr>
+              <a:t>40</a:t>
+            </a:r>
+            <a:endParaRPr lang="en-US" sz="1000" dirty="0"/>
+          </a:p>
+        </p:txBody>
+      </p:sp>
+      <p:sp>
+        <p:nvSpPr>
+          <p:cNvPr id="9" name="Shape 7"/>
+          <p:cNvSpPr/>
+          <p:nvPr/>
+        </p:nvSpPr>
+        <p:spPr>
+          <a:xfrm>
+            <a:off x="3306293" y="3185160"/>
+            <a:ext cx="932180" cy="320040"/>
+          </a:xfrm>
+          <a:prstGeom prst="rect">
+            <a:avLst/>
+          </a:prstGeom>
+          <a:solidFill>
+            <a:srgbClr val="1BAF7A"/>
+          </a:solidFill>
+          <a:ln w="9525">
+            <a:solidFill>
+              <a:srgbClr val="FFFFFF"/>
+            </a:solidFill>
+            <a:prstDash val="solid"/>
+          </a:ln>
+        </p:spPr>
+      </p:sp>
+      <p:sp>
+        <p:nvSpPr>
+          <p:cNvPr id="10" name="Text 8"/>
+          <p:cNvSpPr/>
+          <p:nvPr/>
+        </p:nvSpPr>
+        <p:spPr>
+          <a:xfrm>
+            <a:off x="3255493" y="3249930"/>
+            <a:ext cx="1033780" cy="190500"/>
+          </a:xfrm>
+          <a:prstGeom prst="rect">
+            <a:avLst/>
+          </a:prstGeom>
+          <a:noFill/>
+          <a:ln/>
+        </p:spPr>
+        <p:txBody>
+          <a:bodyPr wrap="none" lIns="0" tIns="0" rIns="0" bIns="0" rtlCol="0" anchor="ctr"/>
+          <a:lstStyle/>
+          <a:p>
+            <a:pPr algn="ctr" indent="0" marL="0">
+              <a:buNone/>
+            </a:pPr>
+            <a:r>
+              <a:rPr lang="en-US" sz="1000" dirty="0">
+                <a:solidFill>
+                  <a:srgbClr val="FFFFFF"/>
+                </a:solidFill>
+                <a:latin typeface="Segoe UI" pitchFamily="34" charset="0"/>
+                <a:ea typeface="Segoe UI" pitchFamily="34" charset="-122"/>
+                <a:cs typeface="Segoe UI" pitchFamily="34" charset="-120"/>
+              </a:rPr>
+              <a:t>8</a:t>
+            </a:r>
+            <a:endParaRPr lang="en-US" sz="1000" dirty="0"/>
+          </a:p>
+        </p:txBody>
+      </p:sp>
+      <p:sp>
+        <p:nvSpPr>
+          <p:cNvPr id="11" name="Shape 9"/>
+          <p:cNvSpPr/>
+          <p:nvPr/>
+        </p:nvSpPr>
+        <p:spPr>
+          <a:xfrm>
+            <a:off x="4704563" y="3345180"/>
+            <a:ext cx="932180" cy="1760220"/>
+          </a:xfrm>
+          <a:prstGeom prst="rect">
+            <a:avLst/>
+          </a:prstGeom>
+          <a:solidFill>
+            <a:srgbClr val="2A78D6"/>
+          </a:solidFill>
+          <a:ln w="9525">
+            <a:solidFill>
+              <a:srgbClr val="FFFFFF"/>
+            </a:solidFill>
+            <a:prstDash val="solid"/>
+          </a:ln>
+        </p:spPr>
+      </p:sp>
+      <p:sp>
+        <p:nvSpPr>
+          <p:cNvPr id="12" name="Text 10"/>
+          <p:cNvSpPr/>
+          <p:nvPr/>
+        </p:nvSpPr>
+        <p:spPr>
+          <a:xfrm>
+            <a:off x="4653763" y="4130040"/>
+            <a:ext cx="1033780" cy="190500"/>
+          </a:xfrm>
+          <a:prstGeom prst="rect">
+            <a:avLst/>
+          </a:prstGeom>
+          <a:noFill/>
+          <a:ln/>
+        </p:spPr>
+        <p:txBody>
+          <a:bodyPr wrap="none" lIns="0" tIns="0" rIns="0" bIns="0" rtlCol="0" anchor="ctr"/>
+          <a:lstStyle/>
+          <a:p>
+            <a:pPr algn="ctr" indent="0" marL="0">
+              <a:buNone/>
+            </a:pPr>
+            <a:r>
+              <a:rPr lang="en-US" sz="1000" dirty="0">
+                <a:solidFill>
+                  <a:srgbClr val="FFFFFF"/>
+                </a:solidFill>
+                <a:latin typeface="Segoe UI" pitchFamily="34" charset="0"/>
+                <a:ea typeface="Segoe UI" pitchFamily="34" charset="-122"/>
+                <a:cs typeface="Segoe UI" pitchFamily="34" charset="-120"/>
+              </a:rPr>
+              <a:t>44</a:t>
+            </a:r>
+            <a:endParaRPr lang="en-US" sz="1000" dirty="0"/>
+          </a:p>
+        </p:txBody>
+      </p:sp>
+      <p:sp>
+        <p:nvSpPr>
+          <p:cNvPr id="13" name="Shape 11"/>
+          <p:cNvSpPr/>
+          <p:nvPr/>
+        </p:nvSpPr>
+        <p:spPr>
+          <a:xfrm>
+            <a:off x="4704563" y="2945130"/>
+            <a:ext cx="932180" cy="400050"/>
+          </a:xfrm>
+          <a:prstGeom prst="rect">
+            <a:avLst/>
+          </a:prstGeom>
+          <a:solidFill>
+            <a:srgbClr val="1BAF7A"/>
+          </a:solidFill>
+          <a:ln w="9525">
+            <a:solidFill>
+              <a:srgbClr val="FFFFFF"/>
+            </a:solidFill>
+            <a:prstDash val="solid"/>
+          </a:ln>
+        </p:spPr>
+      </p:sp>
+      <p:sp>
+        <p:nvSpPr>
+          <p:cNvPr id="14" name="Text 12"/>
+          <p:cNvSpPr/>
+          <p:nvPr/>
+        </p:nvSpPr>
+        <p:spPr>
+          <a:xfrm>
+            <a:off x="4653763" y="3049905"/>
+            <a:ext cx="1033780" cy="190500"/>
+          </a:xfrm>
+          <a:prstGeom prst="rect">
+            <a:avLst/>
+          </a:prstGeom>
+          <a:noFill/>
+          <a:ln/>
+        </p:spPr>
+        <p:txBody>
+          <a:bodyPr wrap="none" lIns="0" tIns="0" rIns="0" bIns="0" rtlCol="0" anchor="ctr"/>
+          <a:lstStyle/>
+          <a:p>
+            <a:pPr algn="ctr" indent="0" marL="0">
+              <a:buNone/>
+            </a:pPr>
+            <a:r>
+              <a:rPr lang="en-US" sz="1000" dirty="0">
+                <a:solidFill>
+                  <a:srgbClr val="FFFFFF"/>
+                </a:solidFill>
+                <a:latin typeface="Segoe UI" pitchFamily="34" charset="0"/>
+                <a:ea typeface="Segoe UI" pitchFamily="34" charset="-122"/>
+                <a:cs typeface="Segoe UI" pitchFamily="34" charset="-120"/>
+              </a:rPr>
+              <a:t>10</a:t>
+            </a:r>
+            <a:endParaRPr lang="en-US" sz="1000" dirty="0"/>
+          </a:p>
+        </p:txBody>
+      </p:sp>
+      <p:sp>
+        <p:nvSpPr>
+          <p:cNvPr id="15" name="Shape 13"/>
+          <p:cNvSpPr/>
+          <p:nvPr/>
+        </p:nvSpPr>
+        <p:spPr>
+          <a:xfrm>
+            <a:off x="6102833" y="3225165"/>
+            <a:ext cx="932180" cy="1880235"/>
+          </a:xfrm>
+          <a:prstGeom prst="rect">
+            <a:avLst/>
+          </a:prstGeom>
+          <a:solidFill>
+            <a:srgbClr val="2A78D6"/>
+          </a:solidFill>
+          <a:ln w="9525">
+            <a:solidFill>
+              <a:srgbClr val="FFFFFF"/>
+            </a:solidFill>
+            <a:prstDash val="solid"/>
+          </a:ln>
+        </p:spPr>
+      </p:sp>
+      <p:sp>
+        <p:nvSpPr>
+          <p:cNvPr id="16" name="Text 14"/>
+          <p:cNvSpPr/>
+          <p:nvPr/>
+        </p:nvSpPr>
+        <p:spPr>
+          <a:xfrm>
+            <a:off x="6052033" y="4070033"/>
+            <a:ext cx="1033780" cy="190500"/>
+          </a:xfrm>
+          <a:prstGeom prst="rect">
+            <a:avLst/>
+          </a:prstGeom>
+          <a:noFill/>
+          <a:ln/>
+        </p:spPr>
+        <p:txBody>
+          <a:bodyPr wrap="none" lIns="0" tIns="0" rIns="0" bIns="0" rtlCol="0" anchor="ctr"/>
+          <a:lstStyle/>
+          <a:p>
+            <a:pPr algn="ctr" indent="0" marL="0">
+              <a:buNone/>
+            </a:pPr>
+            <a:r>
+              <a:rPr lang="en-US" sz="1000" dirty="0">
+                <a:solidFill>
+                  <a:srgbClr val="FFFFFF"/>
+                </a:solidFill>
+                <a:latin typeface="Segoe UI" pitchFamily="34" charset="0"/>
+                <a:ea typeface="Segoe UI" pitchFamily="34" charset="-122"/>
+                <a:cs typeface="Segoe UI" pitchFamily="34" charset="-120"/>
+              </a:rPr>
+              <a:t>47</a:t>
+            </a:r>
+            <a:endParaRPr lang="en-US" sz="1000" dirty="0"/>
+          </a:p>
+        </p:txBody>
+      </p:sp>
+      <p:sp>
+        <p:nvSpPr>
+          <p:cNvPr id="17" name="Shape 15"/>
+          <p:cNvSpPr/>
+          <p:nvPr/>
+        </p:nvSpPr>
+        <p:spPr>
+          <a:xfrm>
+            <a:off x="6102833" y="2385060"/>
+            <a:ext cx="932180" cy="840105"/>
+          </a:xfrm>
+          <a:prstGeom prst="rect">
+            <a:avLst/>
+          </a:prstGeom>
+          <a:solidFill>
+            <a:srgbClr val="E34948"/>
+          </a:solidFill>
+          <a:ln w="9525">
+            <a:solidFill>
+              <a:srgbClr val="FFFFFF"/>
+            </a:solidFill>
+            <a:prstDash val="solid"/>
+          </a:ln>
+        </p:spPr>
+      </p:sp>
+      <p:sp>
+        <p:nvSpPr>
+          <p:cNvPr id="18" name="Text 16"/>
+          <p:cNvSpPr/>
+          <p:nvPr/>
+        </p:nvSpPr>
+        <p:spPr>
+          <a:xfrm>
+            <a:off x="6052033" y="2709863"/>
+            <a:ext cx="1033780" cy="190500"/>
+          </a:xfrm>
+          <a:prstGeom prst="rect">
+            <a:avLst/>
+          </a:prstGeom>
+          <a:noFill/>
+          <a:ln/>
+        </p:spPr>
+        <p:txBody>
+          <a:bodyPr wrap="none" lIns="0" tIns="0" rIns="0" bIns="0" rtlCol="0" anchor="ctr"/>
+          <a:lstStyle/>
+          <a:p>
+            <a:pPr algn="ctr" indent="0" marL="0">
+              <a:buNone/>
+            </a:pPr>
+            <a:r>
+              <a:rPr lang="en-US" sz="1000" dirty="0">
+                <a:solidFill>
+                  <a:srgbClr val="FFFFFF"/>
+                </a:solidFill>
+                <a:latin typeface="Segoe UI" pitchFamily="34" charset="0"/>
+                <a:ea typeface="Segoe UI" pitchFamily="34" charset="-122"/>
+                <a:cs typeface="Segoe UI" pitchFamily="34" charset="-120"/>
+              </a:rPr>
+              <a:t>21</a:t>
+            </a:r>
+            <a:endParaRPr lang="en-US" sz="1000" dirty="0"/>
+          </a:p>
+        </p:txBody>
+      </p:sp>
+      <p:sp>
+        <p:nvSpPr>
+          <p:cNvPr id="19" name="Shape 17"/>
+          <p:cNvSpPr/>
+          <p:nvPr/>
+        </p:nvSpPr>
+        <p:spPr>
+          <a:xfrm>
+            <a:off x="7501103" y="3025140"/>
+            <a:ext cx="932180" cy="2080260"/>
+          </a:xfrm>
+          <a:prstGeom prst="rect">
+            <a:avLst/>
+          </a:prstGeom>
+          <a:solidFill>
+            <a:srgbClr val="2A78D6"/>
+          </a:solidFill>
+          <a:ln w="9525">
+            <a:solidFill>
+              <a:srgbClr val="FFFFFF"/>
+            </a:solidFill>
+            <a:prstDash val="solid"/>
+          </a:ln>
+        </p:spPr>
+      </p:sp>
+      <p:sp>
+        <p:nvSpPr>
+          <p:cNvPr id="20" name="Text 18"/>
+          <p:cNvSpPr/>
+          <p:nvPr/>
+        </p:nvSpPr>
+        <p:spPr>
+          <a:xfrm>
+            <a:off x="7450303" y="3970020"/>
+            <a:ext cx="1033780" cy="190500"/>
+          </a:xfrm>
+          <a:prstGeom prst="rect">
+            <a:avLst/>
+          </a:prstGeom>
+          <a:noFill/>
+          <a:ln/>
+        </p:spPr>
+        <p:txBody>
+          <a:bodyPr wrap="none" lIns="0" tIns="0" rIns="0" bIns="0" rtlCol="0" anchor="ctr"/>
+          <a:lstStyle/>
+          <a:p>
+            <a:pPr algn="ctr" indent="0" marL="0">
+              <a:buNone/>
+            </a:pPr>
+            <a:r>
+              <a:rPr lang="en-US" sz="1000" dirty="0">
+                <a:solidFill>
+                  <a:srgbClr val="FFFFFF"/>
+                </a:solidFill>
+                <a:latin typeface="Segoe UI" pitchFamily="34" charset="0"/>
+                <a:ea typeface="Segoe UI" pitchFamily="34" charset="-122"/>
+                <a:cs typeface="Segoe UI" pitchFamily="34" charset="-120"/>
+              </a:rPr>
+              <a:t>52</a:t>
+            </a:r>
+            <a:endParaRPr lang="en-US" sz="1000" dirty="0"/>
+          </a:p>
+        </p:txBody>
+      </p:sp>
+      <p:sp>
+        <p:nvSpPr>
+          <p:cNvPr id="21" name="Shape 19"/>
+          <p:cNvSpPr/>
+          <p:nvPr/>
+        </p:nvSpPr>
+        <p:spPr>
+          <a:xfrm>
+            <a:off x="7501103" y="2465070"/>
+            <a:ext cx="932180" cy="560070"/>
+          </a:xfrm>
+          <a:prstGeom prst="rect">
+            <a:avLst/>
+          </a:prstGeom>
+          <a:solidFill>
+            <a:srgbClr val="1BAF7A"/>
+          </a:solidFill>
+          <a:ln w="9525">
+            <a:solidFill>
+              <a:srgbClr val="FFFFFF"/>
+            </a:solidFill>
+            <a:prstDash val="solid"/>
+          </a:ln>
+        </p:spPr>
+      </p:sp>
+      <p:sp>
+        <p:nvSpPr>
+          <p:cNvPr id="22" name="Text 20"/>
+          <p:cNvSpPr/>
+          <p:nvPr/>
+        </p:nvSpPr>
+        <p:spPr>
+          <a:xfrm>
+            <a:off x="7450303" y="2649855"/>
+            <a:ext cx="1033780" cy="190500"/>
+          </a:xfrm>
+          <a:prstGeom prst="rect">
+            <a:avLst/>
+          </a:prstGeom>
+          <a:noFill/>
+          <a:ln/>
+        </p:spPr>
+        <p:txBody>
+          <a:bodyPr wrap="none" lIns="0" tIns="0" rIns="0" bIns="0" rtlCol="0" anchor="ctr"/>
+          <a:lstStyle/>
+          <a:p>
+            <a:pPr algn="ctr" indent="0" marL="0">
+              <a:buNone/>
+            </a:pPr>
+            <a:r>
+              <a:rPr lang="en-US" sz="1000" dirty="0">
+                <a:solidFill>
+                  <a:srgbClr val="FFFFFF"/>
+                </a:solidFill>
+                <a:latin typeface="Segoe UI" pitchFamily="34" charset="0"/>
+                <a:ea typeface="Segoe UI" pitchFamily="34" charset="-122"/>
+                <a:cs typeface="Segoe UI" pitchFamily="34" charset="-120"/>
+              </a:rPr>
+              <a:t>14</a:t>
+            </a:r>
+            <a:endParaRPr lang="en-US" sz="1000" dirty="0"/>
+          </a:p>
+        </p:txBody>
+      </p:sp>
+      <p:sp>
+        <p:nvSpPr>
+          <p:cNvPr id="23" name="Shape 21"/>
+          <p:cNvSpPr/>
+          <p:nvPr/>
+        </p:nvSpPr>
+        <p:spPr>
+          <a:xfrm flipV="1">
+            <a:off x="4238473" y="3345180"/>
+            <a:ext cx="466090" cy="160020"/>
+          </a:xfrm>
+          <a:prstGeom prst="line">
+            <a:avLst/>
+          </a:prstGeom>
+          <a:noFill/>
+          <a:ln w="9525">
+            <a:solidFill>
+              <a:srgbClr val="52514E"/>
+            </a:solidFill>
+            <a:prstDash val="solid"/>
+          </a:ln>
+        </p:spPr>
+      </p:sp>
+      <p:sp>
+        <p:nvSpPr>
+          <p:cNvPr id="24" name="Shape 22"/>
+          <p:cNvSpPr/>
+          <p:nvPr/>
+        </p:nvSpPr>
+        <p:spPr>
+          <a:xfrm flipV="1">
+            <a:off x="4238473" y="2945130"/>
+            <a:ext cx="466090" cy="240030"/>
+          </a:xfrm>
+          <a:prstGeom prst="line">
+            <a:avLst/>
+          </a:prstGeom>
+          <a:noFill/>
+          <a:ln w="9525">
+            <a:solidFill>
+              <a:srgbClr val="52514E"/>
+            </a:solidFill>
+            <a:prstDash val="solid"/>
+          </a:ln>
+        </p:spPr>
+      </p:sp>
+      <p:sp>
+        <p:nvSpPr>
+          <p:cNvPr id="25" name="Shape 23"/>
+          <p:cNvSpPr/>
+          <p:nvPr/>
+        </p:nvSpPr>
+        <p:spPr>
+          <a:xfrm flipV="1">
+            <a:off x="5636743" y="3225165"/>
+            <a:ext cx="466090" cy="120015"/>
+          </a:xfrm>
+          <a:prstGeom prst="line">
+            <a:avLst/>
+          </a:prstGeom>
+          <a:noFill/>
+          <a:ln w="9525">
+            <a:solidFill>
+              <a:srgbClr val="52514E"/>
+            </a:solidFill>
+            <a:prstDash val="solid"/>
+          </a:ln>
+        </p:spPr>
+      </p:sp>
+      <p:sp>
+        <p:nvSpPr>
+          <p:cNvPr id="26" name="Shape 24"/>
+          <p:cNvSpPr/>
+          <p:nvPr/>
+        </p:nvSpPr>
+        <p:spPr>
+          <a:xfrm flipV="1">
+            <a:off x="5636743" y="2385060"/>
+            <a:ext cx="466090" cy="560070"/>
+          </a:xfrm>
+          <a:prstGeom prst="line">
+            <a:avLst/>
+          </a:prstGeom>
+          <a:noFill/>
+          <a:ln w="9525">
+            <a:solidFill>
+              <a:srgbClr val="52514E"/>
+            </a:solidFill>
+            <a:prstDash val="solid"/>
+          </a:ln>
+        </p:spPr>
+      </p:sp>
+      <p:sp>
+        <p:nvSpPr>
+          <p:cNvPr id="27" name="Shape 25"/>
+          <p:cNvSpPr/>
+          <p:nvPr/>
+        </p:nvSpPr>
+        <p:spPr>
+          <a:xfrm flipV="1">
+            <a:off x="7035013" y="3025140"/>
+            <a:ext cx="466090" cy="200025"/>
+          </a:xfrm>
+          <a:prstGeom prst="line">
+            <a:avLst/>
+          </a:prstGeom>
+          <a:noFill/>
+          <a:ln w="9525">
+            <a:solidFill>
+              <a:srgbClr val="52514E"/>
+            </a:solidFill>
+            <a:prstDash val="solid"/>
+          </a:ln>
+        </p:spPr>
+      </p:sp>
+      <p:sp>
+        <p:nvSpPr>
+          <p:cNvPr id="28" name="Shape 26"/>
+          <p:cNvSpPr/>
+          <p:nvPr/>
+        </p:nvSpPr>
+        <p:spPr>
+          <a:xfrm>
+            <a:off x="7035013" y="2385060"/>
+            <a:ext cx="466090" cy="80010"/>
+          </a:xfrm>
+          <a:prstGeom prst="line">
+            <a:avLst/>
+          </a:prstGeom>
+          <a:noFill/>
+          <a:ln w="9525">
+            <a:solidFill>
+              <a:srgbClr val="52514E"/>
+            </a:solidFill>
+            <a:prstDash val="solid"/>
+          </a:ln>
+        </p:spPr>
+      </p:sp>
+      <p:sp>
+        <p:nvSpPr>
+          <p:cNvPr id="29" name="Shape 27"/>
+          <p:cNvSpPr/>
+          <p:nvPr/>
+        </p:nvSpPr>
+        <p:spPr>
+          <a:xfrm>
+            <a:off x="3073248" y="5105400"/>
+            <a:ext cx="5593080" cy="0"/>
+          </a:xfrm>
+          <a:prstGeom prst="line">
+            <a:avLst/>
+          </a:prstGeom>
+          <a:noFill/>
+          <a:ln w="12700">
+            <a:solidFill>
+              <a:srgbClr val="A5A49E"/>
+            </a:solidFill>
+            <a:prstDash val="solid"/>
+          </a:ln>
+        </p:spPr>
+      </p:sp>
+      <p:sp>
+        <p:nvSpPr>
+          <p:cNvPr id="30" name="Text 28"/>
+          <p:cNvSpPr/>
+          <p:nvPr/>
+        </p:nvSpPr>
+        <p:spPr>
+          <a:xfrm>
+            <a:off x="8717128" y="2659380"/>
+            <a:ext cx="426720" cy="171450"/>
+          </a:xfrm>
+          <a:prstGeom prst="rect">
+            <a:avLst/>
+          </a:prstGeom>
+          <a:noFill/>
+          <a:ln/>
+        </p:spPr>
+        <p:txBody>
+          <a:bodyPr wrap="none" lIns="0" tIns="0" rIns="0" bIns="0" rtlCol="0" anchor="ctr"/>
+          <a:lstStyle/>
+          <a:p>
+            <a:pPr algn="l" indent="0" marL="0">
+              <a:buNone/>
+            </a:pPr>
+            <a:r>
+              <a:rPr lang="en-US" sz="1000" dirty="0">
+                <a:solidFill>
+                  <a:srgbClr val="0B0B0B"/>
+                </a:solidFill>
+                <a:latin typeface="Segoe UI" pitchFamily="34" charset="0"/>
+                <a:ea typeface="Segoe UI" pitchFamily="34" charset="-122"/>
+                <a:cs typeface="Segoe UI" pitchFamily="34" charset="-120"/>
+              </a:rPr>
+              <a:t>New</a:t>
+            </a:r>
+            <a:endParaRPr lang="en-US" sz="1000" dirty="0"/>
+          </a:p>
+        </p:txBody>
+      </p:sp>
+      <p:sp>
+        <p:nvSpPr>
+          <p:cNvPr id="31" name="Text 29"/>
+          <p:cNvSpPr/>
+          <p:nvPr/>
+        </p:nvSpPr>
+        <p:spPr>
+          <a:xfrm>
+            <a:off x="8717128" y="3979545"/>
+            <a:ext cx="426720" cy="171450"/>
+          </a:xfrm>
+          <a:prstGeom prst="rect">
+            <a:avLst/>
+          </a:prstGeom>
+          <a:noFill/>
+          <a:ln/>
+        </p:spPr>
+        <p:txBody>
+          <a:bodyPr wrap="none" lIns="0" tIns="0" rIns="0" bIns="0" rtlCol="0" anchor="ctr"/>
+          <a:lstStyle/>
+          <a:p>
+            <a:pPr algn="l" indent="0" marL="0">
+              <a:buNone/>
+            </a:pPr>
+            <a:r>
+              <a:rPr lang="en-US" sz="1000" dirty="0">
+                <a:solidFill>
+                  <a:srgbClr val="0B0B0B"/>
+                </a:solidFill>
+                <a:latin typeface="Segoe UI" pitchFamily="34" charset="0"/>
+                <a:ea typeface="Segoe UI" pitchFamily="34" charset="-122"/>
+                <a:cs typeface="Segoe UI" pitchFamily="34" charset="-120"/>
+              </a:rPr>
+              <a:t>Base</a:t>
+            </a:r>
+            <a:endParaRPr lang="en-US" sz="1000" dirty="0"/>
+          </a:p>
+        </p:txBody>
+      </p:sp>
+      <p:sp>
+        <p:nvSpPr>
+          <p:cNvPr id="32" name="Shape 30"/>
+          <p:cNvSpPr/>
+          <p:nvPr/>
+        </p:nvSpPr>
+        <p:spPr>
+          <a:xfrm flipV="1">
+            <a:off x="6568923" y="1959610"/>
+            <a:ext cx="381000" cy="400050"/>
+          </a:xfrm>
+          <a:prstGeom prst="line">
+            <a:avLst/>
+          </a:prstGeom>
+          <a:noFill/>
+          <a:ln w="9525">
+            <a:solidFill>
+              <a:srgbClr val="0B0B0B"/>
+            </a:solidFill>
+            <a:prstDash val="solid"/>
+          </a:ln>
+        </p:spPr>
+      </p:sp>
+      <p:sp>
+        <p:nvSpPr>
+          <p:cNvPr id="33" name="Shape 31"/>
+          <p:cNvSpPr/>
+          <p:nvPr/>
+        </p:nvSpPr>
+        <p:spPr>
+          <a:xfrm>
+            <a:off x="6427953" y="1731010"/>
+            <a:ext cx="1043940" cy="241300"/>
+          </a:xfrm>
+          <a:prstGeom prst="rect">
+            <a:avLst/>
+          </a:prstGeom>
+          <a:solidFill>
+            <a:srgbClr val="FFFFFF"/>
+          </a:solidFill>
+          <a:ln w="12700">
+            <a:solidFill>
+              <a:srgbClr val="0B0B0B"/>
+            </a:solidFill>
+            <a:prstDash val="solid"/>
+          </a:ln>
+        </p:spPr>
+      </p:sp>
+      <p:sp>
+        <p:nvSpPr>
+          <p:cNvPr id="34" name="Text 32"/>
+          <p:cNvSpPr/>
+          <p:nvPr/>
+        </p:nvSpPr>
+        <p:spPr>
+          <a:xfrm>
+            <a:off x="6427953" y="1731010"/>
+            <a:ext cx="1043940" cy="241300"/>
+          </a:xfrm>
+          <a:prstGeom prst="rect">
+            <a:avLst/>
+          </a:prstGeom>
+          <a:noFill/>
+          <a:ln/>
+        </p:spPr>
+        <p:txBody>
+          <a:bodyPr wrap="none" lIns="0" tIns="0" rIns="0" bIns="0" rtlCol="0" anchor="ctr"/>
+          <a:lstStyle/>
+          <a:p>
+            <a:pPr algn="ctr" indent="0" marL="0">
+              <a:buNone/>
+            </a:pPr>
+            <a:r>
+              <a:rPr lang="en-US" sz="1000" dirty="0">
+                <a:solidFill>
+                  <a:srgbClr val="0B0B0B"/>
+                </a:solidFill>
+                <a:latin typeface="Segoe UI" pitchFamily="34" charset="0"/>
+                <a:ea typeface="Segoe UI" pitchFamily="34" charset="-122"/>
+                <a:cs typeface="Segoe UI" pitchFamily="34" charset="-120"/>
+              </a:rPr>
+              <a:t>One-off boost</a:t>
+            </a:r>
+            <a:endParaRPr lang="en-US" sz="1000" dirty="0"/>
+          </a:p>
+        </p:txBody>
+      </p:sp>
+    </p:spTree>
+  </p:cSld>
+  <p:clrMapOvr>
+    <a:masterClrMapping/>
+  </p:clrMapOvr>
+</p:sld>
+</file>
+
+<file path=ppt/slides/slide32.xml><?xml version="1.0" encoding="utf-8"?>
+<p:sld xmlns:a="http://schemas.openxmlformats.org/drawingml/2006/main" xmlns:r="http://schemas.openxmlformats.org/officeDocument/2006/relationships" xmlns:p="http://schemas.openxmlformats.org/presentationml/2006/main">
+  <p:cSld name="Slide 32">
+    <p:bg>
+      <p:bgPr>
+        <a:solidFill>
+          <a:srgbClr val="FFFFFF"/>
+        </a:solidFill>
+      </p:bgPr>
+    </p:bg>
+    <p:spTree>
+      <p:nvGrpSpPr>
+        <p:cNvPr id="1" name=""/>
+        <p:cNvGrpSpPr/>
+        <p:nvPr/>
+      </p:nvGrpSpPr>
+      <p:grpSpPr>
+        <a:xfrm>
+          <a:off x="0" y="0"/>
+          <a:ext cx="0" cy="0"/>
+          <a:chOff x="0" y="0"/>
+          <a:chExt cx="0" cy="0"/>
+        </a:xfrm>
+      </p:grpSpPr>
+      <p:sp>
+        <p:nvSpPr>
+          <p:cNvPr id="2" name="Shape 0"/>
+          <p:cNvSpPr/>
+          <p:nvPr/>
+        </p:nvSpPr>
+        <p:spPr>
+          <a:xfrm>
+            <a:off x="3479648" y="2438400"/>
+            <a:ext cx="5613400" cy="533400"/>
+          </a:xfrm>
+          <a:prstGeom prst="rect">
+            <a:avLst/>
+          </a:prstGeom>
+          <a:solidFill>
+            <a:srgbClr val="F2F1EC"/>
+          </a:solidFill>
+          <a:ln/>
+        </p:spPr>
+      </p:sp>
+      <p:sp>
+        <p:nvSpPr>
+          <p:cNvPr id="3" name="Text 1"/>
+          <p:cNvSpPr/>
+          <p:nvPr/>
+        </p:nvSpPr>
+        <p:spPr>
+          <a:xfrm>
+            <a:off x="3517748" y="2451100"/>
+            <a:ext cx="5537200" cy="165100"/>
+          </a:xfrm>
+          <a:prstGeom prst="rect">
+            <a:avLst/>
+          </a:prstGeom>
+          <a:noFill/>
+          <a:ln/>
+        </p:spPr>
+        <p:txBody>
+          <a:bodyPr wrap="none" lIns="0" tIns="0" rIns="0" bIns="0" rtlCol="0" anchor="t"/>
+          <a:lstStyle/>
+          <a:p>
+            <a:pPr algn="l" indent="0" marL="0">
+              <a:buNone/>
+            </a:pPr>
+            <a:r>
+              <a:rPr lang="en-US" sz="900" dirty="0">
+                <a:solidFill>
+                  <a:srgbClr val="52514E"/>
+                </a:solidFill>
+                <a:latin typeface="Segoe UI" pitchFamily="34" charset="0"/>
+                <a:ea typeface="Segoe UI" pitchFamily="34" charset="-122"/>
+                <a:cs typeface="Segoe UI" pitchFamily="34" charset="-120"/>
+              </a:rPr>
+              <a:t>Target range</a:t>
+            </a:r>
+            <a:endParaRPr lang="en-US" sz="900" dirty="0"/>
+          </a:p>
+        </p:txBody>
+      </p:sp>
+      <p:sp>
+        <p:nvSpPr>
+          <p:cNvPr id="4" name="Text 2"/>
+          <p:cNvSpPr/>
+          <p:nvPr/>
+        </p:nvSpPr>
+        <p:spPr>
+          <a:xfrm>
+            <a:off x="3047848" y="1524000"/>
+            <a:ext cx="6096000" cy="203200"/>
+          </a:xfrm>
+          <a:prstGeom prst="rect">
+            <a:avLst/>
+          </a:prstGeom>
+          <a:noFill/>
+          <a:ln/>
+        </p:spPr>
+        <p:txBody>
+          <a:bodyPr wrap="none" lIns="0" tIns="0" rIns="0" bIns="0" rtlCol="0" anchor="t"/>
+          <a:lstStyle/>
+          <a:p>
+            <a:pPr algn="l" indent="0" marL="0">
+              <a:buNone/>
+            </a:pPr>
+            <a:r>
+              <a:rPr lang="en-US" sz="1200" b="1" dirty="0">
+                <a:solidFill>
+                  <a:srgbClr val="0B0B0B"/>
+                </a:solidFill>
+                <a:latin typeface="Segoe UI" pitchFamily="34" charset="0"/>
+                <a:ea typeface="Segoe UI" pitchFamily="34" charset="-122"/>
+                <a:cs typeface="Segoe UI" pitchFamily="34" charset="-120"/>
+              </a:rPr>
+              <a:t>Background band (target range) + line highlight</a:t>
+            </a:r>
+            <a:endParaRPr lang="en-US" sz="1200" dirty="0"/>
+          </a:p>
+        </p:txBody>
+      </p:sp>
+      <p:sp>
+        <p:nvSpPr>
+          <p:cNvPr id="5" name="Text 3"/>
+          <p:cNvSpPr/>
+          <p:nvPr/>
+        </p:nvSpPr>
+        <p:spPr>
+          <a:xfrm>
+            <a:off x="3047848" y="5016500"/>
+            <a:ext cx="381000" cy="177800"/>
+          </a:xfrm>
+          <a:prstGeom prst="rect">
+            <a:avLst/>
+          </a:prstGeom>
+          <a:noFill/>
+          <a:ln/>
+        </p:spPr>
+        <p:txBody>
+          <a:bodyPr wrap="none" lIns="0" tIns="0" rIns="0" bIns="0" rtlCol="0" anchor="ctr"/>
+          <a:lstStyle/>
+          <a:p>
+            <a:pPr algn="r" indent="0" marL="0">
+              <a:buNone/>
+            </a:pPr>
+            <a:r>
+              <a:rPr lang="en-US" sz="900" dirty="0">
+                <a:solidFill>
+                  <a:srgbClr val="52514E"/>
+                </a:solidFill>
+                <a:latin typeface="Segoe UI" pitchFamily="34" charset="0"/>
+                <a:ea typeface="Segoe UI" pitchFamily="34" charset="-122"/>
+                <a:cs typeface="Segoe UI" pitchFamily="34" charset="-120"/>
+              </a:rPr>
+              <a:t>0</a:t>
+            </a:r>
+            <a:endParaRPr lang="en-US" sz="900" dirty="0"/>
+          </a:p>
+        </p:txBody>
+      </p:sp>
+      <p:sp>
+        <p:nvSpPr>
+          <p:cNvPr id="6" name="Text 4"/>
+          <p:cNvSpPr/>
+          <p:nvPr/>
+        </p:nvSpPr>
+        <p:spPr>
+          <a:xfrm>
+            <a:off x="3047848" y="3949700"/>
+            <a:ext cx="381000" cy="177800"/>
+          </a:xfrm>
+          <a:prstGeom prst="rect">
+            <a:avLst/>
+          </a:prstGeom>
+          <a:noFill/>
+          <a:ln/>
+        </p:spPr>
+        <p:txBody>
+          <a:bodyPr wrap="none" lIns="0" tIns="0" rIns="0" bIns="0" rtlCol="0" anchor="ctr"/>
+          <a:lstStyle/>
+          <a:p>
+            <a:pPr algn="r" indent="0" marL="0">
+              <a:buNone/>
+            </a:pPr>
+            <a:r>
+              <a:rPr lang="en-US" sz="900" dirty="0">
+                <a:solidFill>
+                  <a:srgbClr val="52514E"/>
+                </a:solidFill>
+                <a:latin typeface="Segoe UI" pitchFamily="34" charset="0"/>
+                <a:ea typeface="Segoe UI" pitchFamily="34" charset="-122"/>
+                <a:cs typeface="Segoe UI" pitchFamily="34" charset="-120"/>
+              </a:rPr>
+              <a:t>20</a:t>
+            </a:r>
+            <a:endParaRPr lang="en-US" sz="900" dirty="0"/>
+          </a:p>
+        </p:txBody>
+      </p:sp>
+      <p:sp>
+        <p:nvSpPr>
+          <p:cNvPr id="7" name="Text 5"/>
+          <p:cNvSpPr/>
+          <p:nvPr/>
+        </p:nvSpPr>
+        <p:spPr>
+          <a:xfrm>
+            <a:off x="3047848" y="2882900"/>
+            <a:ext cx="381000" cy="177800"/>
+          </a:xfrm>
+          <a:prstGeom prst="rect">
+            <a:avLst/>
+          </a:prstGeom>
+          <a:noFill/>
+          <a:ln/>
+        </p:spPr>
+        <p:txBody>
+          <a:bodyPr wrap="none" lIns="0" tIns="0" rIns="0" bIns="0" rtlCol="0" anchor="ctr"/>
+          <a:lstStyle/>
+          <a:p>
+            <a:pPr algn="r" indent="0" marL="0">
+              <a:buNone/>
+            </a:pPr>
+            <a:r>
+              <a:rPr lang="en-US" sz="900" dirty="0">
+                <a:solidFill>
+                  <a:srgbClr val="52514E"/>
+                </a:solidFill>
+                <a:latin typeface="Segoe UI" pitchFamily="34" charset="0"/>
+                <a:ea typeface="Segoe UI" pitchFamily="34" charset="-122"/>
+                <a:cs typeface="Segoe UI" pitchFamily="34" charset="-120"/>
+              </a:rPr>
+              <a:t>40</a:t>
+            </a:r>
+            <a:endParaRPr lang="en-US" sz="900" dirty="0"/>
+          </a:p>
+        </p:txBody>
+      </p:sp>
+      <p:sp>
+        <p:nvSpPr>
+          <p:cNvPr id="8" name="Text 6"/>
+          <p:cNvSpPr/>
+          <p:nvPr/>
+        </p:nvSpPr>
+        <p:spPr>
+          <a:xfrm>
+            <a:off x="3047848" y="1816100"/>
+            <a:ext cx="381000" cy="177800"/>
+          </a:xfrm>
+          <a:prstGeom prst="rect">
+            <a:avLst/>
+          </a:prstGeom>
+          <a:noFill/>
+          <a:ln/>
+        </p:spPr>
+        <p:txBody>
+          <a:bodyPr wrap="none" lIns="0" tIns="0" rIns="0" bIns="0" rtlCol="0" anchor="ctr"/>
+          <a:lstStyle/>
+          <a:p>
+            <a:pPr algn="r" indent="0" marL="0">
+              <a:buNone/>
+            </a:pPr>
+            <a:r>
+              <a:rPr lang="en-US" sz="900" dirty="0">
+                <a:solidFill>
+                  <a:srgbClr val="52514E"/>
+                </a:solidFill>
+                <a:latin typeface="Segoe UI" pitchFamily="34" charset="0"/>
+                <a:ea typeface="Segoe UI" pitchFamily="34" charset="-122"/>
+                <a:cs typeface="Segoe UI" pitchFamily="34" charset="-120"/>
+              </a:rPr>
+              <a:t>60</a:t>
+            </a:r>
+            <a:endParaRPr lang="en-US" sz="900" dirty="0"/>
+          </a:p>
+        </p:txBody>
+      </p:sp>
+      <p:sp>
+        <p:nvSpPr>
+          <p:cNvPr id="9" name="Text 7"/>
+          <p:cNvSpPr/>
+          <p:nvPr/>
+        </p:nvSpPr>
+        <p:spPr>
+          <a:xfrm>
+            <a:off x="3479648" y="5143500"/>
+            <a:ext cx="1403350" cy="177800"/>
+          </a:xfrm>
+          <a:prstGeom prst="rect">
+            <a:avLst/>
+          </a:prstGeom>
+          <a:noFill/>
+          <a:ln/>
+        </p:spPr>
+        <p:txBody>
+          <a:bodyPr wrap="none" lIns="0" tIns="0" rIns="0" bIns="0" rtlCol="0" anchor="t"/>
+          <a:lstStyle/>
+          <a:p>
+            <a:pPr algn="ctr" indent="0" marL="0">
+              <a:buNone/>
+            </a:pPr>
+            <a:r>
+              <a:rPr lang="en-US" sz="1000" dirty="0">
+                <a:solidFill>
+                  <a:srgbClr val="0B0B0B"/>
+                </a:solidFill>
+                <a:latin typeface="Segoe UI" pitchFamily="34" charset="0"/>
+                <a:ea typeface="Segoe UI" pitchFamily="34" charset="-122"/>
+                <a:cs typeface="Segoe UI" pitchFamily="34" charset="-120"/>
+              </a:rPr>
+              <a:t>Q1</a:t>
+            </a:r>
+            <a:endParaRPr lang="en-US" sz="1000" dirty="0"/>
+          </a:p>
+        </p:txBody>
+      </p:sp>
+      <p:sp>
+        <p:nvSpPr>
+          <p:cNvPr id="10" name="Text 8"/>
+          <p:cNvSpPr/>
+          <p:nvPr/>
+        </p:nvSpPr>
+        <p:spPr>
+          <a:xfrm>
+            <a:off x="4882998" y="5143500"/>
+            <a:ext cx="1403350" cy="177800"/>
+          </a:xfrm>
+          <a:prstGeom prst="rect">
+            <a:avLst/>
+          </a:prstGeom>
+          <a:noFill/>
+          <a:ln/>
+        </p:spPr>
+        <p:txBody>
+          <a:bodyPr wrap="none" lIns="0" tIns="0" rIns="0" bIns="0" rtlCol="0" anchor="t"/>
+          <a:lstStyle/>
+          <a:p>
+            <a:pPr algn="ctr" indent="0" marL="0">
+              <a:buNone/>
+            </a:pPr>
+            <a:r>
+              <a:rPr lang="en-US" sz="1000" dirty="0">
+                <a:solidFill>
+                  <a:srgbClr val="0B0B0B"/>
+                </a:solidFill>
+                <a:latin typeface="Segoe UI" pitchFamily="34" charset="0"/>
+                <a:ea typeface="Segoe UI" pitchFamily="34" charset="-122"/>
+                <a:cs typeface="Segoe UI" pitchFamily="34" charset="-120"/>
+              </a:rPr>
+              <a:t>Q2</a:t>
+            </a:r>
+            <a:endParaRPr lang="en-US" sz="1000" dirty="0"/>
+          </a:p>
+        </p:txBody>
+      </p:sp>
+      <p:sp>
+        <p:nvSpPr>
+          <p:cNvPr id="11" name="Text 9"/>
+          <p:cNvSpPr/>
+          <p:nvPr/>
+        </p:nvSpPr>
+        <p:spPr>
+          <a:xfrm>
+            <a:off x="6286348" y="5143500"/>
+            <a:ext cx="1403350" cy="177800"/>
+          </a:xfrm>
+          <a:prstGeom prst="rect">
+            <a:avLst/>
+          </a:prstGeom>
+          <a:noFill/>
+          <a:ln/>
+        </p:spPr>
+        <p:txBody>
+          <a:bodyPr wrap="none" lIns="0" tIns="0" rIns="0" bIns="0" rtlCol="0" anchor="t"/>
+          <a:lstStyle/>
+          <a:p>
+            <a:pPr algn="ctr" indent="0" marL="0">
+              <a:buNone/>
+            </a:pPr>
+            <a:r>
+              <a:rPr lang="en-US" sz="1000" dirty="0">
+                <a:solidFill>
+                  <a:srgbClr val="0B0B0B"/>
+                </a:solidFill>
+                <a:latin typeface="Segoe UI" pitchFamily="34" charset="0"/>
+                <a:ea typeface="Segoe UI" pitchFamily="34" charset="-122"/>
+                <a:cs typeface="Segoe UI" pitchFamily="34" charset="-120"/>
+              </a:rPr>
+              <a:t>Q3</a:t>
+            </a:r>
+            <a:endParaRPr lang="en-US" sz="1000" dirty="0"/>
+          </a:p>
+        </p:txBody>
+      </p:sp>
+      <p:sp>
+        <p:nvSpPr>
+          <p:cNvPr id="12" name="Text 10"/>
+          <p:cNvSpPr/>
+          <p:nvPr/>
+        </p:nvSpPr>
+        <p:spPr>
+          <a:xfrm>
+            <a:off x="7689698" y="5143500"/>
+            <a:ext cx="1403350" cy="177800"/>
+          </a:xfrm>
+          <a:prstGeom prst="rect">
+            <a:avLst/>
+          </a:prstGeom>
+          <a:noFill/>
+          <a:ln/>
+        </p:spPr>
+        <p:txBody>
+          <a:bodyPr wrap="none" lIns="0" tIns="0" rIns="0" bIns="0" rtlCol="0" anchor="t"/>
+          <a:lstStyle/>
+          <a:p>
+            <a:pPr algn="ctr" indent="0" marL="0">
+              <a:buNone/>
+            </a:pPr>
+            <a:r>
+              <a:rPr lang="en-US" sz="1000" dirty="0">
+                <a:solidFill>
+                  <a:srgbClr val="0B0B0B"/>
+                </a:solidFill>
+                <a:latin typeface="Segoe UI" pitchFamily="34" charset="0"/>
+                <a:ea typeface="Segoe UI" pitchFamily="34" charset="-122"/>
+                <a:cs typeface="Segoe UI" pitchFamily="34" charset="-120"/>
+              </a:rPr>
+              <a:t>Q4</a:t>
+            </a:r>
+            <a:endParaRPr lang="en-US" sz="1000" dirty="0"/>
+          </a:p>
+        </p:txBody>
+      </p:sp>
+      <p:sp>
+        <p:nvSpPr>
+          <p:cNvPr id="13" name="Shape 11"/>
+          <p:cNvSpPr/>
+          <p:nvPr/>
+        </p:nvSpPr>
+        <p:spPr>
+          <a:xfrm>
+            <a:off x="3719889" y="3078480"/>
+            <a:ext cx="922867" cy="2026920"/>
+          </a:xfrm>
+          <a:prstGeom prst="rect">
+            <a:avLst/>
+          </a:prstGeom>
+          <a:solidFill>
+            <a:srgbClr val="2A78D6"/>
+          </a:solidFill>
+          <a:ln/>
+        </p:spPr>
+      </p:sp>
+      <p:sp>
+        <p:nvSpPr>
+          <p:cNvPr id="14" name="Text 12"/>
+          <p:cNvSpPr/>
+          <p:nvPr/>
+        </p:nvSpPr>
+        <p:spPr>
+          <a:xfrm>
+            <a:off x="3669089" y="3996690"/>
+            <a:ext cx="1024467" cy="190500"/>
+          </a:xfrm>
+          <a:prstGeom prst="rect">
+            <a:avLst/>
+          </a:prstGeom>
+          <a:noFill/>
+          <a:ln/>
+        </p:spPr>
+        <p:txBody>
+          <a:bodyPr wrap="none" lIns="0" tIns="0" rIns="0" bIns="0" rtlCol="0" anchor="ctr"/>
+          <a:lstStyle/>
+          <a:p>
+            <a:pPr algn="ctr" indent="0" marL="0">
+              <a:buNone/>
+            </a:pPr>
+            <a:r>
+              <a:rPr lang="en-US" sz="1000" dirty="0">
+                <a:solidFill>
+                  <a:srgbClr val="FFFFFF"/>
+                </a:solidFill>
+                <a:latin typeface="Segoe UI" pitchFamily="34" charset="0"/>
+                <a:ea typeface="Segoe UI" pitchFamily="34" charset="-122"/>
+                <a:cs typeface="Segoe UI" pitchFamily="34" charset="-120"/>
+              </a:rPr>
+              <a:t>38</a:t>
+            </a:r>
+            <a:endParaRPr lang="en-US" sz="1000" dirty="0"/>
+          </a:p>
+        </p:txBody>
+      </p:sp>
+      <p:sp>
+        <p:nvSpPr>
+          <p:cNvPr id="15" name="Shape 13"/>
+          <p:cNvSpPr/>
+          <p:nvPr/>
+        </p:nvSpPr>
+        <p:spPr>
+          <a:xfrm>
+            <a:off x="5123239" y="2705100"/>
+            <a:ext cx="922867" cy="2400300"/>
+          </a:xfrm>
+          <a:prstGeom prst="rect">
+            <a:avLst/>
+          </a:prstGeom>
+          <a:solidFill>
+            <a:srgbClr val="2A78D6"/>
+          </a:solidFill>
+          <a:ln/>
+        </p:spPr>
+      </p:sp>
+      <p:sp>
+        <p:nvSpPr>
+          <p:cNvPr id="16" name="Text 14"/>
+          <p:cNvSpPr/>
+          <p:nvPr/>
+        </p:nvSpPr>
+        <p:spPr>
+          <a:xfrm>
+            <a:off x="5072439" y="3810000"/>
+            <a:ext cx="1024467" cy="190500"/>
+          </a:xfrm>
+          <a:prstGeom prst="rect">
+            <a:avLst/>
+          </a:prstGeom>
+          <a:noFill/>
+          <a:ln/>
+        </p:spPr>
+        <p:txBody>
+          <a:bodyPr wrap="none" lIns="0" tIns="0" rIns="0" bIns="0" rtlCol="0" anchor="ctr"/>
+          <a:lstStyle/>
+          <a:p>
+            <a:pPr algn="ctr" indent="0" marL="0">
+              <a:buNone/>
+            </a:pPr>
+            <a:r>
+              <a:rPr lang="en-US" sz="1000" dirty="0">
+                <a:solidFill>
+                  <a:srgbClr val="FFFFFF"/>
+                </a:solidFill>
+                <a:latin typeface="Segoe UI" pitchFamily="34" charset="0"/>
+                <a:ea typeface="Segoe UI" pitchFamily="34" charset="-122"/>
+                <a:cs typeface="Segoe UI" pitchFamily="34" charset="-120"/>
+              </a:rPr>
+              <a:t>45</a:t>
+            </a:r>
+            <a:endParaRPr lang="en-US" sz="1000" dirty="0"/>
+          </a:p>
+        </p:txBody>
+      </p:sp>
+      <p:sp>
+        <p:nvSpPr>
+          <p:cNvPr id="17" name="Shape 15"/>
+          <p:cNvSpPr/>
+          <p:nvPr/>
+        </p:nvSpPr>
+        <p:spPr>
+          <a:xfrm>
+            <a:off x="6526589" y="2331720"/>
+            <a:ext cx="922867" cy="2773680"/>
+          </a:xfrm>
+          <a:prstGeom prst="rect">
+            <a:avLst/>
+          </a:prstGeom>
+          <a:solidFill>
+            <a:srgbClr val="2A78D6"/>
+          </a:solidFill>
+          <a:ln/>
+        </p:spPr>
+      </p:sp>
+      <p:sp>
+        <p:nvSpPr>
+          <p:cNvPr id="18" name="Text 16"/>
+          <p:cNvSpPr/>
+          <p:nvPr/>
+        </p:nvSpPr>
+        <p:spPr>
+          <a:xfrm>
+            <a:off x="6475789" y="3623310"/>
+            <a:ext cx="1024467" cy="190500"/>
+          </a:xfrm>
+          <a:prstGeom prst="rect">
+            <a:avLst/>
+          </a:prstGeom>
+          <a:noFill/>
+          <a:ln/>
+        </p:spPr>
+        <p:txBody>
+          <a:bodyPr wrap="none" lIns="0" tIns="0" rIns="0" bIns="0" rtlCol="0" anchor="ctr"/>
+          <a:lstStyle/>
+          <a:p>
+            <a:pPr algn="ctr" indent="0" marL="0">
+              <a:buNone/>
+            </a:pPr>
+            <a:r>
+              <a:rPr lang="en-US" sz="1000" dirty="0">
+                <a:solidFill>
+                  <a:srgbClr val="FFFFFF"/>
+                </a:solidFill>
+                <a:latin typeface="Segoe UI" pitchFamily="34" charset="0"/>
+                <a:ea typeface="Segoe UI" pitchFamily="34" charset="-122"/>
+                <a:cs typeface="Segoe UI" pitchFamily="34" charset="-120"/>
+              </a:rPr>
+              <a:t>52</a:t>
+            </a:r>
+            <a:endParaRPr lang="en-US" sz="1000" dirty="0"/>
+          </a:p>
+        </p:txBody>
+      </p:sp>
+      <p:sp>
+        <p:nvSpPr>
+          <p:cNvPr id="19" name="Shape 17"/>
+          <p:cNvSpPr/>
+          <p:nvPr/>
+        </p:nvSpPr>
+        <p:spPr>
+          <a:xfrm>
+            <a:off x="7929939" y="2491740"/>
+            <a:ext cx="922867" cy="2613660"/>
+          </a:xfrm>
+          <a:prstGeom prst="rect">
+            <a:avLst/>
+          </a:prstGeom>
+          <a:solidFill>
+            <a:srgbClr val="2A78D6"/>
+          </a:solidFill>
+          <a:ln/>
+        </p:spPr>
+      </p:sp>
+      <p:sp>
+        <p:nvSpPr>
+          <p:cNvPr id="20" name="Text 18"/>
+          <p:cNvSpPr/>
+          <p:nvPr/>
+        </p:nvSpPr>
+        <p:spPr>
+          <a:xfrm>
+            <a:off x="7879139" y="3703320"/>
+            <a:ext cx="1024467" cy="190500"/>
+          </a:xfrm>
+          <a:prstGeom prst="rect">
+            <a:avLst/>
+          </a:prstGeom>
+          <a:noFill/>
+          <a:ln/>
+        </p:spPr>
+        <p:txBody>
+          <a:bodyPr wrap="none" lIns="0" tIns="0" rIns="0" bIns="0" rtlCol="0" anchor="ctr"/>
+          <a:lstStyle/>
+          <a:p>
+            <a:pPr algn="ctr" indent="0" marL="0">
+              <a:buNone/>
+            </a:pPr>
+            <a:r>
+              <a:rPr lang="en-US" sz="1000" dirty="0">
+                <a:solidFill>
+                  <a:srgbClr val="FFFFFF"/>
+                </a:solidFill>
+                <a:latin typeface="Segoe UI" pitchFamily="34" charset="0"/>
+                <a:ea typeface="Segoe UI" pitchFamily="34" charset="-122"/>
+                <a:cs typeface="Segoe UI" pitchFamily="34" charset="-120"/>
+              </a:rPr>
+              <a:t>49</a:t>
+            </a:r>
+            <a:endParaRPr lang="en-US" sz="1000" dirty="0"/>
+          </a:p>
+        </p:txBody>
+      </p:sp>
+      <p:sp>
+        <p:nvSpPr>
+          <p:cNvPr id="21" name="Shape 19"/>
+          <p:cNvSpPr/>
+          <p:nvPr/>
+        </p:nvSpPr>
+        <p:spPr>
+          <a:xfrm>
+            <a:off x="3479648" y="5105400"/>
+            <a:ext cx="5613400" cy="0"/>
+          </a:xfrm>
+          <a:prstGeom prst="line">
+            <a:avLst/>
+          </a:prstGeom>
+          <a:noFill/>
+          <a:ln w="12700">
+            <a:solidFill>
+              <a:srgbClr val="A5A49E"/>
+            </a:solidFill>
+            <a:prstDash val="solid"/>
+          </a:ln>
+        </p:spPr>
+      </p:sp>
+    </p:spTree>
+  </p:cSld>
+  <p:clrMapOvr>
+    <a:masterClrMapping/>
+  </p:clrMapOvr>
+</p:sld>
+</file>
+
+<file path=ppt/slides/slide33.xml><?xml version="1.0" encoding="utf-8"?>
+<p:sld xmlns:a="http://schemas.openxmlformats.org/drawingml/2006/main" xmlns:r="http://schemas.openxmlformats.org/officeDocument/2006/relationships" xmlns:p="http://schemas.openxmlformats.org/presentationml/2006/main">
+  <p:cSld name="Slide 33">
+    <p:bg>
+      <p:bgPr>
+        <a:solidFill>
+          <a:srgbClr val="FFFFFF"/>
+        </a:solidFill>
+      </p:bgPr>
+    </p:bg>
+    <p:spTree>
+      <p:nvGrpSpPr>
+        <p:cNvPr id="1" name=""/>
+        <p:cNvGrpSpPr/>
+        <p:nvPr/>
+      </p:nvGrpSpPr>
+      <p:grpSpPr>
+        <a:xfrm>
+          <a:off x="0" y="0"/>
+          <a:ext cx="0" cy="0"/>
+          <a:chOff x="0" y="0"/>
+          <a:chExt cx="0" cy="0"/>
+        </a:xfrm>
+      </p:grpSpPr>
+      <p:sp>
+        <p:nvSpPr>
+          <p:cNvPr id="2" name="Text 0"/>
+          <p:cNvSpPr/>
+          <p:nvPr/>
+        </p:nvSpPr>
+        <p:spPr>
+          <a:xfrm>
+            <a:off x="3047848" y="1524000"/>
+            <a:ext cx="6096000" cy="203200"/>
+          </a:xfrm>
+          <a:prstGeom prst="rect">
+            <a:avLst/>
+          </a:prstGeom>
+          <a:noFill/>
+          <a:ln/>
+        </p:spPr>
+        <p:txBody>
+          <a:bodyPr wrap="none" lIns="0" tIns="0" rIns="0" bIns="0" rtlCol="0" anchor="t"/>
+          <a:lstStyle/>
+          <a:p>
+            <a:pPr algn="l" indent="0" marL="0">
+              <a:buNone/>
+            </a:pPr>
+            <a:r>
+              <a:rPr lang="en-US" sz="1200" b="1" dirty="0">
+                <a:solidFill>
+                  <a:srgbClr val="0B0B0B"/>
+                </a:solidFill>
+                <a:latin typeface="Segoe UI" pitchFamily="34" charset="0"/>
+                <a:ea typeface="Segoe UI" pitchFamily="34" charset="-122"/>
+                <a:cs typeface="Segoe UI" pitchFamily="34" charset="-120"/>
+              </a:rPr>
+              <a:t>Scatter background bands (quadrant regions)</a:t>
+            </a:r>
+            <a:endParaRPr lang="en-US" sz="1200" dirty="0"/>
+          </a:p>
+        </p:txBody>
+      </p:sp>
+      <p:sp>
+        <p:nvSpPr>
+          <p:cNvPr id="3" name="Shape 1"/>
+          <p:cNvSpPr/>
+          <p:nvPr/>
+        </p:nvSpPr>
+        <p:spPr>
+          <a:xfrm>
+            <a:off x="6956273" y="1879600"/>
+            <a:ext cx="2085975" cy="3251200"/>
+          </a:xfrm>
+          <a:prstGeom prst="rect">
+            <a:avLst/>
+          </a:prstGeom>
+          <a:solidFill>
+            <a:srgbClr val="E8F0E4"/>
+          </a:solidFill>
+          <a:ln/>
+        </p:spPr>
+      </p:sp>
+      <p:sp>
+        <p:nvSpPr>
+          <p:cNvPr id="4" name="Text 2"/>
+          <p:cNvSpPr/>
+          <p:nvPr/>
+        </p:nvSpPr>
+        <p:spPr>
+          <a:xfrm>
+            <a:off x="6994373" y="1892300"/>
+            <a:ext cx="2009775" cy="165100"/>
+          </a:xfrm>
+          <a:prstGeom prst="rect">
+            <a:avLst/>
+          </a:prstGeom>
+          <a:noFill/>
+          <a:ln/>
+        </p:spPr>
+        <p:txBody>
+          <a:bodyPr wrap="none" lIns="0" tIns="0" rIns="0" bIns="0" rtlCol="0" anchor="t"/>
+          <a:lstStyle/>
+          <a:p>
+            <a:pPr algn="l" indent="0" marL="0">
+              <a:buNone/>
+            </a:pPr>
+            <a:r>
+              <a:rPr lang="en-US" sz="900" dirty="0">
+                <a:solidFill>
+                  <a:srgbClr val="52514E"/>
+                </a:solidFill>
+                <a:latin typeface="Segoe UI" pitchFamily="34" charset="0"/>
+                <a:ea typeface="Segoe UI" pitchFamily="34" charset="-122"/>
+                <a:cs typeface="Segoe UI" pitchFamily="34" charset="-120"/>
+              </a:rPr>
+              <a:t>Focus</a:t>
+            </a:r>
+            <a:endParaRPr lang="en-US" sz="900" dirty="0"/>
+          </a:p>
+        </p:txBody>
+      </p:sp>
+      <p:sp>
+        <p:nvSpPr>
+          <p:cNvPr id="5" name="Shape 3"/>
+          <p:cNvSpPr/>
+          <p:nvPr/>
+        </p:nvSpPr>
+        <p:spPr>
+          <a:xfrm>
+            <a:off x="3479648" y="5130800"/>
+            <a:ext cx="5562600" cy="0"/>
+          </a:xfrm>
+          <a:prstGeom prst="line">
+            <a:avLst/>
+          </a:prstGeom>
+          <a:noFill/>
+          <a:ln w="9525">
+            <a:solidFill>
+              <a:srgbClr val="E1E0D9"/>
+            </a:solidFill>
+            <a:prstDash val="solid"/>
+          </a:ln>
+        </p:spPr>
+      </p:sp>
+      <p:sp>
+        <p:nvSpPr>
+          <p:cNvPr id="6" name="Text 4"/>
+          <p:cNvSpPr/>
+          <p:nvPr/>
+        </p:nvSpPr>
+        <p:spPr>
+          <a:xfrm>
+            <a:off x="3047848" y="5041900"/>
+            <a:ext cx="381000" cy="177800"/>
+          </a:xfrm>
+          <a:prstGeom prst="rect">
+            <a:avLst/>
+          </a:prstGeom>
+          <a:noFill/>
+          <a:ln/>
+        </p:spPr>
+        <p:txBody>
+          <a:bodyPr wrap="none" lIns="0" tIns="0" rIns="0" bIns="0" rtlCol="0" anchor="ctr"/>
+          <a:lstStyle/>
+          <a:p>
+            <a:pPr algn="r" indent="0" marL="0">
+              <a:buNone/>
+            </a:pPr>
+            <a:r>
+              <a:rPr lang="en-US" sz="900" dirty="0">
+                <a:solidFill>
+                  <a:srgbClr val="52514E"/>
+                </a:solidFill>
+                <a:latin typeface="Segoe UI" pitchFamily="34" charset="0"/>
+                <a:ea typeface="Segoe UI" pitchFamily="34" charset="-122"/>
+                <a:cs typeface="Segoe UI" pitchFamily="34" charset="-120"/>
+              </a:rPr>
+              <a:t>0</a:t>
+            </a:r>
+            <a:endParaRPr lang="en-US" sz="900" dirty="0"/>
+          </a:p>
+        </p:txBody>
+      </p:sp>
+      <p:sp>
+        <p:nvSpPr>
+          <p:cNvPr id="7" name="Shape 5"/>
+          <p:cNvSpPr/>
+          <p:nvPr/>
+        </p:nvSpPr>
+        <p:spPr>
+          <a:xfrm>
+            <a:off x="3479648" y="4318000"/>
+            <a:ext cx="5562600" cy="0"/>
+          </a:xfrm>
+          <a:prstGeom prst="line">
+            <a:avLst/>
+          </a:prstGeom>
+          <a:noFill/>
+          <a:ln w="9525">
+            <a:solidFill>
+              <a:srgbClr val="E1E0D9"/>
+            </a:solidFill>
+            <a:prstDash val="solid"/>
+          </a:ln>
+        </p:spPr>
+      </p:sp>
+      <p:sp>
+        <p:nvSpPr>
+          <p:cNvPr id="8" name="Text 6"/>
+          <p:cNvSpPr/>
+          <p:nvPr/>
+        </p:nvSpPr>
+        <p:spPr>
+          <a:xfrm>
+            <a:off x="3047848" y="4229100"/>
+            <a:ext cx="381000" cy="177800"/>
+          </a:xfrm>
+          <a:prstGeom prst="rect">
+            <a:avLst/>
+          </a:prstGeom>
+          <a:noFill/>
+          <a:ln/>
+        </p:spPr>
+        <p:txBody>
+          <a:bodyPr wrap="none" lIns="0" tIns="0" rIns="0" bIns="0" rtlCol="0" anchor="ctr"/>
+          <a:lstStyle/>
+          <a:p>
+            <a:pPr algn="r" indent="0" marL="0">
+              <a:buNone/>
+            </a:pPr>
+            <a:r>
+              <a:rPr lang="en-US" sz="900" dirty="0">
+                <a:solidFill>
+                  <a:srgbClr val="52514E"/>
+                </a:solidFill>
+                <a:latin typeface="Segoe UI" pitchFamily="34" charset="0"/>
+                <a:ea typeface="Segoe UI" pitchFamily="34" charset="-122"/>
+                <a:cs typeface="Segoe UI" pitchFamily="34" charset="-120"/>
+              </a:rPr>
+              <a:t>20</a:t>
+            </a:r>
+            <a:endParaRPr lang="en-US" sz="900" dirty="0"/>
+          </a:p>
+        </p:txBody>
+      </p:sp>
+      <p:sp>
+        <p:nvSpPr>
+          <p:cNvPr id="9" name="Shape 7"/>
+          <p:cNvSpPr/>
+          <p:nvPr/>
+        </p:nvSpPr>
+        <p:spPr>
+          <a:xfrm>
+            <a:off x="3479648" y="3505200"/>
+            <a:ext cx="5562600" cy="0"/>
+          </a:xfrm>
+          <a:prstGeom prst="line">
+            <a:avLst/>
+          </a:prstGeom>
+          <a:noFill/>
+          <a:ln w="9525">
+            <a:solidFill>
+              <a:srgbClr val="E1E0D9"/>
+            </a:solidFill>
+            <a:prstDash val="solid"/>
+          </a:ln>
+        </p:spPr>
+      </p:sp>
+      <p:sp>
+        <p:nvSpPr>
+          <p:cNvPr id="10" name="Text 8"/>
+          <p:cNvSpPr/>
+          <p:nvPr/>
+        </p:nvSpPr>
+        <p:spPr>
+          <a:xfrm>
+            <a:off x="3047848" y="3416300"/>
+            <a:ext cx="381000" cy="177800"/>
+          </a:xfrm>
+          <a:prstGeom prst="rect">
+            <a:avLst/>
+          </a:prstGeom>
+          <a:noFill/>
+          <a:ln/>
+        </p:spPr>
+        <p:txBody>
+          <a:bodyPr wrap="none" lIns="0" tIns="0" rIns="0" bIns="0" rtlCol="0" anchor="ctr"/>
+          <a:lstStyle/>
+          <a:p>
+            <a:pPr algn="r" indent="0" marL="0">
+              <a:buNone/>
+            </a:pPr>
+            <a:r>
+              <a:rPr lang="en-US" sz="900" dirty="0">
+                <a:solidFill>
+                  <a:srgbClr val="52514E"/>
+                </a:solidFill>
+                <a:latin typeface="Segoe UI" pitchFamily="34" charset="0"/>
+                <a:ea typeface="Segoe UI" pitchFamily="34" charset="-122"/>
+                <a:cs typeface="Segoe UI" pitchFamily="34" charset="-120"/>
+              </a:rPr>
+              <a:t>40</a:t>
+            </a:r>
+            <a:endParaRPr lang="en-US" sz="900" dirty="0"/>
+          </a:p>
+        </p:txBody>
+      </p:sp>
+      <p:sp>
+        <p:nvSpPr>
+          <p:cNvPr id="11" name="Shape 9"/>
+          <p:cNvSpPr/>
+          <p:nvPr/>
+        </p:nvSpPr>
+        <p:spPr>
+          <a:xfrm>
+            <a:off x="3479648" y="2692400"/>
+            <a:ext cx="5562600" cy="0"/>
+          </a:xfrm>
+          <a:prstGeom prst="line">
+            <a:avLst/>
+          </a:prstGeom>
+          <a:noFill/>
+          <a:ln w="9525">
+            <a:solidFill>
+              <a:srgbClr val="E1E0D9"/>
+            </a:solidFill>
+            <a:prstDash val="solid"/>
+          </a:ln>
+        </p:spPr>
+      </p:sp>
+      <p:sp>
+        <p:nvSpPr>
+          <p:cNvPr id="12" name="Text 10"/>
+          <p:cNvSpPr/>
+          <p:nvPr/>
+        </p:nvSpPr>
+        <p:spPr>
+          <a:xfrm>
+            <a:off x="3047848" y="2603500"/>
+            <a:ext cx="381000" cy="177800"/>
+          </a:xfrm>
+          <a:prstGeom prst="rect">
+            <a:avLst/>
+          </a:prstGeom>
+          <a:noFill/>
+          <a:ln/>
+        </p:spPr>
+        <p:txBody>
+          <a:bodyPr wrap="none" lIns="0" tIns="0" rIns="0" bIns="0" rtlCol="0" anchor="ctr"/>
+          <a:lstStyle/>
+          <a:p>
+            <a:pPr algn="r" indent="0" marL="0">
+              <a:buNone/>
+            </a:pPr>
+            <a:r>
+              <a:rPr lang="en-US" sz="900" dirty="0">
+                <a:solidFill>
+                  <a:srgbClr val="52514E"/>
+                </a:solidFill>
+                <a:latin typeface="Segoe UI" pitchFamily="34" charset="0"/>
+                <a:ea typeface="Segoe UI" pitchFamily="34" charset="-122"/>
+                <a:cs typeface="Segoe UI" pitchFamily="34" charset="-120"/>
+              </a:rPr>
+              <a:t>60</a:t>
+            </a:r>
+            <a:endParaRPr lang="en-US" sz="900" dirty="0"/>
+          </a:p>
+        </p:txBody>
+      </p:sp>
+      <p:sp>
+        <p:nvSpPr>
+          <p:cNvPr id="13" name="Shape 11"/>
+          <p:cNvSpPr/>
+          <p:nvPr/>
+        </p:nvSpPr>
+        <p:spPr>
+          <a:xfrm>
+            <a:off x="3479648" y="1879600"/>
+            <a:ext cx="5562600" cy="0"/>
+          </a:xfrm>
+          <a:prstGeom prst="line">
+            <a:avLst/>
+          </a:prstGeom>
+          <a:noFill/>
+          <a:ln w="9525">
+            <a:solidFill>
+              <a:srgbClr val="E1E0D9"/>
+            </a:solidFill>
+            <a:prstDash val="solid"/>
+          </a:ln>
+        </p:spPr>
+      </p:sp>
+      <p:sp>
+        <p:nvSpPr>
+          <p:cNvPr id="14" name="Text 12"/>
+          <p:cNvSpPr/>
+          <p:nvPr/>
+        </p:nvSpPr>
+        <p:spPr>
+          <a:xfrm>
+            <a:off x="3047848" y="1790700"/>
+            <a:ext cx="381000" cy="177800"/>
+          </a:xfrm>
+          <a:prstGeom prst="rect">
+            <a:avLst/>
+          </a:prstGeom>
+          <a:noFill/>
+          <a:ln/>
+        </p:spPr>
+        <p:txBody>
+          <a:bodyPr wrap="none" lIns="0" tIns="0" rIns="0" bIns="0" rtlCol="0" anchor="ctr"/>
+          <a:lstStyle/>
+          <a:p>
+            <a:pPr algn="r" indent="0" marL="0">
+              <a:buNone/>
+            </a:pPr>
+            <a:r>
+              <a:rPr lang="en-US" sz="900" dirty="0">
+                <a:solidFill>
+                  <a:srgbClr val="52514E"/>
+                </a:solidFill>
+                <a:latin typeface="Segoe UI" pitchFamily="34" charset="0"/>
+                <a:ea typeface="Segoe UI" pitchFamily="34" charset="-122"/>
+                <a:cs typeface="Segoe UI" pitchFamily="34" charset="-120"/>
+              </a:rPr>
+              <a:t>80</a:t>
+            </a:r>
+            <a:endParaRPr lang="en-US" sz="900" dirty="0"/>
+          </a:p>
+        </p:txBody>
+      </p:sp>
+      <p:sp>
+        <p:nvSpPr>
+          <p:cNvPr id="15" name="Text 13"/>
+          <p:cNvSpPr/>
+          <p:nvPr/>
+        </p:nvSpPr>
+        <p:spPr>
+          <a:xfrm>
+            <a:off x="3174848" y="5156200"/>
+            <a:ext cx="609600" cy="177800"/>
+          </a:xfrm>
+          <a:prstGeom prst="rect">
+            <a:avLst/>
+          </a:prstGeom>
+          <a:noFill/>
+          <a:ln/>
+        </p:spPr>
+        <p:txBody>
+          <a:bodyPr wrap="none" lIns="0" tIns="0" rIns="0" bIns="0" rtlCol="0" anchor="t"/>
+          <a:lstStyle/>
+          <a:p>
+            <a:pPr algn="ctr" indent="0" marL="0">
+              <a:buNone/>
+            </a:pPr>
+            <a:r>
+              <a:rPr lang="en-US" sz="900" dirty="0">
+                <a:solidFill>
+                  <a:srgbClr val="52514E"/>
+                </a:solidFill>
+                <a:latin typeface="Segoe UI" pitchFamily="34" charset="0"/>
+                <a:ea typeface="Segoe UI" pitchFamily="34" charset="-122"/>
+                <a:cs typeface="Segoe UI" pitchFamily="34" charset="-120"/>
+              </a:rPr>
+              <a:t>0</a:t>
+            </a:r>
+            <a:endParaRPr lang="en-US" sz="900" dirty="0"/>
+          </a:p>
+        </p:txBody>
+      </p:sp>
+      <p:sp>
+        <p:nvSpPr>
+          <p:cNvPr id="16" name="Text 14"/>
+          <p:cNvSpPr/>
+          <p:nvPr/>
+        </p:nvSpPr>
+        <p:spPr>
+          <a:xfrm>
+            <a:off x="4565498" y="5156200"/>
+            <a:ext cx="609600" cy="177800"/>
+          </a:xfrm>
+          <a:prstGeom prst="rect">
+            <a:avLst/>
+          </a:prstGeom>
+          <a:noFill/>
+          <a:ln/>
+        </p:spPr>
+        <p:txBody>
+          <a:bodyPr wrap="none" lIns="0" tIns="0" rIns="0" bIns="0" rtlCol="0" anchor="t"/>
+          <a:lstStyle/>
+          <a:p>
+            <a:pPr algn="ctr" indent="0" marL="0">
+              <a:buNone/>
+            </a:pPr>
+            <a:r>
+              <a:rPr lang="en-US" sz="900" dirty="0">
+                <a:solidFill>
+                  <a:srgbClr val="52514E"/>
+                </a:solidFill>
+                <a:latin typeface="Segoe UI" pitchFamily="34" charset="0"/>
+                <a:ea typeface="Segoe UI" pitchFamily="34" charset="-122"/>
+                <a:cs typeface="Segoe UI" pitchFamily="34" charset="-120"/>
+              </a:rPr>
+              <a:t>20</a:t>
+            </a:r>
+            <a:endParaRPr lang="en-US" sz="900" dirty="0"/>
+          </a:p>
+        </p:txBody>
+      </p:sp>
+      <p:sp>
+        <p:nvSpPr>
+          <p:cNvPr id="17" name="Text 15"/>
+          <p:cNvSpPr/>
+          <p:nvPr/>
+        </p:nvSpPr>
+        <p:spPr>
+          <a:xfrm>
+            <a:off x="5956148" y="5156200"/>
+            <a:ext cx="609600" cy="177800"/>
+          </a:xfrm>
+          <a:prstGeom prst="rect">
+            <a:avLst/>
+          </a:prstGeom>
+          <a:noFill/>
+          <a:ln/>
+        </p:spPr>
+        <p:txBody>
+          <a:bodyPr wrap="none" lIns="0" tIns="0" rIns="0" bIns="0" rtlCol="0" anchor="t"/>
+          <a:lstStyle/>
+          <a:p>
+            <a:pPr algn="ctr" indent="0" marL="0">
+              <a:buNone/>
+            </a:pPr>
+            <a:r>
+              <a:rPr lang="en-US" sz="900" dirty="0">
+                <a:solidFill>
+                  <a:srgbClr val="52514E"/>
+                </a:solidFill>
+                <a:latin typeface="Segoe UI" pitchFamily="34" charset="0"/>
+                <a:ea typeface="Segoe UI" pitchFamily="34" charset="-122"/>
+                <a:cs typeface="Segoe UI" pitchFamily="34" charset="-120"/>
+              </a:rPr>
+              <a:t>40</a:t>
+            </a:r>
+            <a:endParaRPr lang="en-US" sz="900" dirty="0"/>
+          </a:p>
+        </p:txBody>
+      </p:sp>
+      <p:sp>
+        <p:nvSpPr>
+          <p:cNvPr id="18" name="Text 16"/>
+          <p:cNvSpPr/>
+          <p:nvPr/>
+        </p:nvSpPr>
+        <p:spPr>
+          <a:xfrm>
+            <a:off x="7346798" y="5156200"/>
+            <a:ext cx="609600" cy="177800"/>
+          </a:xfrm>
+          <a:prstGeom prst="rect">
+            <a:avLst/>
+          </a:prstGeom>
+          <a:noFill/>
+          <a:ln/>
+        </p:spPr>
+        <p:txBody>
+          <a:bodyPr wrap="none" lIns="0" tIns="0" rIns="0" bIns="0" rtlCol="0" anchor="t"/>
+          <a:lstStyle/>
+          <a:p>
+            <a:pPr algn="ctr" indent="0" marL="0">
+              <a:buNone/>
+            </a:pPr>
+            <a:r>
+              <a:rPr lang="en-US" sz="900" dirty="0">
+                <a:solidFill>
+                  <a:srgbClr val="52514E"/>
+                </a:solidFill>
+                <a:latin typeface="Segoe UI" pitchFamily="34" charset="0"/>
+                <a:ea typeface="Segoe UI" pitchFamily="34" charset="-122"/>
+                <a:cs typeface="Segoe UI" pitchFamily="34" charset="-120"/>
+              </a:rPr>
+              <a:t>60</a:t>
+            </a:r>
+            <a:endParaRPr lang="en-US" sz="900" dirty="0"/>
+          </a:p>
+        </p:txBody>
+      </p:sp>
+      <p:sp>
+        <p:nvSpPr>
+          <p:cNvPr id="19" name="Text 17"/>
+          <p:cNvSpPr/>
+          <p:nvPr/>
+        </p:nvSpPr>
+        <p:spPr>
+          <a:xfrm>
+            <a:off x="8737448" y="5156200"/>
+            <a:ext cx="609600" cy="177800"/>
+          </a:xfrm>
+          <a:prstGeom prst="rect">
+            <a:avLst/>
+          </a:prstGeom>
+          <a:noFill/>
+          <a:ln/>
+        </p:spPr>
+        <p:txBody>
+          <a:bodyPr wrap="none" lIns="0" tIns="0" rIns="0" bIns="0" rtlCol="0" anchor="t"/>
+          <a:lstStyle/>
+          <a:p>
+            <a:pPr algn="ctr" indent="0" marL="0">
+              <a:buNone/>
+            </a:pPr>
+            <a:r>
+              <a:rPr lang="en-US" sz="900" dirty="0">
+                <a:solidFill>
+                  <a:srgbClr val="52514E"/>
+                </a:solidFill>
+                <a:latin typeface="Segoe UI" pitchFamily="34" charset="0"/>
+                <a:ea typeface="Segoe UI" pitchFamily="34" charset="-122"/>
+                <a:cs typeface="Segoe UI" pitchFamily="34" charset="-120"/>
+              </a:rPr>
+              <a:t>80</a:t>
+            </a:r>
+            <a:endParaRPr lang="en-US" sz="900" dirty="0"/>
+          </a:p>
+        </p:txBody>
+      </p:sp>
+      <p:sp>
+        <p:nvSpPr>
+          <p:cNvPr id="20" name="Shape 18"/>
+          <p:cNvSpPr/>
+          <p:nvPr/>
+        </p:nvSpPr>
+        <p:spPr>
+          <a:xfrm>
+            <a:off x="3479648" y="5130800"/>
+            <a:ext cx="5562600" cy="0"/>
+          </a:xfrm>
+          <a:prstGeom prst="line">
+            <a:avLst/>
+          </a:prstGeom>
+          <a:noFill/>
+          <a:ln w="12700">
+            <a:solidFill>
+              <a:srgbClr val="A5A49E"/>
+            </a:solidFill>
+            <a:prstDash val="solid"/>
+          </a:ln>
+        </p:spPr>
+      </p:sp>
+      <p:sp>
+        <p:nvSpPr>
+          <p:cNvPr id="21" name="Shape 19"/>
+          <p:cNvSpPr/>
+          <p:nvPr/>
+        </p:nvSpPr>
+        <p:spPr>
+          <a:xfrm>
+            <a:off x="3479648" y="1879600"/>
+            <a:ext cx="0" cy="3251200"/>
+          </a:xfrm>
+          <a:prstGeom prst="line">
+            <a:avLst/>
+          </a:prstGeom>
+          <a:noFill/>
+          <a:ln w="12700">
+            <a:solidFill>
+              <a:srgbClr val="A5A49E"/>
+            </a:solidFill>
+            <a:prstDash val="solid"/>
+          </a:ln>
+        </p:spPr>
+      </p:sp>
+      <p:sp>
+        <p:nvSpPr>
+          <p:cNvPr id="22" name="Shape 20"/>
+          <p:cNvSpPr/>
+          <p:nvPr/>
+        </p:nvSpPr>
+        <p:spPr>
+          <a:xfrm>
+            <a:off x="4484535" y="4279900"/>
+            <a:ext cx="76200" cy="76200"/>
+          </a:xfrm>
+          <a:prstGeom prst="ellipse">
+            <a:avLst/>
+          </a:prstGeom>
+          <a:solidFill>
+            <a:srgbClr val="2A78D6"/>
+          </a:solidFill>
+          <a:ln w="12700">
+            <a:solidFill>
+              <a:srgbClr val="FFFFFF"/>
+            </a:solidFill>
+            <a:prstDash val="solid"/>
+          </a:ln>
+        </p:spPr>
+      </p:sp>
+      <p:sp>
+        <p:nvSpPr>
+          <p:cNvPr id="23" name="Shape 21"/>
+          <p:cNvSpPr/>
+          <p:nvPr/>
+        </p:nvSpPr>
+        <p:spPr>
+          <a:xfrm>
+            <a:off x="5527523" y="3263900"/>
+            <a:ext cx="76200" cy="76200"/>
+          </a:xfrm>
+          <a:prstGeom prst="ellipse">
+            <a:avLst/>
+          </a:prstGeom>
+          <a:solidFill>
+            <a:srgbClr val="2A78D6"/>
+          </a:solidFill>
+          <a:ln w="12700">
+            <a:solidFill>
+              <a:srgbClr val="FFFFFF"/>
+            </a:solidFill>
+            <a:prstDash val="solid"/>
+          </a:ln>
+        </p:spPr>
+      </p:sp>
+      <p:sp>
+        <p:nvSpPr>
+          <p:cNvPr id="24" name="Shape 22"/>
+          <p:cNvSpPr/>
+          <p:nvPr/>
+        </p:nvSpPr>
+        <p:spPr>
+          <a:xfrm>
+            <a:off x="6570510" y="3670300"/>
+            <a:ext cx="76200" cy="76200"/>
+          </a:xfrm>
+          <a:prstGeom prst="ellipse">
+            <a:avLst/>
+          </a:prstGeom>
+          <a:solidFill>
+            <a:srgbClr val="2A78D6"/>
+          </a:solidFill>
+          <a:ln w="12700">
+            <a:solidFill>
+              <a:srgbClr val="FFFFFF"/>
+            </a:solidFill>
+            <a:prstDash val="solid"/>
+          </a:ln>
+        </p:spPr>
+      </p:sp>
+      <p:sp>
+        <p:nvSpPr>
+          <p:cNvPr id="25" name="Shape 23"/>
+          <p:cNvSpPr/>
+          <p:nvPr/>
+        </p:nvSpPr>
+        <p:spPr>
+          <a:xfrm>
+            <a:off x="7613498" y="2654300"/>
+            <a:ext cx="76200" cy="76200"/>
+          </a:xfrm>
+          <a:prstGeom prst="ellipse">
+            <a:avLst/>
+          </a:prstGeom>
+          <a:solidFill>
+            <a:srgbClr val="2A78D6"/>
+          </a:solidFill>
+          <a:ln w="12700">
+            <a:solidFill>
+              <a:srgbClr val="FFFFFF"/>
+            </a:solidFill>
+            <a:prstDash val="solid"/>
+          </a:ln>
+        </p:spPr>
+      </p:sp>
+      <p:sp>
+        <p:nvSpPr>
+          <p:cNvPr id="26" name="Shape 24"/>
+          <p:cNvSpPr/>
+          <p:nvPr/>
+        </p:nvSpPr>
+        <p:spPr>
+          <a:xfrm>
+            <a:off x="8656485" y="2247900"/>
+            <a:ext cx="76200" cy="76200"/>
+          </a:xfrm>
+          <a:prstGeom prst="ellipse">
+            <a:avLst/>
+          </a:prstGeom>
+          <a:solidFill>
+            <a:srgbClr val="2A78D6"/>
+          </a:solidFill>
+          <a:ln w="12700">
+            <a:solidFill>
+              <a:srgbClr val="FFFFFF"/>
+            </a:solidFill>
+            <a:prstDash val="solid"/>
+          </a:ln>
+        </p:spPr>
+      </p:sp>
+      <p:sp>
+        <p:nvSpPr>
+          <p:cNvPr id="27" name="Text 25"/>
+          <p:cNvSpPr/>
+          <p:nvPr/>
+        </p:nvSpPr>
+        <p:spPr>
+          <a:xfrm>
+            <a:off x="4586135" y="4235450"/>
+            <a:ext cx="93980" cy="165100"/>
+          </a:xfrm>
+          <a:prstGeom prst="rect">
+            <a:avLst/>
+          </a:prstGeom>
+          <a:noFill/>
+          <a:ln/>
+        </p:spPr>
+        <p:txBody>
+          <a:bodyPr wrap="none" lIns="0" tIns="0" rIns="0" bIns="0" rtlCol="0" anchor="ctr"/>
+          <a:lstStyle/>
+          <a:p>
+            <a:pPr algn="l" indent="0" marL="0">
+              <a:buNone/>
+            </a:pPr>
+            <a:r>
+              <a:rPr lang="en-US" sz="1000" dirty="0">
+                <a:solidFill>
+                  <a:srgbClr val="0B0B0B"/>
+                </a:solidFill>
+                <a:latin typeface="Segoe UI" pitchFamily="34" charset="0"/>
+                <a:ea typeface="Segoe UI" pitchFamily="34" charset="-122"/>
+                <a:cs typeface="Segoe UI" pitchFamily="34" charset="-120"/>
+              </a:rPr>
+              <a:t>A</a:t>
+            </a:r>
+            <a:endParaRPr lang="en-US" sz="1000" dirty="0"/>
+          </a:p>
+        </p:txBody>
+      </p:sp>
+      <p:sp>
+        <p:nvSpPr>
+          <p:cNvPr id="28" name="Text 26"/>
+          <p:cNvSpPr/>
+          <p:nvPr/>
+        </p:nvSpPr>
+        <p:spPr>
+          <a:xfrm>
+            <a:off x="5629123" y="3219450"/>
+            <a:ext cx="93980" cy="165100"/>
+          </a:xfrm>
+          <a:prstGeom prst="rect">
+            <a:avLst/>
+          </a:prstGeom>
+          <a:noFill/>
+          <a:ln/>
+        </p:spPr>
+        <p:txBody>
+          <a:bodyPr wrap="none" lIns="0" tIns="0" rIns="0" bIns="0" rtlCol="0" anchor="ctr"/>
+          <a:lstStyle/>
+          <a:p>
+            <a:pPr algn="l" indent="0" marL="0">
+              <a:buNone/>
+            </a:pPr>
+            <a:r>
+              <a:rPr lang="en-US" sz="1000" dirty="0">
+                <a:solidFill>
+                  <a:srgbClr val="0B0B0B"/>
+                </a:solidFill>
+                <a:latin typeface="Segoe UI" pitchFamily="34" charset="0"/>
+                <a:ea typeface="Segoe UI" pitchFamily="34" charset="-122"/>
+                <a:cs typeface="Segoe UI" pitchFamily="34" charset="-120"/>
+              </a:rPr>
+              <a:t>B</a:t>
+            </a:r>
+            <a:endParaRPr lang="en-US" sz="1000" dirty="0"/>
+          </a:p>
+        </p:txBody>
+      </p:sp>
+      <p:sp>
+        <p:nvSpPr>
+          <p:cNvPr id="29" name="Text 27"/>
+          <p:cNvSpPr/>
+          <p:nvPr/>
+        </p:nvSpPr>
+        <p:spPr>
+          <a:xfrm>
+            <a:off x="6672110" y="3625850"/>
+            <a:ext cx="93980" cy="165100"/>
+          </a:xfrm>
+          <a:prstGeom prst="rect">
+            <a:avLst/>
+          </a:prstGeom>
+          <a:noFill/>
+          <a:ln/>
+        </p:spPr>
+        <p:txBody>
+          <a:bodyPr wrap="none" lIns="0" tIns="0" rIns="0" bIns="0" rtlCol="0" anchor="ctr"/>
+          <a:lstStyle/>
+          <a:p>
+            <a:pPr algn="l" indent="0" marL="0">
+              <a:buNone/>
+            </a:pPr>
+            <a:r>
+              <a:rPr lang="en-US" sz="1000" dirty="0">
+                <a:solidFill>
+                  <a:srgbClr val="0B0B0B"/>
+                </a:solidFill>
+                <a:latin typeface="Segoe UI" pitchFamily="34" charset="0"/>
+                <a:ea typeface="Segoe UI" pitchFamily="34" charset="-122"/>
+                <a:cs typeface="Segoe UI" pitchFamily="34" charset="-120"/>
+              </a:rPr>
+              <a:t>C</a:t>
+            </a:r>
+            <a:endParaRPr lang="en-US" sz="1000" dirty="0"/>
+          </a:p>
+        </p:txBody>
+      </p:sp>
+      <p:sp>
+        <p:nvSpPr>
+          <p:cNvPr id="30" name="Text 28"/>
+          <p:cNvSpPr/>
+          <p:nvPr/>
+        </p:nvSpPr>
+        <p:spPr>
+          <a:xfrm>
+            <a:off x="7715098" y="2609850"/>
+            <a:ext cx="93980" cy="165100"/>
+          </a:xfrm>
+          <a:prstGeom prst="rect">
+            <a:avLst/>
+          </a:prstGeom>
+          <a:noFill/>
+          <a:ln/>
+        </p:spPr>
+        <p:txBody>
+          <a:bodyPr wrap="none" lIns="0" tIns="0" rIns="0" bIns="0" rtlCol="0" anchor="ctr"/>
+          <a:lstStyle/>
+          <a:p>
+            <a:pPr algn="l" indent="0" marL="0">
+              <a:buNone/>
+            </a:pPr>
+            <a:r>
+              <a:rPr lang="en-US" sz="1000" dirty="0">
+                <a:solidFill>
+                  <a:srgbClr val="0B0B0B"/>
+                </a:solidFill>
+                <a:latin typeface="Segoe UI" pitchFamily="34" charset="0"/>
+                <a:ea typeface="Segoe UI" pitchFamily="34" charset="-122"/>
+                <a:cs typeface="Segoe UI" pitchFamily="34" charset="-120"/>
+              </a:rPr>
+              <a:t>D</a:t>
+            </a:r>
+            <a:endParaRPr lang="en-US" sz="1000" dirty="0"/>
+          </a:p>
+        </p:txBody>
+      </p:sp>
+      <p:sp>
+        <p:nvSpPr>
+          <p:cNvPr id="31" name="Text 29"/>
+          <p:cNvSpPr/>
+          <p:nvPr/>
+        </p:nvSpPr>
+        <p:spPr>
+          <a:xfrm>
+            <a:off x="8758085" y="2203450"/>
+            <a:ext cx="93980" cy="165100"/>
+          </a:xfrm>
+          <a:prstGeom prst="rect">
+            <a:avLst/>
+          </a:prstGeom>
+          <a:noFill/>
+          <a:ln/>
+        </p:spPr>
+        <p:txBody>
+          <a:bodyPr wrap="none" lIns="0" tIns="0" rIns="0" bIns="0" rtlCol="0" anchor="ctr"/>
+          <a:lstStyle/>
+          <a:p>
+            <a:pPr algn="l" indent="0" marL="0">
+              <a:buNone/>
+            </a:pPr>
+            <a:r>
+              <a:rPr lang="en-US" sz="1000" dirty="0">
+                <a:solidFill>
+                  <a:srgbClr val="0B0B0B"/>
+                </a:solidFill>
+                <a:latin typeface="Segoe UI" pitchFamily="34" charset="0"/>
+                <a:ea typeface="Segoe UI" pitchFamily="34" charset="-122"/>
+                <a:cs typeface="Segoe UI" pitchFamily="34" charset="-120"/>
+              </a:rPr>
+              <a:t>E</a:t>
+            </a:r>
+            <a:endParaRPr lang="en-US" sz="1000" dirty="0"/>
+          </a:p>
+        </p:txBody>
+      </p:sp>
+    </p:spTree>
+  </p:cSld>
+  <p:clrMapOvr>
+    <a:masterClrMapping/>
+  </p:clrMapOvr>
+</p:sld>
+</file>
+
+<file path=ppt/slides/slide34.xml><?xml version="1.0" encoding="utf-8"?>
+<p:sld xmlns:a="http://schemas.openxmlformats.org/drawingml/2006/main" xmlns:r="http://schemas.openxmlformats.org/officeDocument/2006/relationships" xmlns:p="http://schemas.openxmlformats.org/presentationml/2006/main">
+  <p:cSld name="Slide 34">
+    <p:bg>
+      <p:bgPr>
+        <a:solidFill>
+          <a:srgbClr val="FFFFFF"/>
+        </a:solidFill>
+      </p:bgPr>
+    </p:bg>
+    <p:spTree>
+      <p:nvGrpSpPr>
+        <p:cNvPr id="1" name=""/>
+        <p:cNvGrpSpPr/>
+        <p:nvPr/>
+      </p:nvGrpSpPr>
+      <p:grpSpPr>
+        <a:xfrm>
+          <a:off x="0" y="0"/>
+          <a:ext cx="0" cy="0"/>
+          <a:chOff x="0" y="0"/>
+          <a:chExt cx="0" cy="0"/>
+        </a:xfrm>
+      </p:grpSpPr>
+      <p:sp>
+        <p:nvSpPr>
+          <p:cNvPr id="2" name="Text 0"/>
+          <p:cNvSpPr/>
+          <p:nvPr/>
+        </p:nvSpPr>
+        <p:spPr>
+          <a:xfrm>
+            <a:off x="3047848" y="1524000"/>
+            <a:ext cx="6096000" cy="203200"/>
+          </a:xfrm>
+          <a:prstGeom prst="rect">
+            <a:avLst/>
+          </a:prstGeom>
+          <a:noFill/>
+          <a:ln/>
+        </p:spPr>
+        <p:txBody>
+          <a:bodyPr wrap="none" lIns="0" tIns="0" rIns="0" bIns="0" rtlCol="0" anchor="t"/>
+          <a:lstStyle/>
+          <a:p>
+            <a:pPr algn="l" indent="0" marL="0">
+              <a:buNone/>
+            </a:pPr>
+            <a:r>
+              <a:rPr lang="en-US" sz="1200" b="1" dirty="0">
+                <a:solidFill>
+                  <a:srgbClr val="0B0B0B"/>
+                </a:solidFill>
+                <a:latin typeface="Segoe UI" pitchFamily="34" charset="0"/>
+                <a:ea typeface="Segoe UI" pitchFamily="34" charset="-122"/>
+                <a:cs typeface="Segoe UI" pitchFamily="34" charset="-120"/>
+              </a:rPr>
+              <a:t>Exploding slice + slice color + 100% = note</a:t>
+            </a:r>
+            <a:endParaRPr lang="en-US" sz="1200" dirty="0"/>
+          </a:p>
+        </p:txBody>
+      </p:sp>
+      <p:sp>
+        <p:nvSpPr>
+          <p:cNvPr id="3" name="Shape 1"/>
+          <p:cNvSpPr/>
+          <p:nvPr/>
+        </p:nvSpPr>
+        <p:spPr>
+          <a:xfrm>
+            <a:off x="4692498" y="2082800"/>
+            <a:ext cx="2806700" cy="2806700"/>
+          </a:xfrm>
+          <a:prstGeom prst="pie">
+            <a:avLst>
+              <a:gd name="adj1" fmla="val 16200000"/>
+              <a:gd name="adj2" fmla="val 4536000"/>
+            </a:avLst>
+          </a:prstGeom>
+          <a:solidFill>
+            <a:srgbClr val="2A78D6"/>
+          </a:solidFill>
+          <a:ln w="12700">
+            <a:solidFill>
+              <a:srgbClr val="FFFFFF"/>
+            </a:solidFill>
+            <a:prstDash val="solid"/>
+          </a:ln>
+        </p:spPr>
+      </p:sp>
+      <p:sp>
+        <p:nvSpPr>
+          <p:cNvPr id="4" name="Text 2"/>
+          <p:cNvSpPr/>
+          <p:nvPr/>
+        </p:nvSpPr>
+        <p:spPr>
+          <a:xfrm>
+            <a:off x="6590764" y="3281850"/>
+            <a:ext cx="736600" cy="190500"/>
+          </a:xfrm>
+          <a:prstGeom prst="rect">
+            <a:avLst/>
+          </a:prstGeom>
+          <a:noFill/>
+          <a:ln/>
+        </p:spPr>
+        <p:txBody>
+          <a:bodyPr wrap="none" lIns="0" tIns="0" rIns="0" bIns="0" rtlCol="0" anchor="ctr"/>
+          <a:lstStyle/>
+          <a:p>
+            <a:pPr algn="ctr" indent="0" marL="0">
+              <a:buNone/>
+            </a:pPr>
+            <a:r>
+              <a:rPr lang="en-US" sz="1000" dirty="0">
+                <a:solidFill>
+                  <a:srgbClr val="FFFFFF"/>
+                </a:solidFill>
+                <a:latin typeface="Segoe UI" pitchFamily="34" charset="0"/>
+                <a:ea typeface="Segoe UI" pitchFamily="34" charset="-122"/>
+                <a:cs typeface="Segoe UI" pitchFamily="34" charset="-120"/>
+              </a:rPr>
+              <a:t>Retail 46%</a:t>
+            </a:r>
+            <a:endParaRPr lang="en-US" sz="1000" dirty="0"/>
+          </a:p>
+        </p:txBody>
+      </p:sp>
+      <p:sp>
+        <p:nvSpPr>
+          <p:cNvPr id="5" name="Shape 3"/>
+          <p:cNvSpPr/>
+          <p:nvPr/>
+        </p:nvSpPr>
+        <p:spPr>
+          <a:xfrm>
+            <a:off x="4626508" y="2173627"/>
+            <a:ext cx="2806700" cy="2806700"/>
+          </a:xfrm>
+          <a:prstGeom prst="pie">
+            <a:avLst>
+              <a:gd name="adj1" fmla="val 4536000"/>
+              <a:gd name="adj2" fmla="val 10584000"/>
+            </a:avLst>
+          </a:prstGeom>
+          <a:solidFill>
+            <a:srgbClr val="E34948"/>
+          </a:solidFill>
+          <a:ln w="12700">
+            <a:solidFill>
+              <a:srgbClr val="FFFFFF"/>
+            </a:solidFill>
+            <a:prstDash val="solid"/>
+          </a:ln>
+        </p:spPr>
+      </p:sp>
+      <p:sp>
+        <p:nvSpPr>
+          <p:cNvPr id="6" name="Text 4"/>
+          <p:cNvSpPr/>
+          <p:nvPr/>
+        </p:nvSpPr>
+        <p:spPr>
+          <a:xfrm>
+            <a:off x="5150140" y="4185634"/>
+            <a:ext cx="736600" cy="190500"/>
+          </a:xfrm>
+          <a:prstGeom prst="rect">
+            <a:avLst/>
+          </a:prstGeom>
+          <a:noFill/>
+          <a:ln/>
+        </p:spPr>
+        <p:txBody>
+          <a:bodyPr wrap="none" lIns="0" tIns="0" rIns="0" bIns="0" rtlCol="0" anchor="ctr"/>
+          <a:lstStyle/>
+          <a:p>
+            <a:pPr algn="ctr" indent="0" marL="0">
+              <a:buNone/>
+            </a:pPr>
+            <a:r>
+              <a:rPr lang="en-US" sz="1000" dirty="0">
+                <a:solidFill>
+                  <a:srgbClr val="FFFFFF"/>
+                </a:solidFill>
+                <a:latin typeface="Segoe UI" pitchFamily="34" charset="0"/>
+                <a:ea typeface="Segoe UI" pitchFamily="34" charset="-122"/>
+                <a:cs typeface="Segoe UI" pitchFamily="34" charset="-120"/>
+              </a:rPr>
+              <a:t>Online 28%</a:t>
+            </a:r>
+            <a:endParaRPr lang="en-US" sz="1000" dirty="0"/>
+          </a:p>
+        </p:txBody>
+      </p:sp>
+      <p:sp>
+        <p:nvSpPr>
+          <p:cNvPr id="7" name="Shape 5"/>
+          <p:cNvSpPr/>
+          <p:nvPr/>
+        </p:nvSpPr>
+        <p:spPr>
+          <a:xfrm>
+            <a:off x="4692498" y="2082800"/>
+            <a:ext cx="2806700" cy="2806700"/>
+          </a:xfrm>
+          <a:prstGeom prst="pie">
+            <a:avLst>
+              <a:gd name="adj1" fmla="val 10584000"/>
+              <a:gd name="adj2" fmla="val 14472000"/>
+            </a:avLst>
+          </a:prstGeom>
+          <a:solidFill>
+            <a:srgbClr val="EDA100"/>
+          </a:solidFill>
+          <a:ln w="12700">
+            <a:solidFill>
+              <a:srgbClr val="FFFFFF"/>
+            </a:solidFill>
+            <a:prstDash val="solid"/>
+          </a:ln>
+        </p:spPr>
+      </p:sp>
+      <p:sp>
+        <p:nvSpPr>
+          <p:cNvPr id="8" name="Text 6"/>
+          <p:cNvSpPr/>
+          <p:nvPr/>
+        </p:nvSpPr>
+        <p:spPr>
+          <a:xfrm>
+            <a:off x="4862223" y="2971737"/>
+            <a:ext cx="942340" cy="190500"/>
+          </a:xfrm>
+          <a:prstGeom prst="rect">
+            <a:avLst/>
+          </a:prstGeom>
+          <a:noFill/>
+          <a:ln/>
+        </p:spPr>
+        <p:txBody>
+          <a:bodyPr wrap="none" lIns="0" tIns="0" rIns="0" bIns="0" rtlCol="0" anchor="ctr"/>
+          <a:lstStyle/>
+          <a:p>
+            <a:pPr algn="ctr" indent="0" marL="0">
+              <a:buNone/>
+            </a:pPr>
+            <a:r>
+              <a:rPr lang="en-US" sz="1000" dirty="0">
+                <a:solidFill>
+                  <a:srgbClr val="FFFFFF"/>
+                </a:solidFill>
+                <a:latin typeface="Segoe UI" pitchFamily="34" charset="0"/>
+                <a:ea typeface="Segoe UI" pitchFamily="34" charset="-122"/>
+                <a:cs typeface="Segoe UI" pitchFamily="34" charset="-120"/>
+              </a:rPr>
+              <a:t>Wholesale 18%</a:t>
+            </a:r>
+            <a:endParaRPr lang="en-US" sz="1000" dirty="0"/>
+          </a:p>
+        </p:txBody>
+      </p:sp>
+      <p:sp>
+        <p:nvSpPr>
+          <p:cNvPr id="9" name="Shape 7"/>
+          <p:cNvSpPr/>
+          <p:nvPr/>
+        </p:nvSpPr>
+        <p:spPr>
+          <a:xfrm>
+            <a:off x="4692498" y="2082800"/>
+            <a:ext cx="2806700" cy="2806700"/>
+          </a:xfrm>
+          <a:prstGeom prst="pie">
+            <a:avLst>
+              <a:gd name="adj1" fmla="val 14472000"/>
+              <a:gd name="adj2" fmla="val 16200000"/>
+            </a:avLst>
+          </a:prstGeom>
+          <a:solidFill>
+            <a:srgbClr val="008300"/>
+          </a:solidFill>
+          <a:ln w="12700">
+            <a:solidFill>
+              <a:srgbClr val="FFFFFF"/>
+            </a:solidFill>
+            <a:prstDash val="solid"/>
+          </a:ln>
+        </p:spPr>
+      </p:sp>
+      <p:sp>
+        <p:nvSpPr>
+          <p:cNvPr id="10" name="Shape 8"/>
+          <p:cNvSpPr/>
+          <p:nvPr/>
+        </p:nvSpPr>
+        <p:spPr>
+          <a:xfrm>
+            <a:off x="5726319" y="2046932"/>
+            <a:ext cx="17371" cy="67656"/>
+          </a:xfrm>
+          <a:prstGeom prst="line">
+            <a:avLst/>
+          </a:prstGeom>
+          <a:noFill/>
+          <a:ln w="9525">
+            <a:solidFill>
+              <a:srgbClr val="52514E"/>
+            </a:solidFill>
+            <a:prstDash val="solid"/>
+          </a:ln>
+        </p:spPr>
+      </p:sp>
+      <p:sp>
+        <p:nvSpPr>
+          <p:cNvPr id="11" name="Text 9"/>
+          <p:cNvSpPr/>
+          <p:nvPr/>
+        </p:nvSpPr>
+        <p:spPr>
+          <a:xfrm>
+            <a:off x="5122142" y="1933231"/>
+            <a:ext cx="599440" cy="190500"/>
+          </a:xfrm>
+          <a:prstGeom prst="rect">
+            <a:avLst/>
+          </a:prstGeom>
+          <a:noFill/>
+          <a:ln/>
+        </p:spPr>
+        <p:txBody>
+          <a:bodyPr wrap="none" lIns="0" tIns="0" rIns="0" bIns="0" rtlCol="0" anchor="ctr"/>
+          <a:lstStyle/>
+          <a:p>
+            <a:pPr algn="r" indent="0" marL="0">
+              <a:buNone/>
+            </a:pPr>
+            <a:r>
+              <a:rPr lang="en-US" sz="1000" dirty="0">
+                <a:solidFill>
+                  <a:srgbClr val="0B0B0B"/>
+                </a:solidFill>
+                <a:latin typeface="Segoe UI" pitchFamily="34" charset="0"/>
+                <a:ea typeface="Segoe UI" pitchFamily="34" charset="-122"/>
+                <a:cs typeface="Segoe UI" pitchFamily="34" charset="-120"/>
+              </a:rPr>
+              <a:t>Other 8%</a:t>
+            </a:r>
+            <a:endParaRPr lang="en-US" sz="1000" dirty="0"/>
+          </a:p>
+        </p:txBody>
+      </p:sp>
+      <p:sp>
+        <p:nvSpPr>
+          <p:cNvPr id="12" name="Text 10"/>
+          <p:cNvSpPr/>
+          <p:nvPr/>
+        </p:nvSpPr>
+        <p:spPr>
+          <a:xfrm>
+            <a:off x="3073248" y="5187950"/>
+            <a:ext cx="6045200" cy="139700"/>
+          </a:xfrm>
+          <a:prstGeom prst="rect">
+            <a:avLst/>
+          </a:prstGeom>
+          <a:noFill/>
+          <a:ln/>
+        </p:spPr>
+        <p:txBody>
+          <a:bodyPr wrap="none" lIns="0" tIns="0" rIns="0" bIns="0" rtlCol="0" anchor="b"/>
+          <a:lstStyle/>
+          <a:p>
+            <a:pPr algn="l" indent="0" marL="0">
+              <a:buNone/>
+            </a:pPr>
+            <a:r>
+              <a:rPr lang="en-US" sz="850" dirty="0">
+                <a:solidFill>
+                  <a:srgbClr val="52514E"/>
+                </a:solidFill>
+                <a:latin typeface="Segoe UI" pitchFamily="34" charset="0"/>
+                <a:ea typeface="Segoe UI" pitchFamily="34" charset="-122"/>
+                <a:cs typeface="Segoe UI" pitchFamily="34" charset="-120"/>
+              </a:rPr>
+              <a:t>100% = 100   ·   Source: annual report FY24</a:t>
+            </a:r>
+            <a:endParaRPr lang="en-US" sz="850" dirty="0"/>
+          </a:p>
+        </p:txBody>
+      </p:sp>
+    </p:spTree>
+  </p:cSld>
+  <p:clrMapOvr>
+    <a:masterClrMapping/>
+  </p:clrMapOvr>
+</p:sld>
+</file>
+
+<file path=ppt/slides/slide35.xml><?xml version="1.0" encoding="utf-8"?>
+<p:sld xmlns:a="http://schemas.openxmlformats.org/drawingml/2006/main" xmlns:r="http://schemas.openxmlformats.org/officeDocument/2006/relationships" xmlns:p="http://schemas.openxmlformats.org/presentationml/2006/main">
+  <p:cSld name="Slide 35">
+    <p:bg>
+      <p:bgPr>
+        <a:solidFill>
+          <a:srgbClr val="FFFFFF"/>
+        </a:solidFill>
+      </p:bgPr>
+    </p:bg>
+    <p:spTree>
+      <p:nvGrpSpPr>
+        <p:cNvPr id="1" name=""/>
+        <p:cNvGrpSpPr/>
+        <p:nvPr/>
+      </p:nvGrpSpPr>
+      <p:grpSpPr>
+        <a:xfrm>
+          <a:off x="0" y="0"/>
+          <a:ext cx="0" cy="0"/>
+          <a:chOff x="0" y="0"/>
+          <a:chExt cx="0" cy="0"/>
+        </a:xfrm>
+      </p:grpSpPr>
+      <p:sp>
+        <p:nvSpPr>
+          <p:cNvPr id="2" name="Text 0"/>
+          <p:cNvSpPr/>
+          <p:nvPr/>
+        </p:nvSpPr>
+        <p:spPr>
+          <a:xfrm>
+            <a:off x="3047848" y="1524000"/>
+            <a:ext cx="6096000" cy="203200"/>
+          </a:xfrm>
+          <a:prstGeom prst="rect">
+            <a:avLst/>
+          </a:prstGeom>
+          <a:noFill/>
+          <a:ln/>
+        </p:spPr>
+        <p:txBody>
+          <a:bodyPr wrap="none" lIns="0" tIns="0" rIns="0" bIns="0" rtlCol="0" anchor="t"/>
+          <a:lstStyle/>
+          <a:p>
+            <a:pPr algn="l" indent="0" marL="0">
+              <a:buNone/>
+            </a:pPr>
+            <a:r>
+              <a:rPr lang="en-US" sz="1200" b="1" dirty="0">
+                <a:solidFill>
+                  <a:srgbClr val="0B0B0B"/>
+                </a:solidFill>
+                <a:latin typeface="Segoe UI" pitchFamily="34" charset="0"/>
+                <a:ea typeface="Segoe UI" pitchFamily="34" charset="-122"/>
+                <a:cs typeface="Segoe UI" pitchFamily="34" charset="-120"/>
+              </a:rPr>
+              <a:t>Highlighted max point (per-cell color on line)</a:t>
+            </a:r>
+            <a:endParaRPr lang="en-US" sz="1200" dirty="0"/>
+          </a:p>
+        </p:txBody>
+      </p:sp>
+      <p:sp>
+        <p:nvSpPr>
+          <p:cNvPr id="3" name="Text 1"/>
+          <p:cNvSpPr/>
+          <p:nvPr/>
+        </p:nvSpPr>
+        <p:spPr>
+          <a:xfrm>
+            <a:off x="3073248" y="5143500"/>
+            <a:ext cx="1203960" cy="177800"/>
+          </a:xfrm>
+          <a:prstGeom prst="rect">
+            <a:avLst/>
+          </a:prstGeom>
+          <a:noFill/>
+          <a:ln/>
+        </p:spPr>
+        <p:txBody>
+          <a:bodyPr wrap="none" lIns="0" tIns="0" rIns="0" bIns="0" rtlCol="0" anchor="t"/>
+          <a:lstStyle/>
+          <a:p>
+            <a:pPr algn="ctr" indent="0" marL="0">
+              <a:buNone/>
+            </a:pPr>
+            <a:r>
+              <a:rPr lang="en-US" sz="1000" dirty="0">
+                <a:solidFill>
+                  <a:srgbClr val="0B0B0B"/>
+                </a:solidFill>
+                <a:latin typeface="Segoe UI" pitchFamily="34" charset="0"/>
+                <a:ea typeface="Segoe UI" pitchFamily="34" charset="-122"/>
+                <a:cs typeface="Segoe UI" pitchFamily="34" charset="-120"/>
+              </a:rPr>
+              <a:t>Jan</a:t>
+            </a:r>
+            <a:endParaRPr lang="en-US" sz="1000" dirty="0"/>
+          </a:p>
+        </p:txBody>
+      </p:sp>
+      <p:sp>
+        <p:nvSpPr>
+          <p:cNvPr id="4" name="Text 2"/>
+          <p:cNvSpPr/>
+          <p:nvPr/>
+        </p:nvSpPr>
+        <p:spPr>
+          <a:xfrm>
+            <a:off x="4277208" y="5143500"/>
+            <a:ext cx="1203960" cy="177800"/>
+          </a:xfrm>
+          <a:prstGeom prst="rect">
+            <a:avLst/>
+          </a:prstGeom>
+          <a:noFill/>
+          <a:ln/>
+        </p:spPr>
+        <p:txBody>
+          <a:bodyPr wrap="none" lIns="0" tIns="0" rIns="0" bIns="0" rtlCol="0" anchor="t"/>
+          <a:lstStyle/>
+          <a:p>
+            <a:pPr algn="ctr" indent="0" marL="0">
+              <a:buNone/>
+            </a:pPr>
+            <a:r>
+              <a:rPr lang="en-US" sz="1000" dirty="0">
+                <a:solidFill>
+                  <a:srgbClr val="0B0B0B"/>
+                </a:solidFill>
+                <a:latin typeface="Segoe UI" pitchFamily="34" charset="0"/>
+                <a:ea typeface="Segoe UI" pitchFamily="34" charset="-122"/>
+                <a:cs typeface="Segoe UI" pitchFamily="34" charset="-120"/>
+              </a:rPr>
+              <a:t>Feb</a:t>
+            </a:r>
+            <a:endParaRPr lang="en-US" sz="1000" dirty="0"/>
+          </a:p>
+        </p:txBody>
+      </p:sp>
+      <p:sp>
+        <p:nvSpPr>
+          <p:cNvPr id="5" name="Text 3"/>
+          <p:cNvSpPr/>
+          <p:nvPr/>
+        </p:nvSpPr>
+        <p:spPr>
+          <a:xfrm>
+            <a:off x="5481168" y="5143500"/>
+            <a:ext cx="1203960" cy="177800"/>
+          </a:xfrm>
+          <a:prstGeom prst="rect">
+            <a:avLst/>
+          </a:prstGeom>
+          <a:noFill/>
+          <a:ln/>
+        </p:spPr>
+        <p:txBody>
+          <a:bodyPr wrap="none" lIns="0" tIns="0" rIns="0" bIns="0" rtlCol="0" anchor="t"/>
+          <a:lstStyle/>
+          <a:p>
+            <a:pPr algn="ctr" indent="0" marL="0">
+              <a:buNone/>
+            </a:pPr>
+            <a:r>
+              <a:rPr lang="en-US" sz="1000" dirty="0">
+                <a:solidFill>
+                  <a:srgbClr val="0B0B0B"/>
+                </a:solidFill>
+                <a:latin typeface="Segoe UI" pitchFamily="34" charset="0"/>
+                <a:ea typeface="Segoe UI" pitchFamily="34" charset="-122"/>
+                <a:cs typeface="Segoe UI" pitchFamily="34" charset="-120"/>
+              </a:rPr>
+              <a:t>Mar</a:t>
+            </a:r>
+            <a:endParaRPr lang="en-US" sz="1000" dirty="0"/>
+          </a:p>
+        </p:txBody>
+      </p:sp>
+      <p:sp>
+        <p:nvSpPr>
+          <p:cNvPr id="6" name="Text 4"/>
+          <p:cNvSpPr/>
+          <p:nvPr/>
+        </p:nvSpPr>
+        <p:spPr>
+          <a:xfrm>
+            <a:off x="6685128" y="5143500"/>
+            <a:ext cx="1203960" cy="177800"/>
+          </a:xfrm>
+          <a:prstGeom prst="rect">
+            <a:avLst/>
+          </a:prstGeom>
+          <a:noFill/>
+          <a:ln/>
+        </p:spPr>
+        <p:txBody>
+          <a:bodyPr wrap="none" lIns="0" tIns="0" rIns="0" bIns="0" rtlCol="0" anchor="t"/>
+          <a:lstStyle/>
+          <a:p>
+            <a:pPr algn="ctr" indent="0" marL="0">
+              <a:buNone/>
+            </a:pPr>
+            <a:r>
+              <a:rPr lang="en-US" sz="1000" dirty="0">
+                <a:solidFill>
+                  <a:srgbClr val="0B0B0B"/>
+                </a:solidFill>
+                <a:latin typeface="Segoe UI" pitchFamily="34" charset="0"/>
+                <a:ea typeface="Segoe UI" pitchFamily="34" charset="-122"/>
+                <a:cs typeface="Segoe UI" pitchFamily="34" charset="-120"/>
+              </a:rPr>
+              <a:t>Apr</a:t>
+            </a:r>
+            <a:endParaRPr lang="en-US" sz="1000" dirty="0"/>
+          </a:p>
+        </p:txBody>
+      </p:sp>
+      <p:sp>
+        <p:nvSpPr>
+          <p:cNvPr id="7" name="Text 5"/>
+          <p:cNvSpPr/>
+          <p:nvPr/>
+        </p:nvSpPr>
+        <p:spPr>
+          <a:xfrm>
+            <a:off x="7889088" y="5143500"/>
+            <a:ext cx="1203960" cy="177800"/>
+          </a:xfrm>
+          <a:prstGeom prst="rect">
+            <a:avLst/>
+          </a:prstGeom>
+          <a:noFill/>
+          <a:ln/>
+        </p:spPr>
+        <p:txBody>
+          <a:bodyPr wrap="none" lIns="0" tIns="0" rIns="0" bIns="0" rtlCol="0" anchor="t"/>
+          <a:lstStyle/>
+          <a:p>
+            <a:pPr algn="ctr" indent="0" marL="0">
+              <a:buNone/>
+            </a:pPr>
+            <a:r>
+              <a:rPr lang="en-US" sz="1000" dirty="0">
+                <a:solidFill>
+                  <a:srgbClr val="0B0B0B"/>
+                </a:solidFill>
+                <a:latin typeface="Segoe UI" pitchFamily="34" charset="0"/>
+                <a:ea typeface="Segoe UI" pitchFamily="34" charset="-122"/>
+                <a:cs typeface="Segoe UI" pitchFamily="34" charset="-120"/>
+              </a:rPr>
+              <a:t>May</a:t>
+            </a:r>
+            <a:endParaRPr lang="en-US" sz="1000" dirty="0"/>
+          </a:p>
+        </p:txBody>
+      </p:sp>
+      <p:sp>
+        <p:nvSpPr>
+          <p:cNvPr id="8" name="Shape 6"/>
+          <p:cNvSpPr/>
+          <p:nvPr/>
+        </p:nvSpPr>
+        <p:spPr>
+          <a:xfrm>
+            <a:off x="3644748" y="3154680"/>
+            <a:ext cx="60960" cy="60960"/>
+          </a:xfrm>
+          <a:prstGeom prst="rect">
+            <a:avLst/>
+          </a:prstGeom>
+          <a:solidFill>
+            <a:srgbClr val="2A78D6"/>
+          </a:solidFill>
+          <a:ln w="12700">
+            <a:solidFill>
+              <a:srgbClr val="FFFFFF"/>
+            </a:solidFill>
+            <a:prstDash val="solid"/>
+          </a:ln>
+        </p:spPr>
+      </p:sp>
+      <p:sp>
+        <p:nvSpPr>
+          <p:cNvPr id="9" name="Text 7"/>
+          <p:cNvSpPr/>
+          <p:nvPr/>
+        </p:nvSpPr>
+        <p:spPr>
+          <a:xfrm>
+            <a:off x="3294228" y="2975610"/>
+            <a:ext cx="762000" cy="177800"/>
+          </a:xfrm>
+          <a:prstGeom prst="rect">
+            <a:avLst/>
+          </a:prstGeom>
+          <a:noFill/>
+          <a:ln/>
+        </p:spPr>
+        <p:txBody>
+          <a:bodyPr wrap="none" lIns="0" tIns="0" rIns="0" bIns="0" rtlCol="0" anchor="b"/>
+          <a:lstStyle/>
+          <a:p>
+            <a:pPr algn="ctr" indent="0" marL="0">
+              <a:buNone/>
+            </a:pPr>
+            <a:r>
+              <a:rPr lang="en-US" sz="1000" dirty="0">
+                <a:solidFill>
+                  <a:srgbClr val="0B0B0B"/>
+                </a:solidFill>
+                <a:latin typeface="Segoe UI" pitchFamily="34" charset="0"/>
+                <a:ea typeface="Segoe UI" pitchFamily="34" charset="-122"/>
+                <a:cs typeface="Segoe UI" pitchFamily="34" charset="-120"/>
+              </a:rPr>
+              <a:t>120</a:t>
+            </a:r>
+            <a:endParaRPr lang="en-US" sz="1000" dirty="0"/>
+          </a:p>
+        </p:txBody>
+      </p:sp>
+      <p:sp>
+        <p:nvSpPr>
+          <p:cNvPr id="10" name="Shape 8"/>
+          <p:cNvSpPr/>
+          <p:nvPr/>
+        </p:nvSpPr>
+        <p:spPr>
+          <a:xfrm flipV="1">
+            <a:off x="3675228" y="2945130"/>
+            <a:ext cx="1203960" cy="240030"/>
+          </a:xfrm>
+          <a:prstGeom prst="line">
+            <a:avLst/>
+          </a:prstGeom>
+          <a:noFill/>
+          <a:ln w="25400">
+            <a:solidFill>
+              <a:srgbClr val="2A78D6"/>
+            </a:solidFill>
+            <a:prstDash val="solid"/>
+          </a:ln>
+        </p:spPr>
+      </p:sp>
+      <p:sp>
+        <p:nvSpPr>
+          <p:cNvPr id="11" name="Shape 9"/>
+          <p:cNvSpPr/>
+          <p:nvPr/>
+        </p:nvSpPr>
+        <p:spPr>
+          <a:xfrm>
+            <a:off x="4848708" y="2914650"/>
+            <a:ext cx="60960" cy="60960"/>
+          </a:xfrm>
+          <a:prstGeom prst="rect">
+            <a:avLst/>
+          </a:prstGeom>
+          <a:solidFill>
+            <a:srgbClr val="2A78D6"/>
+          </a:solidFill>
+          <a:ln w="12700">
+            <a:solidFill>
+              <a:srgbClr val="FFFFFF"/>
+            </a:solidFill>
+            <a:prstDash val="solid"/>
+          </a:ln>
+        </p:spPr>
+      </p:sp>
+      <p:sp>
+        <p:nvSpPr>
+          <p:cNvPr id="12" name="Text 10"/>
+          <p:cNvSpPr/>
+          <p:nvPr/>
+        </p:nvSpPr>
+        <p:spPr>
+          <a:xfrm>
+            <a:off x="4498188" y="2735580"/>
+            <a:ext cx="762000" cy="177800"/>
+          </a:xfrm>
+          <a:prstGeom prst="rect">
+            <a:avLst/>
+          </a:prstGeom>
+          <a:noFill/>
+          <a:ln/>
+        </p:spPr>
+        <p:txBody>
+          <a:bodyPr wrap="none" lIns="0" tIns="0" rIns="0" bIns="0" rtlCol="0" anchor="b"/>
+          <a:lstStyle/>
+          <a:p>
+            <a:pPr algn="ctr" indent="0" marL="0">
+              <a:buNone/>
+            </a:pPr>
+            <a:r>
+              <a:rPr lang="en-US" sz="1000" dirty="0">
+                <a:solidFill>
+                  <a:srgbClr val="0B0B0B"/>
+                </a:solidFill>
+                <a:latin typeface="Segoe UI" pitchFamily="34" charset="0"/>
+                <a:ea typeface="Segoe UI" pitchFamily="34" charset="-122"/>
+                <a:cs typeface="Segoe UI" pitchFamily="34" charset="-120"/>
+              </a:rPr>
+              <a:t>135</a:t>
+            </a:r>
+            <a:endParaRPr lang="en-US" sz="1000" dirty="0"/>
+          </a:p>
+        </p:txBody>
+      </p:sp>
+      <p:sp>
+        <p:nvSpPr>
+          <p:cNvPr id="13" name="Shape 11"/>
+          <p:cNvSpPr/>
+          <p:nvPr/>
+        </p:nvSpPr>
+        <p:spPr>
+          <a:xfrm flipV="1">
+            <a:off x="4879188" y="2257044"/>
+            <a:ext cx="1203960" cy="688086"/>
+          </a:xfrm>
+          <a:prstGeom prst="line">
+            <a:avLst/>
+          </a:prstGeom>
+          <a:noFill/>
+          <a:ln w="25400">
+            <a:solidFill>
+              <a:srgbClr val="2A78D6"/>
+            </a:solidFill>
+            <a:prstDash val="solid"/>
+          </a:ln>
+        </p:spPr>
+      </p:sp>
+      <p:sp>
+        <p:nvSpPr>
+          <p:cNvPr id="14" name="Shape 12"/>
+          <p:cNvSpPr/>
+          <p:nvPr/>
+        </p:nvSpPr>
+        <p:spPr>
+          <a:xfrm>
+            <a:off x="6039968" y="2213864"/>
+            <a:ext cx="86360" cy="86360"/>
+          </a:xfrm>
+          <a:prstGeom prst="rect">
+            <a:avLst/>
+          </a:prstGeom>
+          <a:solidFill>
+            <a:srgbClr val="E34948"/>
+          </a:solidFill>
+          <a:ln w="12700">
+            <a:solidFill>
+              <a:srgbClr val="FFFFFF"/>
+            </a:solidFill>
+            <a:prstDash val="solid"/>
+          </a:ln>
+        </p:spPr>
+      </p:sp>
+      <p:sp>
+        <p:nvSpPr>
+          <p:cNvPr id="15" name="Text 13"/>
+          <p:cNvSpPr/>
+          <p:nvPr/>
+        </p:nvSpPr>
+        <p:spPr>
+          <a:xfrm>
+            <a:off x="5702148" y="2047494"/>
+            <a:ext cx="762000" cy="177800"/>
+          </a:xfrm>
+          <a:prstGeom prst="rect">
+            <a:avLst/>
+          </a:prstGeom>
+          <a:noFill/>
+          <a:ln/>
+        </p:spPr>
+        <p:txBody>
+          <a:bodyPr wrap="none" lIns="0" tIns="0" rIns="0" bIns="0" rtlCol="0" anchor="b"/>
+          <a:lstStyle/>
+          <a:p>
+            <a:pPr algn="ctr" indent="0" marL="0">
+              <a:buNone/>
+            </a:pPr>
+            <a:r>
+              <a:rPr lang="en-US" sz="1000" b="1" dirty="0">
+                <a:solidFill>
+                  <a:srgbClr val="E34948"/>
+                </a:solidFill>
+                <a:latin typeface="Segoe UI" pitchFamily="34" charset="0"/>
+                <a:ea typeface="Segoe UI" pitchFamily="34" charset="-122"/>
+                <a:cs typeface="Segoe UI" pitchFamily="34" charset="-120"/>
+              </a:rPr>
+              <a:t>178</a:t>
+            </a:r>
+            <a:endParaRPr lang="en-US" sz="1000" dirty="0"/>
+          </a:p>
+        </p:txBody>
+      </p:sp>
+      <p:sp>
+        <p:nvSpPr>
+          <p:cNvPr id="16" name="Shape 14"/>
+          <p:cNvSpPr/>
+          <p:nvPr/>
+        </p:nvSpPr>
+        <p:spPr>
+          <a:xfrm>
+            <a:off x="6083148" y="2257044"/>
+            <a:ext cx="1203960" cy="448056"/>
+          </a:xfrm>
+          <a:prstGeom prst="line">
+            <a:avLst/>
+          </a:prstGeom>
+          <a:noFill/>
+          <a:ln w="25400">
+            <a:solidFill>
+              <a:srgbClr val="2A78D6"/>
+            </a:solidFill>
+            <a:prstDash val="solid"/>
+          </a:ln>
+        </p:spPr>
+      </p:sp>
+      <p:sp>
+        <p:nvSpPr>
+          <p:cNvPr id="17" name="Shape 15"/>
+          <p:cNvSpPr/>
+          <p:nvPr/>
+        </p:nvSpPr>
+        <p:spPr>
+          <a:xfrm>
+            <a:off x="7256628" y="2674620"/>
+            <a:ext cx="60960" cy="60960"/>
+          </a:xfrm>
+          <a:prstGeom prst="rect">
+            <a:avLst/>
+          </a:prstGeom>
+          <a:solidFill>
+            <a:srgbClr val="2A78D6"/>
+          </a:solidFill>
+          <a:ln w="12700">
+            <a:solidFill>
+              <a:srgbClr val="FFFFFF"/>
+            </a:solidFill>
+            <a:prstDash val="solid"/>
+          </a:ln>
+        </p:spPr>
+      </p:sp>
+      <p:sp>
+        <p:nvSpPr>
+          <p:cNvPr id="18" name="Text 16"/>
+          <p:cNvSpPr/>
+          <p:nvPr/>
+        </p:nvSpPr>
+        <p:spPr>
+          <a:xfrm>
+            <a:off x="6906108" y="2495550"/>
+            <a:ext cx="762000" cy="177800"/>
+          </a:xfrm>
+          <a:prstGeom prst="rect">
+            <a:avLst/>
+          </a:prstGeom>
+          <a:noFill/>
+          <a:ln/>
+        </p:spPr>
+        <p:txBody>
+          <a:bodyPr wrap="none" lIns="0" tIns="0" rIns="0" bIns="0" rtlCol="0" anchor="b"/>
+          <a:lstStyle/>
+          <a:p>
+            <a:pPr algn="ctr" indent="0" marL="0">
+              <a:buNone/>
+            </a:pPr>
+            <a:r>
+              <a:rPr lang="en-US" sz="1000" dirty="0">
+                <a:solidFill>
+                  <a:srgbClr val="0B0B0B"/>
+                </a:solidFill>
+                <a:latin typeface="Segoe UI" pitchFamily="34" charset="0"/>
+                <a:ea typeface="Segoe UI" pitchFamily="34" charset="-122"/>
+                <a:cs typeface="Segoe UI" pitchFamily="34" charset="-120"/>
+              </a:rPr>
+              <a:t>150</a:t>
+            </a:r>
+            <a:endParaRPr lang="en-US" sz="1000" dirty="0"/>
+          </a:p>
+        </p:txBody>
+      </p:sp>
+      <p:sp>
+        <p:nvSpPr>
+          <p:cNvPr id="19" name="Shape 17"/>
+          <p:cNvSpPr/>
+          <p:nvPr/>
+        </p:nvSpPr>
+        <p:spPr>
+          <a:xfrm flipV="1">
+            <a:off x="7287108" y="2513076"/>
+            <a:ext cx="1203960" cy="192024"/>
+          </a:xfrm>
+          <a:prstGeom prst="line">
+            <a:avLst/>
+          </a:prstGeom>
+          <a:noFill/>
+          <a:ln w="25400">
+            <a:solidFill>
+              <a:srgbClr val="2A78D6"/>
+            </a:solidFill>
+            <a:prstDash val="solid"/>
+          </a:ln>
+        </p:spPr>
+      </p:sp>
+      <p:sp>
+        <p:nvSpPr>
+          <p:cNvPr id="20" name="Shape 18"/>
+          <p:cNvSpPr/>
+          <p:nvPr/>
+        </p:nvSpPr>
+        <p:spPr>
+          <a:xfrm>
+            <a:off x="8460588" y="2482596"/>
+            <a:ext cx="60960" cy="60960"/>
+          </a:xfrm>
+          <a:prstGeom prst="rect">
+            <a:avLst/>
+          </a:prstGeom>
+          <a:solidFill>
+            <a:srgbClr val="2A78D6"/>
+          </a:solidFill>
+          <a:ln w="12700">
+            <a:solidFill>
+              <a:srgbClr val="FFFFFF"/>
+            </a:solidFill>
+            <a:prstDash val="solid"/>
+          </a:ln>
+        </p:spPr>
+      </p:sp>
+      <p:sp>
+        <p:nvSpPr>
+          <p:cNvPr id="21" name="Text 19"/>
+          <p:cNvSpPr/>
+          <p:nvPr/>
+        </p:nvSpPr>
+        <p:spPr>
+          <a:xfrm>
+            <a:off x="8110068" y="2303526"/>
+            <a:ext cx="762000" cy="177800"/>
+          </a:xfrm>
+          <a:prstGeom prst="rect">
+            <a:avLst/>
+          </a:prstGeom>
+          <a:noFill/>
+          <a:ln/>
+        </p:spPr>
+        <p:txBody>
+          <a:bodyPr wrap="none" lIns="0" tIns="0" rIns="0" bIns="0" rtlCol="0" anchor="b"/>
+          <a:lstStyle/>
+          <a:p>
+            <a:pPr algn="ctr" indent="0" marL="0">
+              <a:buNone/>
+            </a:pPr>
+            <a:r>
+              <a:rPr lang="en-US" sz="1000" dirty="0">
+                <a:solidFill>
+                  <a:srgbClr val="0B0B0B"/>
+                </a:solidFill>
+                <a:latin typeface="Segoe UI" pitchFamily="34" charset="0"/>
+                <a:ea typeface="Segoe UI" pitchFamily="34" charset="-122"/>
+                <a:cs typeface="Segoe UI" pitchFamily="34" charset="-120"/>
+              </a:rPr>
+              <a:t>162</a:t>
+            </a:r>
+            <a:endParaRPr lang="en-US" sz="1000" dirty="0"/>
+          </a:p>
+        </p:txBody>
+      </p:sp>
+      <p:sp>
+        <p:nvSpPr>
+          <p:cNvPr id="22" name="Shape 20"/>
+          <p:cNvSpPr/>
+          <p:nvPr/>
+        </p:nvSpPr>
+        <p:spPr>
+          <a:xfrm>
+            <a:off x="3073248" y="5105400"/>
+            <a:ext cx="6019800" cy="0"/>
+          </a:xfrm>
+          <a:prstGeom prst="line">
+            <a:avLst/>
+          </a:prstGeom>
+          <a:noFill/>
+          <a:ln w="12700">
+            <a:solidFill>
+              <a:srgbClr val="A5A49E"/>
+            </a:solidFill>
+            <a:prstDash val="solid"/>
+          </a:ln>
+        </p:spPr>
       </p:sp>
     </p:spTree>
   </p:cSld>

--- a/examples/showcase.pptx
+++ b/examples/showcase.pptx
@@ -40,9 +40,10 @@
     <p:sldId id="288" r:id="rId34"/>
     <p:sldId id="289" r:id="rId35"/>
     <p:sldId id="290" r:id="rId36"/>
+    <p:sldId id="291" r:id="rId37"/>
   </p:sldIdLst>
   <p:notesMasterIdLst>
-    <p:notesMasterId r:id="rId37"/>
+    <p:notesMasterId r:id="rId38"/>
   </p:notesMasterIdLst>
   <p:sldSz cx="12191695" cy="6858000"/>
   <p:notesSz cx="6858000" cy="12191695"/>
@@ -3042,6 +3043,94 @@
 </p:notes>
 </file>
 
+<file path=ppt/notesSlides/notesSlide36.xml><?xml version="1.0" encoding="utf-8"?>
+<p:notes xmlns:a="http://schemas.openxmlformats.org/drawingml/2006/main" xmlns:r="http://schemas.openxmlformats.org/officeDocument/2006/relationships" xmlns:p="http://schemas.openxmlformats.org/presentationml/2006/main">
+  <p:cSld>
+    <p:spTree>
+      <p:nvGrpSpPr>
+        <p:cNvPr id="1" name=""/>
+        <p:cNvGrpSpPr/>
+        <p:nvPr/>
+      </p:nvGrpSpPr>
+      <p:grpSpPr>
+        <a:xfrm>
+          <a:off x="0" y="0"/>
+          <a:ext cx="0" cy="0"/>
+          <a:chOff x="0" y="0"/>
+          <a:chExt cx="0" cy="0"/>
+        </a:xfrm>
+      </p:grpSpPr>
+      <p:sp>
+        <p:nvSpPr>
+          <p:cNvPr id="2" name="Slide Image Placeholder 1"/>
+          <p:cNvSpPr>
+            <a:spLocks noGrp="1" noRot="1" noChangeAspect="1"/>
+          </p:cNvSpPr>
+          <p:nvPr>
+            <p:ph type="sldImg"/>
+          </p:nvPr>
+        </p:nvSpPr>
+        <p:spPr/>
+      </p:sp>
+      <p:sp>
+        <p:nvSpPr>
+          <p:cNvPr id="3" name="Notes Placeholder 2"/>
+          <p:cNvSpPr>
+            <a:spLocks noGrp="1"/>
+          </p:cNvSpPr>
+          <p:nvPr>
+            <p:ph type="body" idx="1"/>
+          </p:nvPr>
+        </p:nvSpPr>
+        <p:spPr/>
+        <p:txBody>
+          <a:bodyPr/>
+          <a:lstStyle/>
+          <a:p>
+            <a:r>
+              <a:rPr lang="en-US" dirty="0"/>
+              <a:t/>
+            </a:r>
+            <a:endParaRPr lang="en-US" dirty="0"/>
+          </a:p>
+        </p:txBody>
+      </p:sp>
+      <p:sp>
+        <p:nvSpPr>
+          <p:cNvPr id="4" name="Slide Number Placeholder 3"/>
+          <p:cNvSpPr>
+            <a:spLocks noGrp="1"/>
+          </p:cNvSpPr>
+          <p:nvPr>
+            <p:ph type="sldNum" sz="quarter" idx="10"/>
+          </p:nvPr>
+        </p:nvSpPr>
+        <p:spPr/>
+        <p:txBody>
+          <a:bodyPr/>
+          <a:lstStyle/>
+          <a:p>
+            <a:fld id="{F7021451-1387-4CA6-816F-3879F97B5CBC}" type="slidenum">
+              <a:rPr lang="en-US"/>
+              <a:t>36</a:t>
+            </a:fld>
+            <a:endParaRPr lang="en-US"/>
+          </a:p>
+        </p:txBody>
+      </p:sp>
+    </p:spTree>
+    <p:extLst>
+      <p:ext uri="{BB962C8B-B14F-4D97-AF65-F5344CB8AC3E}">
+        <p14:creationId xmlns:p14="http://schemas.microsoft.com/office/powerpoint/2010/main" val="1024086991"/>
+      </p:ext>
+    </p:extLst>
+  </p:cSld>
+  <p:clrMapOvr>
+    <a:masterClrMapping/>
+  </p:clrMapOvr>
+</p:notes>
+</file>
+
 <file path=ppt/notesSlides/notesSlide4.xml><?xml version="1.0" encoding="utf-8"?>
 <p:notes xmlns:a="http://schemas.openxmlformats.org/drawingml/2006/main" xmlns:r="http://schemas.openxmlformats.org/officeDocument/2006/relationships" xmlns:p="http://schemas.openxmlformats.org/presentationml/2006/main">
   <p:cSld>
@@ -24564,7 +24653,46 @@
       </p:sp>
       <p:sp>
         <p:nvSpPr>
-          <p:cNvPr id="23" name="Shape 21"/>
+          <p:cNvPr id="23" name="Text 21"/>
+          <p:cNvSpPr/>
+          <p:nvPr/>
+        </p:nvSpPr>
+        <p:spPr>
+          <a:xfrm>
+            <a:off x="7757008" y="2501545"/>
+            <a:ext cx="1285240" cy="165100"/>
+          </a:xfrm>
+          <a:prstGeom prst="rect">
+            <a:avLst/>
+          </a:prstGeom>
+          <a:noFill/>
+          <a:ln/>
+        </p:spPr>
+        <p:txBody>
+          <a:bodyPr wrap="none" lIns="0" tIns="0" rIns="0" bIns="0" rtlCol="0" anchor="ctr"/>
+          <a:lstStyle/>
+          <a:p>
+            <a:pPr algn="r" indent="0" marL="0">
+              <a:buNone/>
+            </a:pPr>
+            <a:r>
+              <a:rPr lang="en-US" sz="900" dirty="0">
+                <a:solidFill>
+                  <a:srgbClr val="E34948"/>
+                </a:solidFill>
+                <a:latin typeface="Segoe UI" pitchFamily="34" charset="0"/>
+                <a:ea typeface="Segoe UI" pitchFamily="34" charset="-122"/>
+                <a:cs typeface="Segoe UI" pitchFamily="34" charset="-120"/>
+              </a:rPr>
+              <a:t>R² = 0.99, p &lt; 0.001</a:t>
+            </a:r>
+            <a:endParaRPr lang="en-US" sz="900" dirty="0"/>
+          </a:p>
+        </p:txBody>
+      </p:sp>
+      <p:sp>
+        <p:nvSpPr>
+          <p:cNvPr id="24" name="Shape 22"/>
           <p:cNvSpPr/>
           <p:nvPr/>
         </p:nvSpPr>
@@ -24584,7 +24712,7 @@
       </p:sp>
       <p:sp>
         <p:nvSpPr>
-          <p:cNvPr id="24" name="Text 22"/>
+          <p:cNvPr id="25" name="Text 23"/>
           <p:cNvSpPr/>
           <p:nvPr/>
         </p:nvSpPr>
@@ -24623,7 +24751,7 @@
       </p:sp>
       <p:sp>
         <p:nvSpPr>
-          <p:cNvPr id="25" name="Shape 23"/>
+          <p:cNvPr id="26" name="Shape 24"/>
           <p:cNvSpPr/>
           <p:nvPr/>
         </p:nvSpPr>
@@ -24643,7 +24771,7 @@
       </p:sp>
       <p:sp>
         <p:nvSpPr>
-          <p:cNvPr id="26" name="Text 24"/>
+          <p:cNvPr id="27" name="Text 25"/>
           <p:cNvSpPr/>
           <p:nvPr/>
         </p:nvSpPr>
@@ -24682,7 +24810,7 @@
       </p:sp>
       <p:sp>
         <p:nvSpPr>
-          <p:cNvPr id="27" name="Shape 25"/>
+          <p:cNvPr id="28" name="Shape 26"/>
           <p:cNvSpPr/>
           <p:nvPr/>
         </p:nvSpPr>
@@ -24702,7 +24830,7 @@
       </p:sp>
       <p:sp>
         <p:nvSpPr>
-          <p:cNvPr id="28" name="Text 26"/>
+          <p:cNvPr id="29" name="Text 27"/>
           <p:cNvSpPr/>
           <p:nvPr/>
         </p:nvSpPr>
@@ -24741,7 +24869,7 @@
       </p:sp>
       <p:sp>
         <p:nvSpPr>
-          <p:cNvPr id="29" name="Shape 27"/>
+          <p:cNvPr id="30" name="Shape 28"/>
           <p:cNvSpPr/>
           <p:nvPr/>
         </p:nvSpPr>
@@ -24766,7 +24894,7 @@
       </p:sp>
       <p:sp>
         <p:nvSpPr>
-          <p:cNvPr id="30" name="Shape 28"/>
+          <p:cNvPr id="31" name="Shape 29"/>
           <p:cNvSpPr/>
           <p:nvPr/>
         </p:nvSpPr>
@@ -24791,7 +24919,7 @@
       </p:sp>
       <p:sp>
         <p:nvSpPr>
-          <p:cNvPr id="31" name="Shape 29"/>
+          <p:cNvPr id="32" name="Shape 30"/>
           <p:cNvSpPr/>
           <p:nvPr/>
         </p:nvSpPr>
@@ -24816,7 +24944,7 @@
       </p:sp>
       <p:sp>
         <p:nvSpPr>
-          <p:cNvPr id="32" name="Shape 30"/>
+          <p:cNvPr id="33" name="Shape 31"/>
           <p:cNvSpPr/>
           <p:nvPr/>
         </p:nvSpPr>
@@ -24841,7 +24969,7 @@
       </p:sp>
       <p:sp>
         <p:nvSpPr>
-          <p:cNvPr id="33" name="Shape 31"/>
+          <p:cNvPr id="34" name="Shape 32"/>
           <p:cNvSpPr/>
           <p:nvPr/>
         </p:nvSpPr>
@@ -24866,7 +24994,7 @@
       </p:sp>
       <p:sp>
         <p:nvSpPr>
-          <p:cNvPr id="34" name="Shape 32"/>
+          <p:cNvPr id="35" name="Shape 33"/>
           <p:cNvSpPr/>
           <p:nvPr/>
         </p:nvSpPr>
@@ -24891,7 +25019,7 @@
       </p:sp>
       <p:sp>
         <p:nvSpPr>
-          <p:cNvPr id="35" name="Text 33"/>
+          <p:cNvPr id="36" name="Text 34"/>
           <p:cNvSpPr/>
           <p:nvPr/>
         </p:nvSpPr>
@@ -24930,7 +25058,7 @@
       </p:sp>
       <p:sp>
         <p:nvSpPr>
-          <p:cNvPr id="36" name="Text 34"/>
+          <p:cNvPr id="37" name="Text 35"/>
           <p:cNvSpPr/>
           <p:nvPr/>
         </p:nvSpPr>
@@ -24969,7 +25097,7 @@
       </p:sp>
       <p:sp>
         <p:nvSpPr>
-          <p:cNvPr id="37" name="Text 35"/>
+          <p:cNvPr id="38" name="Text 36"/>
           <p:cNvSpPr/>
           <p:nvPr/>
         </p:nvSpPr>
@@ -25008,7 +25136,7 @@
       </p:sp>
       <p:sp>
         <p:nvSpPr>
-          <p:cNvPr id="38" name="Text 36"/>
+          <p:cNvPr id="39" name="Text 37"/>
           <p:cNvSpPr/>
           <p:nvPr/>
         </p:nvSpPr>
@@ -25047,7 +25175,7 @@
       </p:sp>
       <p:sp>
         <p:nvSpPr>
-          <p:cNvPr id="39" name="Text 37"/>
+          <p:cNvPr id="40" name="Text 38"/>
           <p:cNvSpPr/>
           <p:nvPr/>
         </p:nvSpPr>
@@ -25086,7 +25214,7 @@
       </p:sp>
       <p:sp>
         <p:nvSpPr>
-          <p:cNvPr id="40" name="Text 38"/>
+          <p:cNvPr id="41" name="Text 39"/>
           <p:cNvSpPr/>
           <p:nvPr/>
         </p:nvSpPr>
@@ -34053,6 +34181,1048 @@
 <file path=ppt/slides/slide35.xml><?xml version="1.0" encoding="utf-8"?>
 <p:sld xmlns:a="http://schemas.openxmlformats.org/drawingml/2006/main" xmlns:r="http://schemas.openxmlformats.org/officeDocument/2006/relationships" xmlns:p="http://schemas.openxmlformats.org/presentationml/2006/main">
   <p:cSld name="Slide 35">
+    <p:bg>
+      <p:bgPr>
+        <a:solidFill>
+          <a:srgbClr val="FFFFFF"/>
+        </a:solidFill>
+      </p:bgPr>
+    </p:bg>
+    <p:spTree>
+      <p:nvGrpSpPr>
+        <p:cNvPr id="1" name=""/>
+        <p:cNvGrpSpPr/>
+        <p:nvPr/>
+      </p:nvGrpSpPr>
+      <p:grpSpPr>
+        <a:xfrm>
+          <a:off x="0" y="0"/>
+          <a:ext cx="0" cy="0"/>
+          <a:chOff x="0" y="0"/>
+          <a:chExt cx="0" cy="0"/>
+        </a:xfrm>
+      </p:grpSpPr>
+      <p:sp>
+        <p:nvSpPr>
+          <p:cNvPr id="2" name="Text 0"/>
+          <p:cNvSpPr/>
+          <p:nvPr/>
+        </p:nvSpPr>
+        <p:spPr>
+          <a:xfrm>
+            <a:off x="3047848" y="1524000"/>
+            <a:ext cx="6096000" cy="203200"/>
+          </a:xfrm>
+          <a:prstGeom prst="rect">
+            <a:avLst/>
+          </a:prstGeom>
+          <a:noFill/>
+          <a:ln/>
+        </p:spPr>
+        <p:txBody>
+          <a:bodyPr wrap="none" lIns="0" tIns="0" rIns="0" bIns="0" rtlCol="0" anchor="t"/>
+          <a:lstStyle/>
+          <a:p>
+            <a:pPr algn="l" indent="0" marL="0">
+              <a:buNone/>
+            </a:pPr>
+            <a:r>
+              <a:rPr lang="en-US" sz="1200" b="1" dirty="0">
+                <a:solidFill>
+                  <a:srgbClr val="0B0B0B"/>
+                </a:solidFill>
+                <a:latin typeface="Segoe UI" pitchFamily="34" charset="0"/>
+                <a:ea typeface="Segoe UI" pitchFamily="34" charset="-122"/>
+                <a:cs typeface="Segoe UI" pitchFamily="34" charset="-120"/>
+              </a:rPr>
+              <a:t>Pattern fills (SVG/preview; solid in PPT)</a:t>
+            </a:r>
+            <a:endParaRPr lang="en-US" sz="1200" dirty="0"/>
+          </a:p>
+        </p:txBody>
+      </p:sp>
+      <p:sp>
+        <p:nvSpPr>
+          <p:cNvPr id="3" name="Text 1"/>
+          <p:cNvSpPr/>
+          <p:nvPr/>
+        </p:nvSpPr>
+        <p:spPr>
+          <a:xfrm>
+            <a:off x="3073248" y="5143500"/>
+            <a:ext cx="1864360" cy="177800"/>
+          </a:xfrm>
+          <a:prstGeom prst="rect">
+            <a:avLst/>
+          </a:prstGeom>
+          <a:noFill/>
+          <a:ln/>
+        </p:spPr>
+        <p:txBody>
+          <a:bodyPr wrap="none" lIns="0" tIns="0" rIns="0" bIns="0" rtlCol="0" anchor="t"/>
+          <a:lstStyle/>
+          <a:p>
+            <a:pPr algn="ctr" indent="0" marL="0">
+              <a:buNone/>
+            </a:pPr>
+            <a:r>
+              <a:rPr lang="en-US" sz="1000" dirty="0">
+                <a:solidFill>
+                  <a:srgbClr val="0B0B0B"/>
+                </a:solidFill>
+                <a:latin typeface="Segoe UI" pitchFamily="34" charset="0"/>
+                <a:ea typeface="Segoe UI" pitchFamily="34" charset="-122"/>
+                <a:cs typeface="Segoe UI" pitchFamily="34" charset="-120"/>
+              </a:rPr>
+              <a:t>2022</a:t>
+            </a:r>
+            <a:endParaRPr lang="en-US" sz="1000" dirty="0"/>
+          </a:p>
+        </p:txBody>
+      </p:sp>
+      <p:sp>
+        <p:nvSpPr>
+          <p:cNvPr id="4" name="Text 2"/>
+          <p:cNvSpPr/>
+          <p:nvPr/>
+        </p:nvSpPr>
+        <p:spPr>
+          <a:xfrm>
+            <a:off x="4937608" y="5143500"/>
+            <a:ext cx="1864360" cy="177800"/>
+          </a:xfrm>
+          <a:prstGeom prst="rect">
+            <a:avLst/>
+          </a:prstGeom>
+          <a:noFill/>
+          <a:ln/>
+        </p:spPr>
+        <p:txBody>
+          <a:bodyPr wrap="none" lIns="0" tIns="0" rIns="0" bIns="0" rtlCol="0" anchor="t"/>
+          <a:lstStyle/>
+          <a:p>
+            <a:pPr algn="ctr" indent="0" marL="0">
+              <a:buNone/>
+            </a:pPr>
+            <a:r>
+              <a:rPr lang="en-US" sz="1000" dirty="0">
+                <a:solidFill>
+                  <a:srgbClr val="0B0B0B"/>
+                </a:solidFill>
+                <a:latin typeface="Segoe UI" pitchFamily="34" charset="0"/>
+                <a:ea typeface="Segoe UI" pitchFamily="34" charset="-122"/>
+                <a:cs typeface="Segoe UI" pitchFamily="34" charset="-120"/>
+              </a:rPr>
+              <a:t>2023</a:t>
+            </a:r>
+            <a:endParaRPr lang="en-US" sz="1000" dirty="0"/>
+          </a:p>
+        </p:txBody>
+      </p:sp>
+      <p:sp>
+        <p:nvSpPr>
+          <p:cNvPr id="5" name="Text 3"/>
+          <p:cNvSpPr/>
+          <p:nvPr/>
+        </p:nvSpPr>
+        <p:spPr>
+          <a:xfrm>
+            <a:off x="6801968" y="5143500"/>
+            <a:ext cx="1864360" cy="177800"/>
+          </a:xfrm>
+          <a:prstGeom prst="rect">
+            <a:avLst/>
+          </a:prstGeom>
+          <a:noFill/>
+          <a:ln/>
+        </p:spPr>
+        <p:txBody>
+          <a:bodyPr wrap="none" lIns="0" tIns="0" rIns="0" bIns="0" rtlCol="0" anchor="t"/>
+          <a:lstStyle/>
+          <a:p>
+            <a:pPr algn="ctr" indent="0" marL="0">
+              <a:buNone/>
+            </a:pPr>
+            <a:r>
+              <a:rPr lang="en-US" sz="1000" dirty="0">
+                <a:solidFill>
+                  <a:srgbClr val="0B0B0B"/>
+                </a:solidFill>
+                <a:latin typeface="Segoe UI" pitchFamily="34" charset="0"/>
+                <a:ea typeface="Segoe UI" pitchFamily="34" charset="-122"/>
+                <a:cs typeface="Segoe UI" pitchFamily="34" charset="-120"/>
+              </a:rPr>
+              <a:t>2024</a:t>
+            </a:r>
+            <a:endParaRPr lang="en-US" sz="1000" dirty="0"/>
+          </a:p>
+        </p:txBody>
+      </p:sp>
+      <p:sp>
+        <p:nvSpPr>
+          <p:cNvPr id="6" name="Shape 4"/>
+          <p:cNvSpPr/>
+          <p:nvPr/>
+        </p:nvSpPr>
+        <p:spPr>
+          <a:xfrm>
+            <a:off x="3383974" y="3505200"/>
+            <a:ext cx="1242907" cy="1600200"/>
+          </a:xfrm>
+          <a:prstGeom prst="rect">
+            <a:avLst/>
+          </a:prstGeom>
+          <a:solidFill>
+            <a:srgbClr val="2A78D6"/>
+          </a:solidFill>
+          <a:ln w="9525">
+            <a:solidFill>
+              <a:srgbClr val="FFFFFF"/>
+            </a:solidFill>
+            <a:prstDash val="solid"/>
+          </a:ln>
+        </p:spPr>
+      </p:sp>
+      <p:sp>
+        <p:nvSpPr>
+          <p:cNvPr id="7" name="Text 5"/>
+          <p:cNvSpPr/>
+          <p:nvPr/>
+        </p:nvSpPr>
+        <p:spPr>
+          <a:xfrm>
+            <a:off x="3333174" y="4210050"/>
+            <a:ext cx="1344507" cy="190500"/>
+          </a:xfrm>
+          <a:prstGeom prst="rect">
+            <a:avLst/>
+          </a:prstGeom>
+          <a:noFill/>
+          <a:ln/>
+        </p:spPr>
+        <p:txBody>
+          <a:bodyPr wrap="none" lIns="0" tIns="0" rIns="0" bIns="0" rtlCol="0" anchor="ctr"/>
+          <a:lstStyle/>
+          <a:p>
+            <a:pPr algn="ctr" indent="0" marL="0">
+              <a:buNone/>
+            </a:pPr>
+            <a:r>
+              <a:rPr lang="en-US" sz="1000" dirty="0">
+                <a:solidFill>
+                  <a:srgbClr val="FFFFFF"/>
+                </a:solidFill>
+                <a:latin typeface="Segoe UI" pitchFamily="34" charset="0"/>
+                <a:ea typeface="Segoe UI" pitchFamily="34" charset="-122"/>
+                <a:cs typeface="Segoe UI" pitchFamily="34" charset="-120"/>
+              </a:rPr>
+              <a:t>40</a:t>
+            </a:r>
+            <a:endParaRPr lang="en-US" sz="1000" dirty="0"/>
+          </a:p>
+        </p:txBody>
+      </p:sp>
+      <p:sp>
+        <p:nvSpPr>
+          <p:cNvPr id="8" name="Shape 6"/>
+          <p:cNvSpPr/>
+          <p:nvPr/>
+        </p:nvSpPr>
+        <p:spPr>
+          <a:xfrm>
+            <a:off x="3383974" y="3105150"/>
+            <a:ext cx="1242907" cy="400050"/>
+          </a:xfrm>
+          <a:prstGeom prst="rect">
+            <a:avLst/>
+          </a:prstGeom>
+          <a:solidFill>
+            <a:srgbClr val="1BAF7A"/>
+          </a:solidFill>
+          <a:ln w="9525">
+            <a:solidFill>
+              <a:srgbClr val="FFFFFF"/>
+            </a:solidFill>
+            <a:prstDash val="solid"/>
+          </a:ln>
+        </p:spPr>
+      </p:sp>
+      <p:sp>
+        <p:nvSpPr>
+          <p:cNvPr id="9" name="Text 7"/>
+          <p:cNvSpPr/>
+          <p:nvPr/>
+        </p:nvSpPr>
+        <p:spPr>
+          <a:xfrm>
+            <a:off x="3333174" y="3209925"/>
+            <a:ext cx="1344507" cy="190500"/>
+          </a:xfrm>
+          <a:prstGeom prst="rect">
+            <a:avLst/>
+          </a:prstGeom>
+          <a:noFill/>
+          <a:ln/>
+        </p:spPr>
+        <p:txBody>
+          <a:bodyPr wrap="none" lIns="0" tIns="0" rIns="0" bIns="0" rtlCol="0" anchor="ctr"/>
+          <a:lstStyle/>
+          <a:p>
+            <a:pPr algn="ctr" indent="0" marL="0">
+              <a:buNone/>
+            </a:pPr>
+            <a:r>
+              <a:rPr lang="en-US" sz="1000" dirty="0">
+                <a:solidFill>
+                  <a:srgbClr val="FFFFFF"/>
+                </a:solidFill>
+                <a:latin typeface="Segoe UI" pitchFamily="34" charset="0"/>
+                <a:ea typeface="Segoe UI" pitchFamily="34" charset="-122"/>
+                <a:cs typeface="Segoe UI" pitchFamily="34" charset="-120"/>
+              </a:rPr>
+              <a:t>10</a:t>
+            </a:r>
+            <a:endParaRPr lang="en-US" sz="1000" dirty="0"/>
+          </a:p>
+        </p:txBody>
+      </p:sp>
+      <p:sp>
+        <p:nvSpPr>
+          <p:cNvPr id="10" name="Shape 8"/>
+          <p:cNvSpPr/>
+          <p:nvPr/>
+        </p:nvSpPr>
+        <p:spPr>
+          <a:xfrm>
+            <a:off x="3383974" y="2865120"/>
+            <a:ext cx="1242907" cy="240030"/>
+          </a:xfrm>
+          <a:prstGeom prst="rect">
+            <a:avLst/>
+          </a:prstGeom>
+          <a:solidFill>
+            <a:srgbClr val="EDA100"/>
+          </a:solidFill>
+          <a:ln w="9525">
+            <a:solidFill>
+              <a:srgbClr val="FFFFFF"/>
+            </a:solidFill>
+            <a:prstDash val="solid"/>
+          </a:ln>
+        </p:spPr>
+      </p:sp>
+      <p:sp>
+        <p:nvSpPr>
+          <p:cNvPr id="11" name="Text 9"/>
+          <p:cNvSpPr/>
+          <p:nvPr/>
+        </p:nvSpPr>
+        <p:spPr>
+          <a:xfrm>
+            <a:off x="3333174" y="2889885"/>
+            <a:ext cx="1344507" cy="190500"/>
+          </a:xfrm>
+          <a:prstGeom prst="rect">
+            <a:avLst/>
+          </a:prstGeom>
+          <a:noFill/>
+          <a:ln/>
+        </p:spPr>
+        <p:txBody>
+          <a:bodyPr wrap="none" lIns="0" tIns="0" rIns="0" bIns="0" rtlCol="0" anchor="ctr"/>
+          <a:lstStyle/>
+          <a:p>
+            <a:pPr algn="ctr" indent="0" marL="0">
+              <a:buNone/>
+            </a:pPr>
+            <a:r>
+              <a:rPr lang="en-US" sz="1000" dirty="0">
+                <a:solidFill>
+                  <a:srgbClr val="0B0B0B"/>
+                </a:solidFill>
+                <a:latin typeface="Segoe UI" pitchFamily="34" charset="0"/>
+                <a:ea typeface="Segoe UI" pitchFamily="34" charset="-122"/>
+                <a:cs typeface="Segoe UI" pitchFamily="34" charset="-120"/>
+              </a:rPr>
+              <a:t>6</a:t>
+            </a:r>
+            <a:endParaRPr lang="en-US" sz="1000" dirty="0"/>
+          </a:p>
+        </p:txBody>
+      </p:sp>
+      <p:sp>
+        <p:nvSpPr>
+          <p:cNvPr id="12" name="Shape 10"/>
+          <p:cNvSpPr/>
+          <p:nvPr/>
+        </p:nvSpPr>
+        <p:spPr>
+          <a:xfrm>
+            <a:off x="5248334" y="3345180"/>
+            <a:ext cx="1242907" cy="1760220"/>
+          </a:xfrm>
+          <a:prstGeom prst="rect">
+            <a:avLst/>
+          </a:prstGeom>
+          <a:solidFill>
+            <a:srgbClr val="2A78D6"/>
+          </a:solidFill>
+          <a:ln w="9525">
+            <a:solidFill>
+              <a:srgbClr val="FFFFFF"/>
+            </a:solidFill>
+            <a:prstDash val="solid"/>
+          </a:ln>
+        </p:spPr>
+      </p:sp>
+      <p:sp>
+        <p:nvSpPr>
+          <p:cNvPr id="13" name="Text 11"/>
+          <p:cNvSpPr/>
+          <p:nvPr/>
+        </p:nvSpPr>
+        <p:spPr>
+          <a:xfrm>
+            <a:off x="5197534" y="4130040"/>
+            <a:ext cx="1344507" cy="190500"/>
+          </a:xfrm>
+          <a:prstGeom prst="rect">
+            <a:avLst/>
+          </a:prstGeom>
+          <a:noFill/>
+          <a:ln/>
+        </p:spPr>
+        <p:txBody>
+          <a:bodyPr wrap="none" lIns="0" tIns="0" rIns="0" bIns="0" rtlCol="0" anchor="ctr"/>
+          <a:lstStyle/>
+          <a:p>
+            <a:pPr algn="ctr" indent="0" marL="0">
+              <a:buNone/>
+            </a:pPr>
+            <a:r>
+              <a:rPr lang="en-US" sz="1000" dirty="0">
+                <a:solidFill>
+                  <a:srgbClr val="FFFFFF"/>
+                </a:solidFill>
+                <a:latin typeface="Segoe UI" pitchFamily="34" charset="0"/>
+                <a:ea typeface="Segoe UI" pitchFamily="34" charset="-122"/>
+                <a:cs typeface="Segoe UI" pitchFamily="34" charset="-120"/>
+              </a:rPr>
+              <a:t>44</a:t>
+            </a:r>
+            <a:endParaRPr lang="en-US" sz="1000" dirty="0"/>
+          </a:p>
+        </p:txBody>
+      </p:sp>
+      <p:sp>
+        <p:nvSpPr>
+          <p:cNvPr id="14" name="Shape 12"/>
+          <p:cNvSpPr/>
+          <p:nvPr/>
+        </p:nvSpPr>
+        <p:spPr>
+          <a:xfrm>
+            <a:off x="5248334" y="2785110"/>
+            <a:ext cx="1242907" cy="560070"/>
+          </a:xfrm>
+          <a:prstGeom prst="rect">
+            <a:avLst/>
+          </a:prstGeom>
+          <a:solidFill>
+            <a:srgbClr val="1BAF7A"/>
+          </a:solidFill>
+          <a:ln w="9525">
+            <a:solidFill>
+              <a:srgbClr val="FFFFFF"/>
+            </a:solidFill>
+            <a:prstDash val="solid"/>
+          </a:ln>
+        </p:spPr>
+      </p:sp>
+      <p:sp>
+        <p:nvSpPr>
+          <p:cNvPr id="15" name="Text 13"/>
+          <p:cNvSpPr/>
+          <p:nvPr/>
+        </p:nvSpPr>
+        <p:spPr>
+          <a:xfrm>
+            <a:off x="5197534" y="2969895"/>
+            <a:ext cx="1344507" cy="190500"/>
+          </a:xfrm>
+          <a:prstGeom prst="rect">
+            <a:avLst/>
+          </a:prstGeom>
+          <a:noFill/>
+          <a:ln/>
+        </p:spPr>
+        <p:txBody>
+          <a:bodyPr wrap="none" lIns="0" tIns="0" rIns="0" bIns="0" rtlCol="0" anchor="ctr"/>
+          <a:lstStyle/>
+          <a:p>
+            <a:pPr algn="ctr" indent="0" marL="0">
+              <a:buNone/>
+            </a:pPr>
+            <a:r>
+              <a:rPr lang="en-US" sz="1000" dirty="0">
+                <a:solidFill>
+                  <a:srgbClr val="FFFFFF"/>
+                </a:solidFill>
+                <a:latin typeface="Segoe UI" pitchFamily="34" charset="0"/>
+                <a:ea typeface="Segoe UI" pitchFamily="34" charset="-122"/>
+                <a:cs typeface="Segoe UI" pitchFamily="34" charset="-120"/>
+              </a:rPr>
+              <a:t>14</a:t>
+            </a:r>
+            <a:endParaRPr lang="en-US" sz="1000" dirty="0"/>
+          </a:p>
+        </p:txBody>
+      </p:sp>
+      <p:sp>
+        <p:nvSpPr>
+          <p:cNvPr id="16" name="Shape 14"/>
+          <p:cNvSpPr/>
+          <p:nvPr/>
+        </p:nvSpPr>
+        <p:spPr>
+          <a:xfrm>
+            <a:off x="5248334" y="2465070"/>
+            <a:ext cx="1242907" cy="320040"/>
+          </a:xfrm>
+          <a:prstGeom prst="rect">
+            <a:avLst/>
+          </a:prstGeom>
+          <a:solidFill>
+            <a:srgbClr val="EDA100"/>
+          </a:solidFill>
+          <a:ln w="9525">
+            <a:solidFill>
+              <a:srgbClr val="FFFFFF"/>
+            </a:solidFill>
+            <a:prstDash val="solid"/>
+          </a:ln>
+        </p:spPr>
+      </p:sp>
+      <p:sp>
+        <p:nvSpPr>
+          <p:cNvPr id="17" name="Text 15"/>
+          <p:cNvSpPr/>
+          <p:nvPr/>
+        </p:nvSpPr>
+        <p:spPr>
+          <a:xfrm>
+            <a:off x="5197534" y="2529840"/>
+            <a:ext cx="1344507" cy="190500"/>
+          </a:xfrm>
+          <a:prstGeom prst="rect">
+            <a:avLst/>
+          </a:prstGeom>
+          <a:noFill/>
+          <a:ln/>
+        </p:spPr>
+        <p:txBody>
+          <a:bodyPr wrap="none" lIns="0" tIns="0" rIns="0" bIns="0" rtlCol="0" anchor="ctr"/>
+          <a:lstStyle/>
+          <a:p>
+            <a:pPr algn="ctr" indent="0" marL="0">
+              <a:buNone/>
+            </a:pPr>
+            <a:r>
+              <a:rPr lang="en-US" sz="1000" dirty="0">
+                <a:solidFill>
+                  <a:srgbClr val="0B0B0B"/>
+                </a:solidFill>
+                <a:latin typeface="Segoe UI" pitchFamily="34" charset="0"/>
+                <a:ea typeface="Segoe UI" pitchFamily="34" charset="-122"/>
+                <a:cs typeface="Segoe UI" pitchFamily="34" charset="-120"/>
+              </a:rPr>
+              <a:t>8</a:t>
+            </a:r>
+            <a:endParaRPr lang="en-US" sz="1000" dirty="0"/>
+          </a:p>
+        </p:txBody>
+      </p:sp>
+      <p:sp>
+        <p:nvSpPr>
+          <p:cNvPr id="18" name="Shape 16"/>
+          <p:cNvSpPr/>
+          <p:nvPr/>
+        </p:nvSpPr>
+        <p:spPr>
+          <a:xfrm>
+            <a:off x="7112694" y="3105150"/>
+            <a:ext cx="1242907" cy="2000250"/>
+          </a:xfrm>
+          <a:prstGeom prst="rect">
+            <a:avLst/>
+          </a:prstGeom>
+          <a:solidFill>
+            <a:srgbClr val="2A78D6"/>
+          </a:solidFill>
+          <a:ln w="9525">
+            <a:solidFill>
+              <a:srgbClr val="FFFFFF"/>
+            </a:solidFill>
+            <a:prstDash val="solid"/>
+          </a:ln>
+        </p:spPr>
+      </p:sp>
+      <p:sp>
+        <p:nvSpPr>
+          <p:cNvPr id="19" name="Text 17"/>
+          <p:cNvSpPr/>
+          <p:nvPr/>
+        </p:nvSpPr>
+        <p:spPr>
+          <a:xfrm>
+            <a:off x="7061894" y="4010025"/>
+            <a:ext cx="1344507" cy="190500"/>
+          </a:xfrm>
+          <a:prstGeom prst="rect">
+            <a:avLst/>
+          </a:prstGeom>
+          <a:noFill/>
+          <a:ln/>
+        </p:spPr>
+        <p:txBody>
+          <a:bodyPr wrap="none" lIns="0" tIns="0" rIns="0" bIns="0" rtlCol="0" anchor="ctr"/>
+          <a:lstStyle/>
+          <a:p>
+            <a:pPr algn="ctr" indent="0" marL="0">
+              <a:buNone/>
+            </a:pPr>
+            <a:r>
+              <a:rPr lang="en-US" sz="1000" dirty="0">
+                <a:solidFill>
+                  <a:srgbClr val="FFFFFF"/>
+                </a:solidFill>
+                <a:latin typeface="Segoe UI" pitchFamily="34" charset="0"/>
+                <a:ea typeface="Segoe UI" pitchFamily="34" charset="-122"/>
+                <a:cs typeface="Segoe UI" pitchFamily="34" charset="-120"/>
+              </a:rPr>
+              <a:t>50</a:t>
+            </a:r>
+            <a:endParaRPr lang="en-US" sz="1000" dirty="0"/>
+          </a:p>
+        </p:txBody>
+      </p:sp>
+      <p:sp>
+        <p:nvSpPr>
+          <p:cNvPr id="20" name="Shape 18"/>
+          <p:cNvSpPr/>
+          <p:nvPr/>
+        </p:nvSpPr>
+        <p:spPr>
+          <a:xfrm>
+            <a:off x="7112694" y="2465070"/>
+            <a:ext cx="1242907" cy="640080"/>
+          </a:xfrm>
+          <a:prstGeom prst="rect">
+            <a:avLst/>
+          </a:prstGeom>
+          <a:solidFill>
+            <a:srgbClr val="1BAF7A"/>
+          </a:solidFill>
+          <a:ln w="9525">
+            <a:solidFill>
+              <a:srgbClr val="FFFFFF"/>
+            </a:solidFill>
+            <a:prstDash val="solid"/>
+          </a:ln>
+        </p:spPr>
+      </p:sp>
+      <p:sp>
+        <p:nvSpPr>
+          <p:cNvPr id="21" name="Text 19"/>
+          <p:cNvSpPr/>
+          <p:nvPr/>
+        </p:nvSpPr>
+        <p:spPr>
+          <a:xfrm>
+            <a:off x="7061894" y="2689860"/>
+            <a:ext cx="1344507" cy="190500"/>
+          </a:xfrm>
+          <a:prstGeom prst="rect">
+            <a:avLst/>
+          </a:prstGeom>
+          <a:noFill/>
+          <a:ln/>
+        </p:spPr>
+        <p:txBody>
+          <a:bodyPr wrap="none" lIns="0" tIns="0" rIns="0" bIns="0" rtlCol="0" anchor="ctr"/>
+          <a:lstStyle/>
+          <a:p>
+            <a:pPr algn="ctr" indent="0" marL="0">
+              <a:buNone/>
+            </a:pPr>
+            <a:r>
+              <a:rPr lang="en-US" sz="1000" dirty="0">
+                <a:solidFill>
+                  <a:srgbClr val="FFFFFF"/>
+                </a:solidFill>
+                <a:latin typeface="Segoe UI" pitchFamily="34" charset="0"/>
+                <a:ea typeface="Segoe UI" pitchFamily="34" charset="-122"/>
+                <a:cs typeface="Segoe UI" pitchFamily="34" charset="-120"/>
+              </a:rPr>
+              <a:t>16</a:t>
+            </a:r>
+            <a:endParaRPr lang="en-US" sz="1000" dirty="0"/>
+          </a:p>
+        </p:txBody>
+      </p:sp>
+      <p:sp>
+        <p:nvSpPr>
+          <p:cNvPr id="22" name="Shape 20"/>
+          <p:cNvSpPr/>
+          <p:nvPr/>
+        </p:nvSpPr>
+        <p:spPr>
+          <a:xfrm>
+            <a:off x="7112694" y="2105025"/>
+            <a:ext cx="1242907" cy="360045"/>
+          </a:xfrm>
+          <a:prstGeom prst="rect">
+            <a:avLst/>
+          </a:prstGeom>
+          <a:solidFill>
+            <a:srgbClr val="EDA100"/>
+          </a:solidFill>
+          <a:ln w="9525">
+            <a:solidFill>
+              <a:srgbClr val="FFFFFF"/>
+            </a:solidFill>
+            <a:prstDash val="solid"/>
+          </a:ln>
+        </p:spPr>
+      </p:sp>
+      <p:sp>
+        <p:nvSpPr>
+          <p:cNvPr id="23" name="Text 21"/>
+          <p:cNvSpPr/>
+          <p:nvPr/>
+        </p:nvSpPr>
+        <p:spPr>
+          <a:xfrm>
+            <a:off x="7061894" y="2189798"/>
+            <a:ext cx="1344507" cy="190500"/>
+          </a:xfrm>
+          <a:prstGeom prst="rect">
+            <a:avLst/>
+          </a:prstGeom>
+          <a:noFill/>
+          <a:ln/>
+        </p:spPr>
+        <p:txBody>
+          <a:bodyPr wrap="none" lIns="0" tIns="0" rIns="0" bIns="0" rtlCol="0" anchor="ctr"/>
+          <a:lstStyle/>
+          <a:p>
+            <a:pPr algn="ctr" indent="0" marL="0">
+              <a:buNone/>
+            </a:pPr>
+            <a:r>
+              <a:rPr lang="en-US" sz="1000" dirty="0">
+                <a:solidFill>
+                  <a:srgbClr val="0B0B0B"/>
+                </a:solidFill>
+                <a:latin typeface="Segoe UI" pitchFamily="34" charset="0"/>
+                <a:ea typeface="Segoe UI" pitchFamily="34" charset="-122"/>
+                <a:cs typeface="Segoe UI" pitchFamily="34" charset="-120"/>
+              </a:rPr>
+              <a:t>9</a:t>
+            </a:r>
+            <a:endParaRPr lang="en-US" sz="1000" dirty="0"/>
+          </a:p>
+        </p:txBody>
+      </p:sp>
+      <p:sp>
+        <p:nvSpPr>
+          <p:cNvPr id="24" name="Shape 22"/>
+          <p:cNvSpPr/>
+          <p:nvPr/>
+        </p:nvSpPr>
+        <p:spPr>
+          <a:xfrm flipV="1">
+            <a:off x="4626881" y="3345180"/>
+            <a:ext cx="621453" cy="160020"/>
+          </a:xfrm>
+          <a:prstGeom prst="line">
+            <a:avLst/>
+          </a:prstGeom>
+          <a:noFill/>
+          <a:ln w="9525">
+            <a:solidFill>
+              <a:srgbClr val="52514E"/>
+            </a:solidFill>
+            <a:prstDash val="solid"/>
+          </a:ln>
+        </p:spPr>
+      </p:sp>
+      <p:sp>
+        <p:nvSpPr>
+          <p:cNvPr id="25" name="Shape 23"/>
+          <p:cNvSpPr/>
+          <p:nvPr/>
+        </p:nvSpPr>
+        <p:spPr>
+          <a:xfrm flipV="1">
+            <a:off x="4626881" y="2785110"/>
+            <a:ext cx="621453" cy="320040"/>
+          </a:xfrm>
+          <a:prstGeom prst="line">
+            <a:avLst/>
+          </a:prstGeom>
+          <a:noFill/>
+          <a:ln w="9525">
+            <a:solidFill>
+              <a:srgbClr val="52514E"/>
+            </a:solidFill>
+            <a:prstDash val="solid"/>
+          </a:ln>
+        </p:spPr>
+      </p:sp>
+      <p:sp>
+        <p:nvSpPr>
+          <p:cNvPr id="26" name="Shape 24"/>
+          <p:cNvSpPr/>
+          <p:nvPr/>
+        </p:nvSpPr>
+        <p:spPr>
+          <a:xfrm flipV="1">
+            <a:off x="4626881" y="2465070"/>
+            <a:ext cx="621453" cy="400050"/>
+          </a:xfrm>
+          <a:prstGeom prst="line">
+            <a:avLst/>
+          </a:prstGeom>
+          <a:noFill/>
+          <a:ln w="9525">
+            <a:solidFill>
+              <a:srgbClr val="52514E"/>
+            </a:solidFill>
+            <a:prstDash val="solid"/>
+          </a:ln>
+        </p:spPr>
+      </p:sp>
+      <p:sp>
+        <p:nvSpPr>
+          <p:cNvPr id="27" name="Shape 25"/>
+          <p:cNvSpPr/>
+          <p:nvPr/>
+        </p:nvSpPr>
+        <p:spPr>
+          <a:xfrm flipV="1">
+            <a:off x="6491241" y="3105150"/>
+            <a:ext cx="621453" cy="240030"/>
+          </a:xfrm>
+          <a:prstGeom prst="line">
+            <a:avLst/>
+          </a:prstGeom>
+          <a:noFill/>
+          <a:ln w="9525">
+            <a:solidFill>
+              <a:srgbClr val="52514E"/>
+            </a:solidFill>
+            <a:prstDash val="solid"/>
+          </a:ln>
+        </p:spPr>
+      </p:sp>
+      <p:sp>
+        <p:nvSpPr>
+          <p:cNvPr id="28" name="Shape 26"/>
+          <p:cNvSpPr/>
+          <p:nvPr/>
+        </p:nvSpPr>
+        <p:spPr>
+          <a:xfrm flipV="1">
+            <a:off x="6491241" y="2465070"/>
+            <a:ext cx="621453" cy="320040"/>
+          </a:xfrm>
+          <a:prstGeom prst="line">
+            <a:avLst/>
+          </a:prstGeom>
+          <a:noFill/>
+          <a:ln w="9525">
+            <a:solidFill>
+              <a:srgbClr val="52514E"/>
+            </a:solidFill>
+            <a:prstDash val="solid"/>
+          </a:ln>
+        </p:spPr>
+      </p:sp>
+      <p:sp>
+        <p:nvSpPr>
+          <p:cNvPr id="29" name="Shape 27"/>
+          <p:cNvSpPr/>
+          <p:nvPr/>
+        </p:nvSpPr>
+        <p:spPr>
+          <a:xfrm flipV="1">
+            <a:off x="6491241" y="2105025"/>
+            <a:ext cx="621453" cy="360045"/>
+          </a:xfrm>
+          <a:prstGeom prst="line">
+            <a:avLst/>
+          </a:prstGeom>
+          <a:noFill/>
+          <a:ln w="9525">
+            <a:solidFill>
+              <a:srgbClr val="52514E"/>
+            </a:solidFill>
+            <a:prstDash val="solid"/>
+          </a:ln>
+        </p:spPr>
+      </p:sp>
+      <p:sp>
+        <p:nvSpPr>
+          <p:cNvPr id="30" name="Shape 28"/>
+          <p:cNvSpPr/>
+          <p:nvPr/>
+        </p:nvSpPr>
+        <p:spPr>
+          <a:xfrm>
+            <a:off x="3073248" y="5105400"/>
+            <a:ext cx="5593080" cy="0"/>
+          </a:xfrm>
+          <a:prstGeom prst="line">
+            <a:avLst/>
+          </a:prstGeom>
+          <a:noFill/>
+          <a:ln w="12700">
+            <a:solidFill>
+              <a:srgbClr val="A5A49E"/>
+            </a:solidFill>
+            <a:prstDash val="solid"/>
+          </a:ln>
+        </p:spPr>
+      </p:sp>
+      <p:sp>
+        <p:nvSpPr>
+          <p:cNvPr id="31" name="Text 29"/>
+          <p:cNvSpPr/>
+          <p:nvPr/>
+        </p:nvSpPr>
+        <p:spPr>
+          <a:xfrm>
+            <a:off x="8717128" y="2199323"/>
+            <a:ext cx="426720" cy="171450"/>
+          </a:xfrm>
+          <a:prstGeom prst="rect">
+            <a:avLst/>
+          </a:prstGeom>
+          <a:noFill/>
+          <a:ln/>
+        </p:spPr>
+        <p:txBody>
+          <a:bodyPr wrap="none" lIns="0" tIns="0" rIns="0" bIns="0" rtlCol="0" anchor="ctr"/>
+          <a:lstStyle/>
+          <a:p>
+            <a:pPr algn="l" indent="0" marL="0">
+              <a:buNone/>
+            </a:pPr>
+            <a:r>
+              <a:rPr lang="en-US" sz="1000" dirty="0">
+                <a:solidFill>
+                  <a:srgbClr val="0B0B0B"/>
+                </a:solidFill>
+                <a:latin typeface="Segoe UI" pitchFamily="34" charset="0"/>
+                <a:ea typeface="Segoe UI" pitchFamily="34" charset="-122"/>
+                <a:cs typeface="Segoe UI" pitchFamily="34" charset="-120"/>
+              </a:rPr>
+              <a:t>Risk</a:t>
+            </a:r>
+            <a:endParaRPr lang="en-US" sz="1000" dirty="0"/>
+          </a:p>
+        </p:txBody>
+      </p:sp>
+      <p:sp>
+        <p:nvSpPr>
+          <p:cNvPr id="32" name="Text 30"/>
+          <p:cNvSpPr/>
+          <p:nvPr/>
+        </p:nvSpPr>
+        <p:spPr>
+          <a:xfrm>
+            <a:off x="8717128" y="2699385"/>
+            <a:ext cx="426720" cy="171450"/>
+          </a:xfrm>
+          <a:prstGeom prst="rect">
+            <a:avLst/>
+          </a:prstGeom>
+          <a:noFill/>
+          <a:ln/>
+        </p:spPr>
+        <p:txBody>
+          <a:bodyPr wrap="none" lIns="0" tIns="0" rIns="0" bIns="0" rtlCol="0" anchor="ctr"/>
+          <a:lstStyle/>
+          <a:p>
+            <a:pPr algn="l" indent="0" marL="0">
+              <a:buNone/>
+            </a:pPr>
+            <a:r>
+              <a:rPr lang="en-US" sz="1000" dirty="0">
+                <a:solidFill>
+                  <a:srgbClr val="0B0B0B"/>
+                </a:solidFill>
+                <a:latin typeface="Segoe UI" pitchFamily="34" charset="0"/>
+                <a:ea typeface="Segoe UI" pitchFamily="34" charset="-122"/>
+                <a:cs typeface="Segoe UI" pitchFamily="34" charset="-120"/>
+              </a:rPr>
+              <a:t>Plan</a:t>
+            </a:r>
+            <a:endParaRPr lang="en-US" sz="1000" dirty="0"/>
+          </a:p>
+        </p:txBody>
+      </p:sp>
+      <p:sp>
+        <p:nvSpPr>
+          <p:cNvPr id="33" name="Text 31"/>
+          <p:cNvSpPr/>
+          <p:nvPr/>
+        </p:nvSpPr>
+        <p:spPr>
+          <a:xfrm>
+            <a:off x="8717128" y="4019550"/>
+            <a:ext cx="426720" cy="171450"/>
+          </a:xfrm>
+          <a:prstGeom prst="rect">
+            <a:avLst/>
+          </a:prstGeom>
+          <a:noFill/>
+          <a:ln/>
+        </p:spPr>
+        <p:txBody>
+          <a:bodyPr wrap="none" lIns="0" tIns="0" rIns="0" bIns="0" rtlCol="0" anchor="ctr"/>
+          <a:lstStyle/>
+          <a:p>
+            <a:pPr algn="l" indent="0" marL="0">
+              <a:buNone/>
+            </a:pPr>
+            <a:r>
+              <a:rPr lang="en-US" sz="1000" dirty="0">
+                <a:solidFill>
+                  <a:srgbClr val="0B0B0B"/>
+                </a:solidFill>
+                <a:latin typeface="Segoe UI" pitchFamily="34" charset="0"/>
+                <a:ea typeface="Segoe UI" pitchFamily="34" charset="-122"/>
+                <a:cs typeface="Segoe UI" pitchFamily="34" charset="-120"/>
+              </a:rPr>
+              <a:t>Base</a:t>
+            </a:r>
+            <a:endParaRPr lang="en-US" sz="1000" dirty="0"/>
+          </a:p>
+        </p:txBody>
+      </p:sp>
+    </p:spTree>
+  </p:cSld>
+  <p:clrMapOvr>
+    <a:masterClrMapping/>
+  </p:clrMapOvr>
+</p:sld>
+</file>
+
+<file path=ppt/slides/slide36.xml><?xml version="1.0" encoding="utf-8"?>
+<p:sld xmlns:a="http://schemas.openxmlformats.org/drawingml/2006/main" xmlns:r="http://schemas.openxmlformats.org/officeDocument/2006/relationships" xmlns:p="http://schemas.openxmlformats.org/presentationml/2006/main">
+  <p:cSld name="Slide 36">
     <p:bg>
       <p:bgPr>
         <a:solidFill>

--- a/examples/showcase.pptx
+++ b/examples/showcase.pptx
@@ -19002,7 +19002,7 @@
         </p:nvSpPr>
         <p:spPr>
           <a:xfrm>
-            <a:off x="4720565" y="4917315"/>
+            <a:off x="4720565" y="4749800"/>
             <a:ext cx="1239266" cy="368300"/>
           </a:xfrm>
           <a:prstGeom prst="rect">
@@ -19022,7 +19022,7 @@
         </p:nvSpPr>
         <p:spPr>
           <a:xfrm>
-            <a:off x="4745965" y="4930015"/>
+            <a:off x="4745965" y="4762500"/>
             <a:ext cx="1188466" cy="177800"/>
           </a:xfrm>
           <a:prstGeom prst="rect">
@@ -19061,7 +19061,7 @@
         </p:nvSpPr>
         <p:spPr>
           <a:xfrm>
-            <a:off x="4745965" y="5101465"/>
+            <a:off x="4745965" y="4933950"/>
             <a:ext cx="1188466" cy="177800"/>
           </a:xfrm>
           <a:prstGeom prst="rect">
@@ -19238,7 +19238,7 @@
         <p:spPr>
           <a:xfrm>
             <a:off x="6231865" y="4177016"/>
-            <a:ext cx="1239266" cy="740298"/>
+            <a:ext cx="1239266" cy="714898"/>
           </a:xfrm>
           <a:prstGeom prst="rect">
             <a:avLst/>
@@ -19257,7 +19257,7 @@
         </p:nvSpPr>
         <p:spPr>
           <a:xfrm>
-            <a:off x="6257265" y="4375715"/>
+            <a:off x="6257265" y="4363015"/>
             <a:ext cx="1188466" cy="177800"/>
           </a:xfrm>
           <a:prstGeom prst="rect">
@@ -19296,7 +19296,7 @@
         </p:nvSpPr>
         <p:spPr>
           <a:xfrm>
-            <a:off x="6257265" y="4547165"/>
+            <a:off x="6257265" y="4534465"/>
             <a:ext cx="1188466" cy="177800"/>
           </a:xfrm>
           <a:prstGeom prst="rect">
@@ -19473,7 +19473,7 @@
         <p:spPr>
           <a:xfrm>
             <a:off x="7743165" y="3736872"/>
-            <a:ext cx="1239266" cy="440144"/>
+            <a:ext cx="1239266" cy="414744"/>
           </a:xfrm>
           <a:prstGeom prst="rect">
             <a:avLst/>
@@ -19492,7 +19492,7 @@
         </p:nvSpPr>
         <p:spPr>
           <a:xfrm>
-            <a:off x="7768565" y="3785494"/>
+            <a:off x="7768565" y="3772794"/>
             <a:ext cx="1188466" cy="177800"/>
           </a:xfrm>
           <a:prstGeom prst="rect">
@@ -19531,7 +19531,7 @@
         </p:nvSpPr>
         <p:spPr>
           <a:xfrm>
-            <a:off x="7768565" y="3956944"/>
+            <a:off x="7768565" y="3944244"/>
             <a:ext cx="1188466" cy="177800"/>
           </a:xfrm>
           <a:prstGeom prst="rect">

--- a/examples/showcase.pptx
+++ b/examples/showcase.pptx
@@ -19002,8 +19002,8 @@
         </p:nvSpPr>
         <p:spPr>
           <a:xfrm>
-            <a:off x="4720565" y="4749800"/>
-            <a:ext cx="1239266" cy="368300"/>
+            <a:off x="4720565" y="4891915"/>
+            <a:ext cx="1239266" cy="226185"/>
           </a:xfrm>
           <a:prstGeom prst="rect">
             <a:avLst/>
@@ -19011,7 +19011,12 @@
           <a:solidFill>
             <a:srgbClr val="898781"/>
           </a:solidFill>
-          <a:ln/>
+          <a:ln w="9525">
+            <a:solidFill>
+              <a:srgbClr val="FFFFFF"/>
+            </a:solidFill>
+            <a:prstDash val="solid"/>
+          </a:ln>
         </p:spPr>
       </p:sp>
       <p:sp>
@@ -19022,8 +19027,8 @@
         </p:nvSpPr>
         <p:spPr>
           <a:xfrm>
-            <a:off x="4745965" y="4762500"/>
-            <a:ext cx="1188466" cy="177800"/>
+            <a:off x="4745965" y="4891915"/>
+            <a:ext cx="1188466" cy="226185"/>
           </a:xfrm>
           <a:prstGeom prst="rect">
             <a:avLst/>
@@ -19047,48 +19052,48 @@
                 <a:ea typeface="Segoe UI" pitchFamily="34" charset="-122"/>
                 <a:cs typeface="Segoe UI" pitchFamily="34" charset="-120"/>
               </a:rPr>
+              <a:t>370 (7.4%)</a:t>
+            </a:r>
+            <a:endParaRPr lang="en-US" sz="900" dirty="0"/>
+          </a:p>
+        </p:txBody>
+      </p:sp>
+      <p:sp>
+        <p:nvSpPr>
+          <p:cNvPr id="16" name="Text 14"/>
+          <p:cNvSpPr/>
+          <p:nvPr/>
+        </p:nvSpPr>
+        <p:spPr>
+          <a:xfrm>
+            <a:off x="4584548" y="5130800"/>
+            <a:ext cx="1511300" cy="152400"/>
+          </a:xfrm>
+          <a:prstGeom prst="rect">
+            <a:avLst/>
+          </a:prstGeom>
+          <a:noFill/>
+          <a:ln/>
+        </p:spPr>
+        <p:txBody>
+          <a:bodyPr wrap="none" lIns="0" tIns="0" rIns="0" bIns="0" rtlCol="0" anchor="t"/>
+          <a:lstStyle/>
+          <a:p>
+            <a:pPr algn="ctr" indent="0" marL="0">
+              <a:buNone/>
+            </a:pPr>
+            <a:r>
+              <a:rPr lang="en-US" sz="850" dirty="0">
+                <a:solidFill>
+                  <a:srgbClr val="0B0B0B"/>
+                </a:solidFill>
+                <a:latin typeface="Segoe UI" pitchFamily="34" charset="0"/>
+                <a:ea typeface="Segoe UI" pitchFamily="34" charset="-122"/>
+                <a:cs typeface="Segoe UI" pitchFamily="34" charset="-120"/>
+              </a:rPr>
               <a:t>Dropped contacts</a:t>
             </a:r>
-            <a:endParaRPr lang="en-US" sz="900" dirty="0"/>
-          </a:p>
-        </p:txBody>
-      </p:sp>
-      <p:sp>
-        <p:nvSpPr>
-          <p:cNvPr id="16" name="Text 14"/>
-          <p:cNvSpPr/>
-          <p:nvPr/>
-        </p:nvSpPr>
-        <p:spPr>
-          <a:xfrm>
-            <a:off x="4745965" y="4933950"/>
-            <a:ext cx="1188466" cy="177800"/>
-          </a:xfrm>
-          <a:prstGeom prst="rect">
-            <a:avLst/>
-          </a:prstGeom>
-          <a:noFill/>
-          <a:ln/>
-        </p:spPr>
-        <p:txBody>
-          <a:bodyPr wrap="none" lIns="0" tIns="0" rIns="0" bIns="0" rtlCol="0" anchor="ctr"/>
-          <a:lstStyle/>
-          <a:p>
-            <a:pPr algn="ctr" indent="0" marL="0">
-              <a:buNone/>
-            </a:pPr>
-            <a:r>
-              <a:rPr lang="en-US" sz="900" dirty="0">
-                <a:solidFill>
-                  <a:srgbClr val="FFFFFF"/>
-                </a:solidFill>
-                <a:latin typeface="Segoe UI" pitchFamily="34" charset="0"/>
-                <a:ea typeface="Segoe UI" pitchFamily="34" charset="-122"/>
-                <a:cs typeface="Segoe UI" pitchFamily="34" charset="-120"/>
-              </a:rPr>
-              <a:t>370 (7.4%)</a:t>
-            </a:r>
-            <a:endParaRPr lang="en-US" sz="900" dirty="0"/>
+            <a:endParaRPr lang="en-US" sz="850" dirty="0"/>
           </a:p>
         </p:txBody>
       </p:sp>
@@ -19237,8 +19242,8 @@
         </p:nvSpPr>
         <p:spPr>
           <a:xfrm>
-            <a:off x="6231865" y="4177016"/>
-            <a:ext cx="1239266" cy="714898"/>
+            <a:off x="6231865" y="4151616"/>
+            <a:ext cx="1239266" cy="740298"/>
           </a:xfrm>
           <a:prstGeom prst="rect">
             <a:avLst/>
@@ -19246,7 +19251,12 @@
           <a:solidFill>
             <a:srgbClr val="898781"/>
           </a:solidFill>
-          <a:ln/>
+          <a:ln w="9525">
+            <a:solidFill>
+              <a:srgbClr val="FFFFFF"/>
+            </a:solidFill>
+            <a:prstDash val="solid"/>
+          </a:ln>
         </p:spPr>
       </p:sp>
       <p:sp>
@@ -19257,7 +19267,7 @@
         </p:nvSpPr>
         <p:spPr>
           <a:xfrm>
-            <a:off x="6257265" y="4363015"/>
+            <a:off x="6257265" y="4350315"/>
             <a:ext cx="1188466" cy="177800"/>
           </a:xfrm>
           <a:prstGeom prst="rect">
@@ -19296,7 +19306,7 @@
         </p:nvSpPr>
         <p:spPr>
           <a:xfrm>
-            <a:off x="6257265" y="4534465"/>
+            <a:off x="6257265" y="4521765"/>
             <a:ext cx="1188466" cy="177800"/>
           </a:xfrm>
           <a:prstGeom prst="rect">
@@ -19472,8 +19482,8 @@
         </p:nvSpPr>
         <p:spPr>
           <a:xfrm>
-            <a:off x="7743165" y="3736872"/>
-            <a:ext cx="1239266" cy="414744"/>
+            <a:off x="7743165" y="3711472"/>
+            <a:ext cx="1239266" cy="440144"/>
           </a:xfrm>
           <a:prstGeom prst="rect">
             <a:avLst/>
@@ -19481,7 +19491,12 @@
           <a:solidFill>
             <a:srgbClr val="898781"/>
           </a:solidFill>
-          <a:ln/>
+          <a:ln w="9525">
+            <a:solidFill>
+              <a:srgbClr val="FFFFFF"/>
+            </a:solidFill>
+            <a:prstDash val="solid"/>
+          </a:ln>
         </p:spPr>
       </p:sp>
       <p:sp>
@@ -19492,7 +19507,7 @@
         </p:nvSpPr>
         <p:spPr>
           <a:xfrm>
-            <a:off x="7768565" y="3772794"/>
+            <a:off x="7768565" y="3760094"/>
             <a:ext cx="1188466" cy="177800"/>
           </a:xfrm>
           <a:prstGeom prst="rect">
@@ -19531,7 +19546,7 @@
         </p:nvSpPr>
         <p:spPr>
           <a:xfrm>
-            <a:off x="7768565" y="3944244"/>
+            <a:off x="7768565" y="3931544"/>
             <a:ext cx="1188466" cy="177800"/>
           </a:xfrm>
           <a:prstGeom prst="rect">

--- a/examples/showcase.pptx
+++ b/examples/showcase.pptx
@@ -18649,8 +18649,8 @@
         </p:nvSpPr>
         <p:spPr>
           <a:xfrm>
-            <a:off x="3209265" y="1803400"/>
-            <a:ext cx="2750566" cy="190500"/>
+            <a:off x="3141256" y="1803400"/>
+            <a:ext cx="2886583" cy="190500"/>
           </a:xfrm>
           <a:prstGeom prst="rect">
             <a:avLst/>
@@ -18669,8 +18669,8 @@
         </p:nvSpPr>
         <p:spPr>
           <a:xfrm>
-            <a:off x="3209265" y="1803400"/>
-            <a:ext cx="2750566" cy="190500"/>
+            <a:off x="3141256" y="1803400"/>
+            <a:ext cx="2886583" cy="190500"/>
           </a:xfrm>
           <a:prstGeom prst="rect">
             <a:avLst/>
@@ -18708,8 +18708,8 @@
         </p:nvSpPr>
         <p:spPr>
           <a:xfrm>
-            <a:off x="6231865" y="1803400"/>
-            <a:ext cx="2750566" cy="190500"/>
+            <a:off x="6163856" y="1803400"/>
+            <a:ext cx="2886583" cy="190500"/>
           </a:xfrm>
           <a:prstGeom prst="rect">
             <a:avLst/>
@@ -18728,8 +18728,8 @@
         </p:nvSpPr>
         <p:spPr>
           <a:xfrm>
-            <a:off x="6231865" y="1803400"/>
-            <a:ext cx="2750566" cy="190500"/>
+            <a:off x="6163856" y="1803400"/>
+            <a:ext cx="2886583" cy="190500"/>
           </a:xfrm>
           <a:prstGeom prst="rect">
             <a:avLst/>
@@ -18767,8 +18767,8 @@
         </p:nvSpPr>
         <p:spPr>
           <a:xfrm>
-            <a:off x="3209265" y="2070100"/>
-            <a:ext cx="1239266" cy="3048000"/>
+            <a:off x="3141256" y="2070100"/>
+            <a:ext cx="1375283" cy="3048000"/>
           </a:xfrm>
           <a:prstGeom prst="rect">
             <a:avLst/>
@@ -18787,8 +18787,8 @@
         </p:nvSpPr>
         <p:spPr>
           <a:xfrm>
-            <a:off x="3234665" y="2618740"/>
-            <a:ext cx="1188466" cy="177800"/>
+            <a:off x="3166656" y="2618740"/>
+            <a:ext cx="1324483" cy="177800"/>
           </a:xfrm>
           <a:prstGeom prst="rect">
             <a:avLst/>
@@ -18826,8 +18826,8 @@
         </p:nvSpPr>
         <p:spPr>
           <a:xfrm>
-            <a:off x="3234665" y="3498850"/>
-            <a:ext cx="1188466" cy="177800"/>
+            <a:off x="3166656" y="3498850"/>
+            <a:ext cx="1324483" cy="177800"/>
           </a:xfrm>
           <a:prstGeom prst="rect">
             <a:avLst/>
@@ -18865,8 +18865,8 @@
         </p:nvSpPr>
         <p:spPr>
           <a:xfrm>
-            <a:off x="4720565" y="2070100"/>
-            <a:ext cx="1239266" cy="2821815"/>
+            <a:off x="4652556" y="2070100"/>
+            <a:ext cx="1375283" cy="2821815"/>
           </a:xfrm>
           <a:prstGeom prst="rect">
             <a:avLst/>
@@ -18885,8 +18885,8 @@
         </p:nvSpPr>
         <p:spPr>
           <a:xfrm>
-            <a:off x="4745965" y="2578027"/>
-            <a:ext cx="1188466" cy="177800"/>
+            <a:off x="4677956" y="2578027"/>
+            <a:ext cx="1324483" cy="177800"/>
           </a:xfrm>
           <a:prstGeom prst="rect">
             <a:avLst/>
@@ -18924,8 +18924,8 @@
         </p:nvSpPr>
         <p:spPr>
           <a:xfrm>
-            <a:off x="4745965" y="3385757"/>
-            <a:ext cx="1188466" cy="177800"/>
+            <a:off x="4677956" y="3385757"/>
+            <a:ext cx="1324483" cy="177800"/>
           </a:xfrm>
           <a:prstGeom prst="rect">
             <a:avLst/>
@@ -18963,8 +18963,8 @@
         </p:nvSpPr>
         <p:spPr>
           <a:xfrm>
-            <a:off x="4745965" y="3569907"/>
-            <a:ext cx="1188466" cy="177800"/>
+            <a:off x="4677956" y="3569907"/>
+            <a:ext cx="1324483" cy="177800"/>
           </a:xfrm>
           <a:prstGeom prst="rect">
             <a:avLst/>
@@ -19002,8 +19002,8 @@
         </p:nvSpPr>
         <p:spPr>
           <a:xfrm>
-            <a:off x="4720565" y="4891915"/>
-            <a:ext cx="1239266" cy="226185"/>
+            <a:off x="4652556" y="4891915"/>
+            <a:ext cx="1375283" cy="226185"/>
           </a:xfrm>
           <a:prstGeom prst="rect">
             <a:avLst/>
@@ -19027,8 +19027,8 @@
         </p:nvSpPr>
         <p:spPr>
           <a:xfrm>
-            <a:off x="4745965" y="4891915"/>
-            <a:ext cx="1188466" cy="226185"/>
+            <a:off x="4677956" y="4891915"/>
+            <a:ext cx="1324483" cy="226185"/>
           </a:xfrm>
           <a:prstGeom prst="rect">
             <a:avLst/>
@@ -19105,8 +19105,8 @@
         </p:nvSpPr>
         <p:spPr>
           <a:xfrm>
-            <a:off x="6231865" y="2070100"/>
-            <a:ext cx="1239266" cy="2081516"/>
+            <a:off x="6163856" y="2070100"/>
+            <a:ext cx="1375283" cy="2081516"/>
           </a:xfrm>
           <a:prstGeom prst="rect">
             <a:avLst/>
@@ -19125,8 +19125,8 @@
         </p:nvSpPr>
         <p:spPr>
           <a:xfrm>
-            <a:off x="6257265" y="2444773"/>
-            <a:ext cx="1188466" cy="177800"/>
+            <a:off x="6189256" y="2444773"/>
+            <a:ext cx="1324483" cy="177800"/>
           </a:xfrm>
           <a:prstGeom prst="rect">
             <a:avLst/>
@@ -19164,8 +19164,8 @@
         </p:nvSpPr>
         <p:spPr>
           <a:xfrm>
-            <a:off x="6257265" y="3015608"/>
-            <a:ext cx="1188466" cy="177800"/>
+            <a:off x="6189256" y="3015608"/>
+            <a:ext cx="1324483" cy="177800"/>
           </a:xfrm>
           <a:prstGeom prst="rect">
             <a:avLst/>
@@ -19203,8 +19203,8 @@
         </p:nvSpPr>
         <p:spPr>
           <a:xfrm>
-            <a:off x="6257265" y="3199758"/>
-            <a:ext cx="1188466" cy="177800"/>
+            <a:off x="6189256" y="3199758"/>
+            <a:ext cx="1324483" cy="177800"/>
           </a:xfrm>
           <a:prstGeom prst="rect">
             <a:avLst/>
@@ -19242,8 +19242,8 @@
         </p:nvSpPr>
         <p:spPr>
           <a:xfrm>
-            <a:off x="6231865" y="4151616"/>
-            <a:ext cx="1239266" cy="740298"/>
+            <a:off x="6163856" y="4151616"/>
+            <a:ext cx="1375283" cy="740298"/>
           </a:xfrm>
           <a:prstGeom prst="rect">
             <a:avLst/>
@@ -19267,8 +19267,8 @@
         </p:nvSpPr>
         <p:spPr>
           <a:xfrm>
-            <a:off x="6257265" y="4350315"/>
-            <a:ext cx="1188466" cy="177800"/>
+            <a:off x="6189256" y="4350315"/>
+            <a:ext cx="1324483" cy="177800"/>
           </a:xfrm>
           <a:prstGeom prst="rect">
             <a:avLst/>
@@ -19306,8 +19306,8 @@
         </p:nvSpPr>
         <p:spPr>
           <a:xfrm>
-            <a:off x="6257265" y="4521765"/>
-            <a:ext cx="1188466" cy="177800"/>
+            <a:off x="6189256" y="4521765"/>
+            <a:ext cx="1324483" cy="177800"/>
           </a:xfrm>
           <a:prstGeom prst="rect">
             <a:avLst/>
@@ -19345,8 +19345,8 @@
         </p:nvSpPr>
         <p:spPr>
           <a:xfrm>
-            <a:off x="7743165" y="2070100"/>
-            <a:ext cx="1239266" cy="1641372"/>
+            <a:off x="7675156" y="2070100"/>
+            <a:ext cx="1375283" cy="1641372"/>
           </a:xfrm>
           <a:prstGeom prst="rect">
             <a:avLst/>
@@ -19365,8 +19365,8 @@
         </p:nvSpPr>
         <p:spPr>
           <a:xfrm>
-            <a:off x="7768565" y="2365547"/>
-            <a:ext cx="1188466" cy="177800"/>
+            <a:off x="7700556" y="2365547"/>
+            <a:ext cx="1324483" cy="177800"/>
           </a:xfrm>
           <a:prstGeom prst="rect">
             <a:avLst/>
@@ -19404,8 +19404,8 @@
         </p:nvSpPr>
         <p:spPr>
           <a:xfrm>
-            <a:off x="7768565" y="2795536"/>
-            <a:ext cx="1188466" cy="177800"/>
+            <a:off x="7700556" y="2795536"/>
+            <a:ext cx="1324483" cy="177800"/>
           </a:xfrm>
           <a:prstGeom prst="rect">
             <a:avLst/>
@@ -19443,8 +19443,8 @@
         </p:nvSpPr>
         <p:spPr>
           <a:xfrm>
-            <a:off x="7768565" y="2979686"/>
-            <a:ext cx="1188466" cy="177800"/>
+            <a:off x="7700556" y="2979686"/>
+            <a:ext cx="1324483" cy="177800"/>
           </a:xfrm>
           <a:prstGeom prst="rect">
             <a:avLst/>
@@ -19482,8 +19482,8 @@
         </p:nvSpPr>
         <p:spPr>
           <a:xfrm>
-            <a:off x="7743165" y="3711472"/>
-            <a:ext cx="1239266" cy="440144"/>
+            <a:off x="7675156" y="3711472"/>
+            <a:ext cx="1375283" cy="440144"/>
           </a:xfrm>
           <a:prstGeom prst="rect">
             <a:avLst/>
@@ -19507,8 +19507,8 @@
         </p:nvSpPr>
         <p:spPr>
           <a:xfrm>
-            <a:off x="7768565" y="3760094"/>
-            <a:ext cx="1188466" cy="177800"/>
+            <a:off x="7700556" y="3760094"/>
+            <a:ext cx="1324483" cy="177800"/>
           </a:xfrm>
           <a:prstGeom prst="rect">
             <a:avLst/>
@@ -19546,8 +19546,8 @@
         </p:nvSpPr>
         <p:spPr>
           <a:xfrm>
-            <a:off x="7768565" y="3931544"/>
-            <a:ext cx="1188466" cy="177800"/>
+            <a:off x="7700556" y="3931544"/>
+            <a:ext cx="1324483" cy="177800"/>
           </a:xfrm>
           <a:prstGeom prst="rect">
             <a:avLst/>
